--- a/4_Reports/Code_Version.pptx
+++ b/4_Reports/Code_Version.pptx
@@ -7,6 +7,8 @@
   <p:sldIdLst>
     <p:sldId id="256" r:id="rId3"/>
     <p:sldId id="257" r:id="rId4"/>
+    <p:sldId id="258" r:id="rId5"/>
+    <p:sldId id="259" r:id="rId6"/>
   </p:sldIdLst>
   <p:sldSz cx="12192000" cy="6858000"/>
   <p:notesSz cx="6858000" cy="9144000"/>
@@ -2947,7 +2949,7 @@
         </p:blipFill>
         <p:spPr>
           <a:xfrm>
-            <a:off x="795020" y="598170"/>
+            <a:off x="795020" y="963295"/>
             <a:ext cx="5695950" cy="4305300"/>
           </a:xfrm>
           <a:prstGeom prst="rect">
@@ -3111,6 +3113,35 @@
               <a:t>），但会掩盖物理量级信息；若保留物理解释性，考虑在模型里显式加入尺度参数或用标准化但保留逆变换用于解释。</a:t>
             </a:r>
             <a:endParaRPr lang="zh-CN" altLang="en-US"/>
+          </a:p>
+        </p:txBody>
+      </p:sp>
+      <p:sp>
+        <p:nvSpPr>
+          <p:cNvPr id="3" name="文本框 2"/>
+          <p:cNvSpPr txBox="1"/>
+          <p:nvPr/>
+        </p:nvSpPr>
+        <p:spPr>
+          <a:xfrm>
+            <a:off x="679450" y="231775"/>
+            <a:ext cx="4064000" cy="368300"/>
+          </a:xfrm>
+          <a:prstGeom prst="rect">
+            <a:avLst/>
+          </a:prstGeom>
+          <a:noFill/>
+        </p:spPr>
+        <p:txBody>
+          <a:bodyPr wrap="square" rtlCol="0">
+            <a:spAutoFit/>
+          </a:bodyPr>
+          <a:p>
+            <a:r>
+              <a:rPr lang="en-US" altLang="zh-CN"/>
+              <a:t>Generate_Data_v1.ipynb</a:t>
+            </a:r>
+            <a:endParaRPr lang="en-US" altLang="zh-CN"/>
           </a:p>
         </p:txBody>
       </p:sp>
@@ -3142,20 +3173,142 @@
         </p:nvPicPr>
         <p:blipFill>
           <a:blip r:embed="rId1"/>
+          <a:srcRect b="2623"/>
           <a:stretch>
             <a:fillRect/>
           </a:stretch>
         </p:blipFill>
         <p:spPr>
           <a:xfrm>
-            <a:off x="1551305" y="459105"/>
-            <a:ext cx="8915400" cy="2590800"/>
+            <a:off x="1303020" y="2097405"/>
+            <a:ext cx="8915400" cy="2522855"/>
           </a:xfrm>
           <a:prstGeom prst="rect">
             <a:avLst/>
           </a:prstGeom>
         </p:spPr>
       </p:pic>
+      <p:sp>
+        <p:nvSpPr>
+          <p:cNvPr id="2" name="文本框 1"/>
+          <p:cNvSpPr txBox="1"/>
+          <p:nvPr/>
+        </p:nvSpPr>
+        <p:spPr>
+          <a:xfrm>
+            <a:off x="702310" y="349250"/>
+            <a:ext cx="4064000" cy="1476375"/>
+          </a:xfrm>
+          <a:prstGeom prst="rect">
+            <a:avLst/>
+          </a:prstGeom>
+          <a:noFill/>
+        </p:spPr>
+        <p:txBody>
+          <a:bodyPr wrap="square" rtlCol="0">
+            <a:spAutoFit/>
+          </a:bodyPr>
+          <a:p>
+            <a:r>
+              <a:rPr lang="en-US" altLang="zh-CN"/>
+              <a:t>gp_ddm_simulation_v1.1-5.csv</a:t>
+            </a:r>
+            <a:endParaRPr lang="en-US" altLang="zh-CN"/>
+          </a:p>
+          <a:p>
+            <a:r>
+              <a:rPr lang="en-US" altLang="zh-CN"/>
+              <a:t>gp_ddm_simulation_v1.2-200.csv</a:t>
+            </a:r>
+            <a:endParaRPr lang="en-US" altLang="zh-CN"/>
+          </a:p>
+          <a:p>
+            <a:r>
+              <a:rPr lang="en-US" altLang="zh-CN"/>
+              <a:t>gp_ddm_simulation_v1.3-2000.csv</a:t>
+            </a:r>
+            <a:endParaRPr lang="en-US" altLang="zh-CN"/>
+          </a:p>
+          <a:p>
+            <a:endParaRPr lang="en-US" altLang="zh-CN"/>
+          </a:p>
+          <a:p>
+            <a:endParaRPr lang="en-US" altLang="zh-CN"/>
+          </a:p>
+        </p:txBody>
+      </p:sp>
+    </p:spTree>
+  </p:cSld>
+  <p:clrMapOvr>
+    <a:masterClrMapping/>
+  </p:clrMapOvr>
+</p:sld>
+</file>
+
+<file path=ppt/slides/slide3.xml><?xml version="1.0" encoding="utf-8"?>
+<p:sld xmlns:a="http://schemas.openxmlformats.org/drawingml/2006/main" xmlns:r="http://schemas.openxmlformats.org/officeDocument/2006/relationships" xmlns:p="http://schemas.openxmlformats.org/presentationml/2006/main">
+  <p:cSld>
+    <p:spTree>
+      <p:nvGrpSpPr>
+        <p:cNvPr id="1" name=""/>
+        <p:cNvGrpSpPr/>
+        <p:nvPr/>
+      </p:nvGrpSpPr>
+      <p:grpSpPr/>
+      <p:sp>
+        <p:nvSpPr>
+          <p:cNvPr id="2" name="标题 1"/>
+          <p:cNvSpPr>
+            <a:spLocks noGrp="1"/>
+          </p:cNvSpPr>
+          <p:nvPr>
+            <p:ph type="title"/>
+          </p:nvPr>
+        </p:nvSpPr>
+        <p:spPr/>
+        <p:txBody>
+          <a:bodyPr/>
+          <a:p>
+            <a:endParaRPr lang="zh-CN" altLang="en-US"/>
+          </a:p>
+        </p:txBody>
+      </p:sp>
+      <p:sp>
+        <p:nvSpPr>
+          <p:cNvPr id="3" name="内容占位符 2"/>
+          <p:cNvSpPr>
+            <a:spLocks noGrp="1"/>
+          </p:cNvSpPr>
+          <p:nvPr>
+            <p:ph idx="1"/>
+          </p:nvPr>
+        </p:nvSpPr>
+        <p:spPr/>
+        <p:txBody>
+          <a:bodyPr/>
+          <a:p>
+            <a:endParaRPr lang="zh-CN" altLang="en-US"/>
+          </a:p>
+        </p:txBody>
+      </p:sp>
+    </p:spTree>
+  </p:cSld>
+  <p:clrMapOvr>
+    <a:masterClrMapping/>
+  </p:clrMapOvr>
+</p:sld>
+</file>
+
+<file path=ppt/slides/slide4.xml><?xml version="1.0" encoding="utf-8"?>
+<p:sld xmlns:a="http://schemas.openxmlformats.org/drawingml/2006/main" xmlns:r="http://schemas.openxmlformats.org/officeDocument/2006/relationships" xmlns:p="http://schemas.openxmlformats.org/presentationml/2006/main">
+  <p:cSld>
+    <p:spTree>
+      <p:nvGrpSpPr>
+        <p:cNvPr id="1" name=""/>
+        <p:cNvGrpSpPr/>
+        <p:nvPr/>
+      </p:nvGrpSpPr>
+      <p:grpSpPr/>
     </p:spTree>
   </p:cSld>
   <p:clrMapOvr>

--- a/4_Reports/Code_Version.pptx
+++ b/4_Reports/Code_Version.pptx
@@ -8,7 +8,10 @@
     <p:sldId id="256" r:id="rId3"/>
     <p:sldId id="257" r:id="rId4"/>
     <p:sldId id="258" r:id="rId5"/>
-    <p:sldId id="259" r:id="rId6"/>
+    <p:sldId id="260" r:id="rId6"/>
+    <p:sldId id="261" r:id="rId7"/>
+    <p:sldId id="262" r:id="rId8"/>
+    <p:sldId id="259" r:id="rId9"/>
   </p:sldIdLst>
   <p:sldSz cx="12192000" cy="6858000"/>
   <p:notesSz cx="6858000" cy="9144000"/>
@@ -3257,36 +3260,603 @@
       <p:grpSpPr/>
       <p:sp>
         <p:nvSpPr>
-          <p:cNvPr id="2" name="标题 1"/>
-          <p:cNvSpPr>
-            <a:spLocks noGrp="1"/>
-          </p:cNvSpPr>
-          <p:nvPr>
-            <p:ph type="title"/>
-          </p:nvPr>
-        </p:nvSpPr>
-        <p:spPr/>
-        <p:txBody>
-          <a:bodyPr/>
-          <a:p>
-            <a:endParaRPr lang="zh-CN" altLang="en-US"/>
-          </a:p>
-        </p:txBody>
-      </p:sp>
-      <p:sp>
-        <p:nvSpPr>
-          <p:cNvPr id="3" name="内容占位符 2"/>
-          <p:cNvSpPr>
-            <a:spLocks noGrp="1"/>
-          </p:cNvSpPr>
-          <p:nvPr>
-            <p:ph idx="1"/>
-          </p:nvPr>
-        </p:nvSpPr>
-        <p:spPr/>
-        <p:txBody>
-          <a:bodyPr/>
-          <a:p>
+          <p:cNvPr id="4" name="文本框 3"/>
+          <p:cNvSpPr txBox="1"/>
+          <p:nvPr/>
+        </p:nvSpPr>
+        <p:spPr>
+          <a:xfrm>
+            <a:off x="563880" y="208280"/>
+            <a:ext cx="4064000" cy="368300"/>
+          </a:xfrm>
+          <a:prstGeom prst="rect">
+            <a:avLst/>
+          </a:prstGeom>
+          <a:noFill/>
+        </p:spPr>
+        <p:txBody>
+          <a:bodyPr wrap="square" rtlCol="0">
+            <a:spAutoFit/>
+          </a:bodyPr>
+          <a:p>
+            <a:r>
+              <a:rPr lang="en-US" altLang="zh-CN"/>
+              <a:t>S2_gen_data_optimized.ipynb</a:t>
+            </a:r>
+            <a:endParaRPr lang="en-US" altLang="zh-CN"/>
+          </a:p>
+        </p:txBody>
+      </p:sp>
+      <p:sp>
+        <p:nvSpPr>
+          <p:cNvPr id="5" name="文本框 4"/>
+          <p:cNvSpPr txBox="1"/>
+          <p:nvPr/>
+        </p:nvSpPr>
+        <p:spPr>
+          <a:xfrm>
+            <a:off x="196850" y="890270"/>
+            <a:ext cx="11995150" cy="11448415"/>
+          </a:xfrm>
+          <a:prstGeom prst="rect">
+            <a:avLst/>
+          </a:prstGeom>
+          <a:noFill/>
+        </p:spPr>
+        <p:txBody>
+          <a:bodyPr wrap="square" rtlCol="0">
+            <a:spAutoFit/>
+          </a:bodyPr>
+          <a:p>
+            <a:endParaRPr lang="en-US" altLang="zh-CN"/>
+          </a:p>
+          <a:p>
+            <a:r>
+              <a:rPr lang="zh-CN" altLang="en-US"/>
+              <a:t>旧版是逐步累积噪声，</a:t>
+            </a:r>
+            <a:r>
+              <a:rPr lang="en-US" altLang="zh-CN"/>
+              <a:t> </a:t>
+            </a:r>
+            <a:r>
+              <a:rPr lang="zh-CN" altLang="en-US"/>
+              <a:t>新版是向量化一次生成整条证据轨迹</a:t>
+            </a:r>
+            <a:endParaRPr lang="zh-CN" altLang="en-US"/>
+          </a:p>
+          <a:p>
+            <a:r>
+              <a:rPr lang="zh-CN" altLang="en-US"/>
+              <a:t>旧版每个时间步都：</a:t>
+            </a:r>
+            <a:endParaRPr lang="zh-CN" altLang="en-US"/>
+          </a:p>
+          <a:p>
+            <a:endParaRPr lang="en-US" altLang="zh-CN"/>
+          </a:p>
+          <a:p>
+            <a:r>
+              <a:rPr lang="zh-CN" altLang="en-US"/>
+              <a:t>采一个噪声</a:t>
+            </a:r>
+            <a:endParaRPr lang="zh-CN" altLang="en-US"/>
+          </a:p>
+          <a:p>
+            <a:r>
+              <a:rPr lang="zh-CN" altLang="en-US"/>
+              <a:t>更新一次</a:t>
+            </a:r>
+            <a:r>
+              <a:rPr lang="en-US" altLang="zh-CN"/>
+              <a:t> evidence</a:t>
+            </a:r>
+            <a:endParaRPr lang="en-US" altLang="zh-CN"/>
+          </a:p>
+          <a:p>
+            <a:r>
+              <a:rPr lang="zh-CN" altLang="en-US"/>
+              <a:t>检查是否过边界</a:t>
+            </a:r>
+            <a:endParaRPr lang="zh-CN" altLang="en-US"/>
+          </a:p>
+          <a:p>
+            <a:r>
+              <a:rPr lang="zh-CN" altLang="en-US"/>
+              <a:t>新版先生成整段</a:t>
+            </a:r>
+            <a:r>
+              <a:rPr lang="en-US" altLang="zh-CN"/>
+              <a:t> noise</a:t>
+            </a:r>
+            <a:r>
+              <a:rPr lang="zh-CN" altLang="en-US"/>
+              <a:t>，再用</a:t>
+            </a:r>
+            <a:r>
+              <a:rPr lang="en-US" altLang="zh-CN"/>
+              <a:t> np.cumsum() </a:t>
+            </a:r>
+            <a:r>
+              <a:rPr lang="zh-CN" altLang="en-US"/>
+              <a:t>得到整条</a:t>
+            </a:r>
+            <a:r>
+              <a:rPr lang="en-US" altLang="zh-CN"/>
+              <a:t> evidence </a:t>
+            </a:r>
+            <a:r>
+              <a:rPr lang="zh-CN" altLang="en-US"/>
+              <a:t>轨迹，再找第一次</a:t>
+            </a:r>
+            <a:r>
+              <a:rPr lang="en-US" altLang="zh-CN"/>
+              <a:t> crossing</a:t>
+            </a:r>
+            <a:r>
+              <a:rPr lang="zh-CN" altLang="en-US"/>
+              <a:t>。</a:t>
+            </a:r>
+            <a:endParaRPr lang="zh-CN" altLang="en-US"/>
+          </a:p>
+          <a:p>
+            <a:r>
+              <a:rPr lang="zh-CN" altLang="en-US"/>
+              <a:t>核心逻辑是同一种</a:t>
+            </a:r>
+            <a:r>
+              <a:rPr lang="en-US" altLang="zh-CN"/>
+              <a:t> DDM </a:t>
+            </a:r>
+            <a:r>
+              <a:rPr lang="zh-CN" altLang="en-US"/>
+              <a:t>近似模拟，但新版速度快很多。</a:t>
+            </a:r>
+            <a:endParaRPr lang="zh-CN" altLang="en-US"/>
+          </a:p>
+          <a:p>
+            <a:endParaRPr lang="en-US" altLang="zh-CN"/>
+          </a:p>
+          <a:p>
+            <a:r>
+              <a:rPr lang="zh-CN" altLang="en-US"/>
+              <a:t>新版支持批处理和并行</a:t>
+            </a:r>
+            <a:endParaRPr lang="zh-CN" altLang="en-US"/>
+          </a:p>
+          <a:p>
+            <a:r>
+              <a:rPr lang="zh-CN" altLang="en-US"/>
+              <a:t>新版增加了：</a:t>
+            </a:r>
+            <a:endParaRPr lang="zh-CN" altLang="en-US"/>
+          </a:p>
+          <a:p>
+            <a:endParaRPr lang="en-US" altLang="zh-CN"/>
+          </a:p>
+          <a:p>
+            <a:r>
+              <a:rPr lang="en-US" altLang="zh-CN"/>
+              <a:t>compute_a_vectorized()</a:t>
+            </a:r>
+            <a:endParaRPr lang="en-US" altLang="zh-CN"/>
+          </a:p>
+          <a:p>
+            <a:r>
+              <a:rPr lang="en-US" altLang="zh-CN"/>
+              <a:t>generate_batch_vectorized()</a:t>
+            </a:r>
+            <a:endParaRPr lang="en-US" altLang="zh-CN"/>
+          </a:p>
+          <a:p>
+            <a:r>
+              <a:rPr lang="en-US" altLang="zh-CN"/>
+              <a:t>generate_data_random_params_optimized(..., batch_size, n_jobs)</a:t>
+            </a:r>
+            <a:endParaRPr lang="en-US" altLang="zh-CN"/>
+          </a:p>
+          <a:p>
+            <a:r>
+              <a:rPr lang="zh-CN" altLang="en-US"/>
+              <a:t>并用</a:t>
+            </a:r>
+            <a:r>
+              <a:rPr lang="en-US" altLang="zh-CN"/>
+              <a:t> joblib.Parallel </a:t>
+            </a:r>
+            <a:r>
+              <a:rPr lang="zh-CN" altLang="en-US"/>
+              <a:t>跑大样本。</a:t>
+            </a:r>
+            <a:endParaRPr lang="zh-CN" altLang="en-US"/>
+          </a:p>
+          <a:p>
+            <a:r>
+              <a:rPr lang="zh-CN" altLang="en-US"/>
+              <a:t>旧版基本是单线程、串行、脚本式生成。</a:t>
+            </a:r>
+            <a:endParaRPr lang="zh-CN" altLang="en-US"/>
+          </a:p>
+          <a:p>
+            <a:r>
+              <a:rPr lang="en-US" altLang="zh-CN"/>
+              <a:t>notebook </a:t>
+            </a:r>
+            <a:r>
+              <a:rPr lang="zh-CN" altLang="en-US"/>
+              <a:t>的用途也不同</a:t>
+            </a:r>
+            <a:endParaRPr lang="zh-CN" altLang="en-US"/>
+          </a:p>
+          <a:p>
+            <a:r>
+              <a:rPr lang="zh-CN" altLang="en-US"/>
+              <a:t>旧版除了随机生成</a:t>
+            </a:r>
+            <a:r>
+              <a:rPr lang="en-US" altLang="zh-CN"/>
+              <a:t> 250430.csv</a:t>
+            </a:r>
+            <a:r>
+              <a:rPr lang="zh-CN" altLang="en-US"/>
+              <a:t>，还保留了固定设计点的生成入口，比如</a:t>
+            </a:r>
+            <a:r>
+              <a:rPr lang="en-US" altLang="zh-CN"/>
+              <a:t> generate_data(num_subjects, num_trials, P, T, W)</a:t>
+            </a:r>
+            <a:r>
+              <a:rPr lang="zh-CN" altLang="en-US"/>
+              <a:t>，并在后面直接跑</a:t>
+            </a:r>
+            <a:r>
+              <a:rPr lang="en-US" altLang="zh-CN"/>
+              <a:t> d1.csv</a:t>
+            </a:r>
+            <a:r>
+              <a:rPr lang="zh-CN" altLang="en-US"/>
+              <a:t>、</a:t>
+            </a:r>
+            <a:r>
+              <a:rPr lang="en-US" altLang="zh-CN"/>
+              <a:t>d2.csv </a:t>
+            </a:r>
+            <a:r>
+              <a:rPr lang="zh-CN" altLang="en-US"/>
+              <a:t>这类条件文件。</a:t>
+            </a:r>
+            <a:endParaRPr lang="zh-CN" altLang="en-US"/>
+          </a:p>
+          <a:p>
+            <a:r>
+              <a:rPr lang="zh-CN" altLang="en-US"/>
+              <a:t>新版更聚焦于</a:t>
+            </a:r>
+            <a:r>
+              <a:rPr lang="en-US" altLang="zh-CN"/>
+              <a:t> Study 2 </a:t>
+            </a:r>
+            <a:r>
+              <a:rPr lang="zh-CN" altLang="en-US"/>
+              <a:t>的随机设计空间大数据生成，并把</a:t>
+            </a:r>
+            <a:r>
+              <a:rPr lang="en-US" altLang="zh-CN"/>
+              <a:t>“</a:t>
+            </a:r>
+            <a:r>
+              <a:rPr lang="zh-CN" altLang="en-US"/>
+              <a:t>大样本输出</a:t>
+            </a:r>
+            <a:r>
+              <a:rPr lang="en-US" altLang="zh-CN"/>
+              <a:t>”</a:t>
+            </a:r>
+            <a:r>
+              <a:rPr lang="zh-CN" altLang="en-US"/>
+              <a:t>和</a:t>
+            </a:r>
+            <a:r>
+              <a:rPr lang="en-US" altLang="zh-CN"/>
+              <a:t>“benchmark/validation”</a:t>
+            </a:r>
+            <a:r>
+              <a:rPr lang="zh-CN" altLang="en-US"/>
+              <a:t>流程分开写清楚。</a:t>
+            </a:r>
+            <a:endParaRPr lang="zh-CN" altLang="en-US"/>
+          </a:p>
+          <a:p>
+            <a:endParaRPr lang="en-US" altLang="zh-CN"/>
+          </a:p>
+          <a:p>
+            <a:r>
+              <a:rPr lang="en-US" altLang="zh-CN"/>
+              <a:t>3. </a:t>
+            </a:r>
+            <a:r>
+              <a:rPr lang="zh-CN" altLang="en-US"/>
+              <a:t>对结果的实际影响</a:t>
+            </a:r>
+            <a:endParaRPr lang="zh-CN" altLang="en-US"/>
+          </a:p>
+          <a:p>
+            <a:endParaRPr lang="en-US" altLang="zh-CN"/>
+          </a:p>
+          <a:p>
+            <a:r>
+              <a:rPr lang="zh-CN" altLang="en-US"/>
+              <a:t>如果你问</a:t>
+            </a:r>
+            <a:r>
+              <a:rPr lang="en-US" altLang="zh-CN"/>
+              <a:t>“</a:t>
+            </a:r>
+            <a:r>
+              <a:rPr lang="zh-CN" altLang="en-US"/>
+              <a:t>这两个</a:t>
+            </a:r>
+            <a:r>
+              <a:rPr lang="en-US" altLang="zh-CN"/>
+              <a:t> notebook </a:t>
+            </a:r>
+            <a:r>
+              <a:rPr lang="zh-CN" altLang="en-US"/>
+              <a:t>最终会不会生成不一样的数据分布</a:t>
+            </a:r>
+            <a:r>
+              <a:rPr lang="en-US" altLang="zh-CN"/>
+              <a:t>”</a:t>
+            </a:r>
+            <a:r>
+              <a:rPr lang="zh-CN" altLang="en-US"/>
+              <a:t>，答案是会，而且差异不小，主要因为：</a:t>
+            </a:r>
+            <a:endParaRPr lang="zh-CN" altLang="en-US"/>
+          </a:p>
+          <a:p>
+            <a:endParaRPr lang="en-US" altLang="zh-CN"/>
+          </a:p>
+          <a:p>
+            <a:r>
+              <a:rPr lang="en-US" altLang="zh-CN"/>
+              <a:t>v_P </a:t>
+            </a:r>
+            <a:r>
+              <a:rPr lang="zh-CN" altLang="en-US"/>
+              <a:t>的参数函数改了</a:t>
+            </a:r>
+            <a:endParaRPr lang="zh-CN" altLang="en-US"/>
+          </a:p>
+          <a:p>
+            <a:r>
+              <a:rPr lang="en-US" altLang="zh-CN"/>
+              <a:t>a </a:t>
+            </a:r>
+            <a:r>
+              <a:rPr lang="zh-CN" altLang="en-US"/>
+              <a:t>的噪声从</a:t>
+            </a:r>
+            <a:r>
+              <a:rPr lang="en-US" altLang="zh-CN"/>
+              <a:t>“</a:t>
+            </a:r>
+            <a:r>
+              <a:rPr lang="zh-CN" altLang="en-US"/>
+              <a:t>双层大波动</a:t>
+            </a:r>
+            <a:r>
+              <a:rPr lang="en-US" altLang="zh-CN"/>
+              <a:t>”</a:t>
+            </a:r>
+            <a:r>
+              <a:rPr lang="zh-CN" altLang="en-US"/>
+              <a:t>改成了</a:t>
+            </a:r>
+            <a:r>
+              <a:rPr lang="en-US" altLang="zh-CN"/>
+              <a:t>“</a:t>
+            </a:r>
+            <a:r>
+              <a:rPr lang="zh-CN" altLang="en-US"/>
+              <a:t>被试层</a:t>
+            </a:r>
+            <a:r>
+              <a:rPr lang="en-US" altLang="zh-CN"/>
+              <a:t> CV </a:t>
+            </a:r>
+            <a:r>
+              <a:rPr lang="zh-CN" altLang="en-US"/>
+              <a:t>波动</a:t>
+            </a:r>
+            <a:r>
+              <a:rPr lang="en-US" altLang="zh-CN"/>
+              <a:t>”</a:t>
+            </a:r>
+            <a:endParaRPr lang="en-US" altLang="zh-CN"/>
+          </a:p>
+          <a:p>
+            <a:r>
+              <a:rPr lang="zh-CN" altLang="en-US"/>
+              <a:t>旧版补足有效</a:t>
+            </a:r>
+            <a:r>
+              <a:rPr lang="en-US" altLang="zh-CN"/>
+              <a:t> trial</a:t>
+            </a:r>
+            <a:r>
+              <a:rPr lang="zh-CN" altLang="en-US"/>
+              <a:t>，新版直接丢弃无效</a:t>
+            </a:r>
+            <a:r>
+              <a:rPr lang="en-US" altLang="zh-CN"/>
+              <a:t> trial</a:t>
+            </a:r>
+            <a:endParaRPr lang="en-US" altLang="zh-CN"/>
+          </a:p>
+          <a:p>
+            <a:r>
+              <a:rPr lang="zh-CN" altLang="en-US"/>
+              <a:t>新版的随机种子和批处理方式更规范</a:t>
+            </a:r>
+            <a:endParaRPr lang="zh-CN" altLang="en-US"/>
+          </a:p>
+          <a:p>
+            <a:r>
+              <a:rPr lang="zh-CN" altLang="en-US"/>
+              <a:t>所以它们不是</a:t>
+            </a:r>
+            <a:r>
+              <a:rPr lang="en-US" altLang="zh-CN"/>
+              <a:t>“</a:t>
+            </a:r>
+            <a:r>
+              <a:rPr lang="zh-CN" altLang="en-US"/>
+              <a:t>纯粹速度优化后的同一生成器</a:t>
+            </a:r>
+            <a:r>
+              <a:rPr lang="en-US" altLang="zh-CN"/>
+              <a:t>”</a:t>
+            </a:r>
+            <a:r>
+              <a:rPr lang="zh-CN" altLang="en-US"/>
+              <a:t>，而是</a:t>
+            </a:r>
+            <a:r>
+              <a:rPr lang="en-US" altLang="zh-CN"/>
+              <a:t>“</a:t>
+            </a:r>
+            <a:r>
+              <a:rPr lang="zh-CN" altLang="en-US"/>
+              <a:t>模型细节也被重新整理过</a:t>
+            </a:r>
+            <a:r>
+              <a:rPr lang="en-US" altLang="zh-CN"/>
+              <a:t>”</a:t>
+            </a:r>
+            <a:r>
+              <a:rPr lang="zh-CN" altLang="en-US"/>
+              <a:t>的两个版本。</a:t>
+            </a:r>
+            <a:endParaRPr lang="zh-CN" altLang="en-US"/>
+          </a:p>
+          <a:p>
+            <a:endParaRPr lang="en-US" altLang="zh-CN"/>
+          </a:p>
+          <a:p>
+            <a:r>
+              <a:rPr lang="en-US" altLang="zh-CN"/>
+              <a:t>4. </a:t>
+            </a:r>
+            <a:r>
+              <a:rPr lang="zh-CN" altLang="en-US"/>
+              <a:t>我建议你怎么理解它们</a:t>
+            </a:r>
+            <a:endParaRPr lang="zh-CN" altLang="en-US"/>
+          </a:p>
+          <a:p>
+            <a:endParaRPr lang="en-US" altLang="zh-CN"/>
+          </a:p>
+          <a:p>
+            <a:r>
+              <a:rPr lang="en-US" altLang="zh-CN"/>
+              <a:t>S2_gen_data.ipynb </a:t>
+            </a:r>
+            <a:r>
+              <a:rPr lang="zh-CN" altLang="en-US"/>
+              <a:t>更像早期原型</a:t>
+            </a:r>
+            <a:r>
+              <a:rPr lang="en-US" altLang="zh-CN"/>
+              <a:t>/</a:t>
+            </a:r>
+            <a:r>
+              <a:rPr lang="zh-CN" altLang="en-US"/>
+              <a:t>探索脚本</a:t>
+            </a:r>
+            <a:endParaRPr lang="zh-CN" altLang="en-US"/>
+          </a:p>
+          <a:p>
+            <a:r>
+              <a:rPr lang="en-US" altLang="zh-CN"/>
+              <a:t>S2_gen_data_optimized.ipynb </a:t>
+            </a:r>
+            <a:r>
+              <a:rPr lang="zh-CN" altLang="en-US"/>
+              <a:t>更像当前正式使用的</a:t>
+            </a:r>
+            <a:r>
+              <a:rPr lang="en-US" altLang="zh-CN"/>
+              <a:t> Study 2 </a:t>
+            </a:r>
+            <a:r>
+              <a:rPr lang="zh-CN" altLang="en-US"/>
+              <a:t>生成器</a:t>
+            </a:r>
+            <a:endParaRPr lang="zh-CN" altLang="en-US"/>
+          </a:p>
+          <a:p>
+            <a:r>
+              <a:rPr lang="zh-CN" altLang="en-US"/>
+              <a:t>如果你愿意，我下一步可以继续帮你做两件很具体的事之一：</a:t>
+            </a:r>
+            <a:endParaRPr lang="zh-CN" altLang="en-US"/>
+          </a:p>
+          <a:p>
+            <a:endParaRPr lang="en-US" altLang="zh-CN"/>
+          </a:p>
+          <a:p>
+            <a:r>
+              <a:rPr lang="zh-CN" altLang="en-US"/>
+              <a:t>我把两个</a:t>
+            </a:r>
+            <a:r>
+              <a:rPr lang="en-US" altLang="zh-CN"/>
+              <a:t> notebook </a:t>
+            </a:r>
+            <a:r>
+              <a:rPr lang="zh-CN" altLang="en-US"/>
+              <a:t>的核心参数写成一张</a:t>
+            </a:r>
+            <a:r>
+              <a:rPr lang="en-US" altLang="zh-CN"/>
+              <a:t>“</a:t>
+            </a:r>
+            <a:r>
+              <a:rPr lang="zh-CN" altLang="en-US"/>
+              <a:t>旧版</a:t>
+            </a:r>
+            <a:r>
+              <a:rPr lang="en-US" altLang="zh-CN"/>
+              <a:t> vs </a:t>
+            </a:r>
+            <a:r>
+              <a:rPr lang="zh-CN" altLang="en-US"/>
+              <a:t>新版</a:t>
+            </a:r>
+            <a:r>
+              <a:rPr lang="en-US" altLang="zh-CN"/>
+              <a:t>”</a:t>
+            </a:r>
+            <a:r>
+              <a:rPr lang="zh-CN" altLang="en-US"/>
+              <a:t>对照表</a:t>
+            </a:r>
+            <a:endParaRPr lang="zh-CN" altLang="en-US"/>
+          </a:p>
+          <a:p>
+            <a:r>
+              <a:rPr lang="zh-CN" altLang="en-US"/>
+              <a:t>我直接帮你追踪这两个版本各自最终输出的</a:t>
+            </a:r>
+            <a:r>
+              <a:rPr lang="en-US" altLang="zh-CN"/>
+              <a:t> csv</a:t>
+            </a:r>
+            <a:r>
+              <a:rPr lang="zh-CN" altLang="en-US"/>
+              <a:t>，看看后续分析实际用了哪一个</a:t>
+            </a:r>
             <a:endParaRPr lang="zh-CN" altLang="en-US"/>
           </a:p>
         </p:txBody>
@@ -3300,6 +3870,1488 @@
 </file>
 
 <file path=ppt/slides/slide4.xml><?xml version="1.0" encoding="utf-8"?>
+<p:sld xmlns:a="http://schemas.openxmlformats.org/drawingml/2006/main" xmlns:r="http://schemas.openxmlformats.org/officeDocument/2006/relationships" xmlns:p="http://schemas.openxmlformats.org/presentationml/2006/main">
+  <p:cSld>
+    <p:spTree>
+      <p:nvGrpSpPr>
+        <p:cNvPr id="1" name=""/>
+        <p:cNvGrpSpPr/>
+        <p:nvPr/>
+      </p:nvGrpSpPr>
+      <p:grpSpPr/>
+      <p:sp>
+        <p:nvSpPr>
+          <p:cNvPr id="4" name="文本框 3"/>
+          <p:cNvSpPr txBox="1"/>
+          <p:nvPr/>
+        </p:nvSpPr>
+        <p:spPr>
+          <a:xfrm>
+            <a:off x="563880" y="208280"/>
+            <a:ext cx="4064000" cy="368300"/>
+          </a:xfrm>
+          <a:prstGeom prst="rect">
+            <a:avLst/>
+          </a:prstGeom>
+          <a:noFill/>
+        </p:spPr>
+        <p:txBody>
+          <a:bodyPr wrap="square" rtlCol="0">
+            <a:spAutoFit/>
+          </a:bodyPr>
+          <a:p>
+            <a:r>
+              <a:rPr lang="en-US" altLang="zh-CN"/>
+              <a:t>S2_gen_data_optimized.ipynb</a:t>
+            </a:r>
+            <a:endParaRPr lang="en-US" altLang="zh-CN"/>
+          </a:p>
+        </p:txBody>
+      </p:sp>
+      <p:sp>
+        <p:nvSpPr>
+          <p:cNvPr id="5" name="文本框 4"/>
+          <p:cNvSpPr txBox="1"/>
+          <p:nvPr/>
+        </p:nvSpPr>
+        <p:spPr>
+          <a:xfrm>
+            <a:off x="196850" y="890270"/>
+            <a:ext cx="11995150" cy="5354320"/>
+          </a:xfrm>
+          <a:prstGeom prst="rect">
+            <a:avLst/>
+          </a:prstGeom>
+          <a:noFill/>
+        </p:spPr>
+        <p:txBody>
+          <a:bodyPr wrap="square" rtlCol="0">
+            <a:spAutoFit/>
+          </a:bodyPr>
+          <a:p>
+            <a:r>
+              <a:rPr lang="en-US" altLang="zh-CN">
+                <a:sym typeface="+mn-ea"/>
+              </a:rPr>
+              <a:t>S2_gen_data_optimized.ipynb </a:t>
+            </a:r>
+            <a:r>
+              <a:rPr lang="zh-CN" altLang="en-US">
+                <a:sym typeface="+mn-ea"/>
+              </a:rPr>
+              <a:t>不是完全换了一个模型，而是在保留</a:t>
+            </a:r>
+            <a:r>
+              <a:rPr lang="en-US" altLang="zh-CN">
+                <a:sym typeface="+mn-ea"/>
+              </a:rPr>
+              <a:t> P/T/W -&gt; v/a -&gt; RT/response </a:t>
+            </a:r>
+            <a:r>
+              <a:rPr lang="zh-CN" altLang="en-US">
+                <a:sym typeface="+mn-ea"/>
+              </a:rPr>
+              <a:t>这条主思路的基础上，修正了部分参数设定，重构了</a:t>
+            </a:r>
+            <a:r>
+              <a:rPr lang="en-US" altLang="zh-CN">
+                <a:sym typeface="+mn-ea"/>
+              </a:rPr>
+              <a:t> a </a:t>
+            </a:r>
+            <a:r>
+              <a:rPr lang="zh-CN" altLang="en-US">
+                <a:sym typeface="+mn-ea"/>
+              </a:rPr>
+              <a:t>的噪声层级，并且把生成流程改成了</a:t>
+            </a:r>
+            <a:r>
+              <a:rPr lang="en-US" altLang="zh-CN">
+                <a:sym typeface="+mn-ea"/>
+              </a:rPr>
+              <a:t>“</a:t>
+            </a:r>
+            <a:r>
+              <a:rPr lang="zh-CN" altLang="en-US">
+                <a:sym typeface="+mn-ea"/>
+              </a:rPr>
+              <a:t>可验证、可并行、可复现</a:t>
+            </a:r>
+            <a:r>
+              <a:rPr lang="en-US" altLang="zh-CN">
+                <a:sym typeface="+mn-ea"/>
+              </a:rPr>
+              <a:t>”</a:t>
+            </a:r>
+            <a:r>
+              <a:rPr lang="zh-CN" altLang="en-US">
+                <a:sym typeface="+mn-ea"/>
+              </a:rPr>
+              <a:t>的版本。真正大的差异主要有两类：参数函数不同，和有效</a:t>
+            </a:r>
+            <a:r>
+              <a:rPr lang="en-US" altLang="zh-CN">
+                <a:sym typeface="+mn-ea"/>
+              </a:rPr>
+              <a:t> trial </a:t>
+            </a:r>
+            <a:r>
+              <a:rPr lang="zh-CN" altLang="en-US">
+                <a:sym typeface="+mn-ea"/>
+              </a:rPr>
+              <a:t>的保留策略不同。</a:t>
+            </a:r>
+            <a:endParaRPr lang="zh-CN" altLang="en-US"/>
+          </a:p>
+          <a:p>
+            <a:endParaRPr lang="en-US" altLang="zh-CN"/>
+          </a:p>
+          <a:p>
+            <a:r>
+              <a:rPr lang="en-US" altLang="zh-CN">
+                <a:sym typeface="+mn-ea"/>
+              </a:rPr>
+              <a:t>1. </a:t>
+            </a:r>
+            <a:r>
+              <a:rPr lang="zh-CN" altLang="en-US">
+                <a:sym typeface="+mn-ea"/>
+              </a:rPr>
+              <a:t>参数设置上的不同</a:t>
+            </a:r>
+            <a:endParaRPr lang="zh-CN" altLang="en-US"/>
+          </a:p>
+          <a:p>
+            <a:endParaRPr lang="en-US" altLang="zh-CN"/>
+          </a:p>
+          <a:p>
+            <a:r>
+              <a:rPr lang="en-US" altLang="zh-CN">
+                <a:sym typeface="+mn-ea"/>
+              </a:rPr>
+              <a:t>gamma </a:t>
+            </a:r>
+            <a:r>
+              <a:rPr lang="zh-CN" altLang="en-US">
+                <a:sym typeface="+mn-ea"/>
+              </a:rPr>
+              <a:t>不同</a:t>
+            </a:r>
+            <a:endParaRPr lang="zh-CN" altLang="en-US"/>
+          </a:p>
+          <a:p>
+            <a:r>
+              <a:rPr lang="zh-CN" altLang="en-US">
+                <a:sym typeface="+mn-ea"/>
+              </a:rPr>
+              <a:t>在旧版</a:t>
+            </a:r>
+            <a:r>
+              <a:rPr lang="en-US" altLang="zh-CN">
+                <a:sym typeface="+mn-ea"/>
+              </a:rPr>
+              <a:t> S2_gen_data.ipynb </a:t>
+            </a:r>
+            <a:r>
+              <a:rPr lang="zh-CN" altLang="en-US">
+                <a:sym typeface="+mn-ea"/>
+              </a:rPr>
+              <a:t>里，全局是</a:t>
+            </a:r>
+            <a:r>
+              <a:rPr lang="en-US" altLang="zh-CN">
+                <a:sym typeface="+mn-ea"/>
+              </a:rPr>
+              <a:t> gamma = 0.2</a:t>
+            </a:r>
+            <a:r>
+              <a:rPr lang="zh-CN" altLang="en-US">
+                <a:sym typeface="+mn-ea"/>
+              </a:rPr>
+              <a:t>。</a:t>
+            </a:r>
+            <a:endParaRPr lang="zh-CN" altLang="en-US"/>
+          </a:p>
+          <a:p>
+            <a:r>
+              <a:rPr lang="zh-CN" altLang="en-US">
+                <a:sym typeface="+mn-ea"/>
+              </a:rPr>
+              <a:t>在新版</a:t>
+            </a:r>
+            <a:r>
+              <a:rPr lang="en-US" altLang="zh-CN">
+                <a:sym typeface="+mn-ea"/>
+              </a:rPr>
+              <a:t> S2_gen_data_optimized.ipynb </a:t>
+            </a:r>
+            <a:r>
+              <a:rPr lang="zh-CN" altLang="en-US">
+                <a:sym typeface="+mn-ea"/>
+              </a:rPr>
+              <a:t>里，是</a:t>
+            </a:r>
+            <a:r>
+              <a:rPr lang="en-US" altLang="zh-CN">
+                <a:sym typeface="+mn-ea"/>
+              </a:rPr>
+              <a:t> GAMMA = 0.1</a:t>
+            </a:r>
+            <a:r>
+              <a:rPr lang="zh-CN" altLang="en-US">
+                <a:sym typeface="+mn-ea"/>
+              </a:rPr>
+              <a:t>。</a:t>
+            </a:r>
+            <a:endParaRPr lang="zh-CN" altLang="en-US"/>
+          </a:p>
+          <a:p>
+            <a:r>
+              <a:rPr lang="zh-CN" altLang="en-US">
+                <a:sym typeface="+mn-ea"/>
+              </a:rPr>
+              <a:t>这会直接影响</a:t>
+            </a:r>
+            <a:r>
+              <a:rPr lang="en-US" altLang="zh-CN">
+                <a:sym typeface="+mn-ea"/>
+              </a:rPr>
+              <a:t> practice </a:t>
+            </a:r>
+            <a:r>
+              <a:rPr lang="zh-CN" altLang="en-US">
+                <a:sym typeface="+mn-ea"/>
+              </a:rPr>
+              <a:t>对</a:t>
+            </a:r>
+            <a:r>
+              <a:rPr lang="en-US" altLang="zh-CN">
+                <a:sym typeface="+mn-ea"/>
+              </a:rPr>
+              <a:t> v_P </a:t>
+            </a:r>
+            <a:r>
+              <a:rPr lang="zh-CN" altLang="en-US">
+                <a:sym typeface="+mn-ea"/>
+              </a:rPr>
+              <a:t>的</a:t>
+            </a:r>
+            <a:r>
+              <a:rPr lang="en-US" altLang="zh-CN">
+                <a:sym typeface="+mn-ea"/>
+              </a:rPr>
+              <a:t> sigmoid </a:t>
+            </a:r>
+            <a:r>
+              <a:rPr lang="zh-CN" altLang="en-US">
+                <a:sym typeface="+mn-ea"/>
+              </a:rPr>
+              <a:t>变化速度。</a:t>
+            </a:r>
+            <a:endParaRPr lang="zh-CN" altLang="en-US"/>
+          </a:p>
+          <a:p>
+            <a:endParaRPr lang="en-US" altLang="zh-CN"/>
+          </a:p>
+          <a:p>
+            <a:r>
+              <a:rPr lang="en-US" altLang="zh-CN">
+                <a:sym typeface="+mn-ea"/>
+              </a:rPr>
+              <a:t>v_P </a:t>
+            </a:r>
+            <a:r>
+              <a:rPr lang="zh-CN" altLang="en-US">
+                <a:sym typeface="+mn-ea"/>
+              </a:rPr>
+              <a:t>的</a:t>
+            </a:r>
+            <a:r>
+              <a:rPr lang="en-US" altLang="zh-CN">
+                <a:sym typeface="+mn-ea"/>
+              </a:rPr>
+              <a:t> k_min/k_max </a:t>
+            </a:r>
+            <a:r>
+              <a:rPr lang="zh-CN" altLang="en-US">
+                <a:sym typeface="+mn-ea"/>
+              </a:rPr>
+              <a:t>传参不同，而且旧版看起来有反向传参问题</a:t>
+            </a:r>
+            <a:endParaRPr lang="zh-CN" altLang="en-US"/>
+          </a:p>
+          <a:p>
+            <a:r>
+              <a:rPr lang="zh-CN" altLang="en-US">
+                <a:sym typeface="+mn-ea"/>
+              </a:rPr>
+              <a:t>旧版</a:t>
+            </a:r>
+            <a:r>
+              <a:rPr lang="en-US" altLang="zh-CN">
+                <a:sym typeface="+mn-ea"/>
+              </a:rPr>
+              <a:t> compute_v() </a:t>
+            </a:r>
+            <a:r>
+              <a:rPr lang="zh-CN" altLang="en-US">
+                <a:sym typeface="+mn-ea"/>
+              </a:rPr>
+              <a:t>调的是：</a:t>
+            </a:r>
+            <a:endParaRPr lang="zh-CN" altLang="en-US"/>
+          </a:p>
+          <a:p>
+            <a:r>
+              <a:rPr lang="en-US" altLang="zh-CN">
+                <a:sym typeface="+mn-ea"/>
+              </a:rPr>
+              <a:t>v_P_Function(..., k_min=0.1, k_max=0.05, gamma=gamma, P0=32)</a:t>
+            </a:r>
+            <a:endParaRPr lang="en-US" altLang="zh-CN"/>
+          </a:p>
+          <a:p>
+            <a:r>
+              <a:rPr lang="zh-CN" altLang="en-US">
+                <a:sym typeface="+mn-ea"/>
+              </a:rPr>
+              <a:t>新版调的是：</a:t>
+            </a:r>
+            <a:endParaRPr lang="zh-CN" altLang="en-US">
+              <a:sym typeface="+mn-ea"/>
+            </a:endParaRPr>
+          </a:p>
+          <a:p>
+            <a:r>
+              <a:rPr lang="en-US" altLang="zh-CN">
+                <a:sym typeface="+mn-ea"/>
+              </a:rPr>
+              <a:t>v_P_func(..., k_min=0.01, k_max=0.15, gamma=GAMMA, P0=32)</a:t>
+            </a:r>
+            <a:endParaRPr lang="en-US" altLang="zh-CN"/>
+          </a:p>
+          <a:p>
+            <a:r>
+              <a:rPr lang="zh-CN" altLang="en-US">
+                <a:sym typeface="+mn-ea"/>
+              </a:rPr>
+              <a:t>也就是说，新版把</a:t>
+            </a:r>
+            <a:r>
+              <a:rPr lang="en-US" altLang="zh-CN">
+                <a:sym typeface="+mn-ea"/>
+              </a:rPr>
+              <a:t> practice </a:t>
+            </a:r>
+            <a:r>
+              <a:rPr lang="zh-CN" altLang="en-US">
+                <a:sym typeface="+mn-ea"/>
+              </a:rPr>
+              <a:t>相关斜率函数恢复成更正常的</a:t>
+            </a:r>
+            <a:r>
+              <a:rPr lang="en-US" altLang="zh-CN">
+                <a:sym typeface="+mn-ea"/>
+              </a:rPr>
+              <a:t>“</a:t>
+            </a:r>
+            <a:r>
+              <a:rPr lang="zh-CN" altLang="en-US">
+                <a:sym typeface="+mn-ea"/>
+              </a:rPr>
+              <a:t>从小到大</a:t>
+            </a:r>
+            <a:r>
+              <a:rPr lang="en-US" altLang="zh-CN">
+                <a:sym typeface="+mn-ea"/>
+              </a:rPr>
+              <a:t>”</a:t>
+            </a:r>
+            <a:r>
+              <a:rPr lang="zh-CN" altLang="en-US">
+                <a:sym typeface="+mn-ea"/>
+              </a:rPr>
+              <a:t>的区间；旧版这个设定会让</a:t>
+            </a:r>
+            <a:r>
+              <a:rPr lang="en-US" altLang="zh-CN">
+                <a:sym typeface="+mn-ea"/>
+              </a:rPr>
+              <a:t> k(P) </a:t>
+            </a:r>
+            <a:r>
+              <a:rPr lang="zh-CN" altLang="en-US">
+                <a:sym typeface="+mn-ea"/>
+              </a:rPr>
+              <a:t>的行为和直觉不太一致，属于很重要的差异。</a:t>
+            </a:r>
+            <a:endParaRPr lang="zh-CN" altLang="en-US"/>
+          </a:p>
+          <a:p>
+            <a:endParaRPr lang="zh-CN" altLang="en-US"/>
+          </a:p>
+        </p:txBody>
+      </p:sp>
+    </p:spTree>
+  </p:cSld>
+  <p:clrMapOvr>
+    <a:masterClrMapping/>
+  </p:clrMapOvr>
+</p:sld>
+</file>
+
+<file path=ppt/slides/slide5.xml><?xml version="1.0" encoding="utf-8"?>
+<p:sld xmlns:a="http://schemas.openxmlformats.org/drawingml/2006/main" xmlns:r="http://schemas.openxmlformats.org/officeDocument/2006/relationships" xmlns:p="http://schemas.openxmlformats.org/presentationml/2006/main">
+  <p:cSld>
+    <p:spTree>
+      <p:nvGrpSpPr>
+        <p:cNvPr id="1" name=""/>
+        <p:cNvGrpSpPr/>
+        <p:nvPr/>
+      </p:nvGrpSpPr>
+      <p:grpSpPr/>
+      <p:sp>
+        <p:nvSpPr>
+          <p:cNvPr id="4" name="文本框 3"/>
+          <p:cNvSpPr txBox="1"/>
+          <p:nvPr/>
+        </p:nvSpPr>
+        <p:spPr>
+          <a:xfrm>
+            <a:off x="563880" y="208280"/>
+            <a:ext cx="4064000" cy="368300"/>
+          </a:xfrm>
+          <a:prstGeom prst="rect">
+            <a:avLst/>
+          </a:prstGeom>
+          <a:noFill/>
+        </p:spPr>
+        <p:txBody>
+          <a:bodyPr wrap="square" rtlCol="0">
+            <a:spAutoFit/>
+          </a:bodyPr>
+          <a:p>
+            <a:r>
+              <a:rPr lang="en-US" altLang="zh-CN"/>
+              <a:t>S2_gen_data_optimized.ipynb</a:t>
+            </a:r>
+            <a:endParaRPr lang="en-US" altLang="zh-CN"/>
+          </a:p>
+        </p:txBody>
+      </p:sp>
+      <p:sp>
+        <p:nvSpPr>
+          <p:cNvPr id="5" name="文本框 4"/>
+          <p:cNvSpPr txBox="1"/>
+          <p:nvPr/>
+        </p:nvSpPr>
+        <p:spPr>
+          <a:xfrm>
+            <a:off x="196850" y="890270"/>
+            <a:ext cx="11995150" cy="5908040"/>
+          </a:xfrm>
+          <a:prstGeom prst="rect">
+            <a:avLst/>
+          </a:prstGeom>
+          <a:noFill/>
+        </p:spPr>
+        <p:txBody>
+          <a:bodyPr wrap="square" rtlCol="0">
+            <a:spAutoFit/>
+          </a:bodyPr>
+          <a:p>
+            <a:r>
+              <a:rPr lang="en-US" altLang="zh-CN">
+                <a:sym typeface="+mn-ea"/>
+              </a:rPr>
+              <a:t>S2_gen_data_optimized.ipynb </a:t>
+            </a:r>
+            <a:r>
+              <a:rPr lang="zh-CN" altLang="en-US">
+                <a:sym typeface="+mn-ea"/>
+              </a:rPr>
+              <a:t>不是完全换了一个模型，而是在保留</a:t>
+            </a:r>
+            <a:r>
+              <a:rPr lang="en-US" altLang="zh-CN">
+                <a:sym typeface="+mn-ea"/>
+              </a:rPr>
+              <a:t> P/T/W -&gt; v/a -&gt; RT/response </a:t>
+            </a:r>
+            <a:r>
+              <a:rPr lang="zh-CN" altLang="en-US">
+                <a:sym typeface="+mn-ea"/>
+              </a:rPr>
+              <a:t>这条主思路的基础上，修正了部分参数设定，重构了</a:t>
+            </a:r>
+            <a:r>
+              <a:rPr lang="en-US" altLang="zh-CN">
+                <a:sym typeface="+mn-ea"/>
+              </a:rPr>
+              <a:t> a </a:t>
+            </a:r>
+            <a:r>
+              <a:rPr lang="zh-CN" altLang="en-US">
+                <a:sym typeface="+mn-ea"/>
+              </a:rPr>
+              <a:t>的噪声层级，并且把生成流程改成了</a:t>
+            </a:r>
+            <a:r>
+              <a:rPr lang="en-US" altLang="zh-CN">
+                <a:sym typeface="+mn-ea"/>
+              </a:rPr>
+              <a:t>“</a:t>
+            </a:r>
+            <a:r>
+              <a:rPr lang="zh-CN" altLang="en-US">
+                <a:sym typeface="+mn-ea"/>
+              </a:rPr>
+              <a:t>可验证、可并行、可复现</a:t>
+            </a:r>
+            <a:r>
+              <a:rPr lang="en-US" altLang="zh-CN">
+                <a:sym typeface="+mn-ea"/>
+              </a:rPr>
+              <a:t>”</a:t>
+            </a:r>
+            <a:r>
+              <a:rPr lang="zh-CN" altLang="en-US">
+                <a:sym typeface="+mn-ea"/>
+              </a:rPr>
+              <a:t>的版本。真正大的差异主要有两类：参数函数不同，和有效</a:t>
+            </a:r>
+            <a:r>
+              <a:rPr lang="en-US" altLang="zh-CN">
+                <a:sym typeface="+mn-ea"/>
+              </a:rPr>
+              <a:t> trial </a:t>
+            </a:r>
+            <a:r>
+              <a:rPr lang="zh-CN" altLang="en-US">
+                <a:sym typeface="+mn-ea"/>
+              </a:rPr>
+              <a:t>的保留策略不同。</a:t>
+            </a:r>
+            <a:endParaRPr lang="zh-CN" altLang="en-US"/>
+          </a:p>
+          <a:p>
+            <a:endParaRPr lang="en-US" altLang="zh-CN"/>
+          </a:p>
+          <a:p>
+            <a:r>
+              <a:rPr lang="en-US" altLang="zh-CN">
+                <a:sym typeface="+mn-ea"/>
+              </a:rPr>
+              <a:t>1. </a:t>
+            </a:r>
+            <a:r>
+              <a:rPr lang="zh-CN" altLang="en-US">
+                <a:sym typeface="+mn-ea"/>
+              </a:rPr>
+              <a:t>参数设置上的不同</a:t>
+            </a:r>
+            <a:endParaRPr lang="zh-CN" altLang="en-US"/>
+          </a:p>
+          <a:p>
+            <a:endParaRPr lang="en-US" altLang="zh-CN"/>
+          </a:p>
+          <a:p>
+            <a:r>
+              <a:rPr lang="en-US" altLang="zh-CN">
+                <a:sym typeface="+mn-ea"/>
+              </a:rPr>
+              <a:t>a </a:t>
+            </a:r>
+            <a:r>
+              <a:rPr lang="zh-CN" altLang="en-US">
+                <a:sym typeface="+mn-ea"/>
+              </a:rPr>
+              <a:t>的噪声模型完全不同</a:t>
+            </a:r>
+            <a:endParaRPr lang="zh-CN" altLang="en-US"/>
+          </a:p>
+          <a:p>
+            <a:r>
+              <a:rPr lang="zh-CN" altLang="en-US">
+                <a:sym typeface="+mn-ea"/>
+              </a:rPr>
+              <a:t>旧版：</a:t>
+            </a:r>
+            <a:endParaRPr lang="zh-CN" altLang="en-US"/>
+          </a:p>
+          <a:p>
+            <a:pPr lvl="1"/>
+            <a:r>
+              <a:rPr lang="en-US" altLang="zh-CN">
+                <a:sym typeface="+mn-ea"/>
+              </a:rPr>
+              <a:t>compute_a(M) </a:t>
+            </a:r>
+            <a:r>
+              <a:rPr lang="zh-CN" altLang="en-US">
+                <a:sym typeface="+mn-ea"/>
+              </a:rPr>
+              <a:t>里面先做一次</a:t>
+            </a:r>
+            <a:r>
+              <a:rPr lang="en-US" altLang="zh-CN">
+                <a:sym typeface="+mn-ea"/>
+              </a:rPr>
+              <a:t> a = np.random.normal(a_1, 0.5)</a:t>
+            </a:r>
+            <a:endParaRPr lang="en-US" altLang="zh-CN"/>
+          </a:p>
+          <a:p>
+            <a:pPr lvl="1"/>
+            <a:r>
+              <a:rPr lang="zh-CN" altLang="en-US">
+                <a:sym typeface="+mn-ea"/>
+              </a:rPr>
+              <a:t>到</a:t>
+            </a:r>
+            <a:r>
+              <a:rPr lang="en-US" altLang="zh-CN">
+                <a:sym typeface="+mn-ea"/>
+              </a:rPr>
+              <a:t> trial </a:t>
+            </a:r>
+            <a:r>
+              <a:rPr lang="zh-CN" altLang="en-US">
+                <a:sym typeface="+mn-ea"/>
+              </a:rPr>
+              <a:t>生成时，又做一次</a:t>
+            </a:r>
+            <a:r>
+              <a:rPr lang="en-US" altLang="zh-CN">
+                <a:sym typeface="+mn-ea"/>
+              </a:rPr>
+              <a:t> a_trial = np.random.normal(a, 1)</a:t>
+            </a:r>
+            <a:endParaRPr lang="en-US" altLang="zh-CN"/>
+          </a:p>
+          <a:p>
+            <a:pPr lvl="1"/>
+            <a:r>
+              <a:rPr lang="zh-CN" altLang="en-US">
+                <a:sym typeface="+mn-ea"/>
+              </a:rPr>
+              <a:t>相当于旧版同时有</a:t>
+            </a:r>
+            <a:r>
+              <a:rPr lang="en-US" altLang="zh-CN">
+                <a:sym typeface="+mn-ea"/>
+              </a:rPr>
+              <a:t>“</a:t>
+            </a:r>
+            <a:r>
+              <a:rPr lang="zh-CN" altLang="en-US">
+                <a:sym typeface="+mn-ea"/>
+              </a:rPr>
+              <a:t>被试层</a:t>
+            </a:r>
+            <a:r>
+              <a:rPr lang="en-US" altLang="zh-CN">
+                <a:sym typeface="+mn-ea"/>
+              </a:rPr>
+              <a:t>”</a:t>
+            </a:r>
+            <a:r>
+              <a:rPr lang="zh-CN" altLang="en-US">
+                <a:sym typeface="+mn-ea"/>
+              </a:rPr>
+              <a:t>和</a:t>
+            </a:r>
+            <a:r>
+              <a:rPr lang="en-US" altLang="zh-CN">
+                <a:sym typeface="+mn-ea"/>
+              </a:rPr>
+              <a:t>“trial </a:t>
+            </a:r>
+            <a:r>
+              <a:rPr lang="zh-CN" altLang="en-US">
+                <a:sym typeface="+mn-ea"/>
+              </a:rPr>
+              <a:t>层</a:t>
+            </a:r>
+            <a:r>
+              <a:rPr lang="en-US" altLang="zh-CN">
+                <a:sym typeface="+mn-ea"/>
+              </a:rPr>
+              <a:t>”</a:t>
+            </a:r>
+            <a:r>
+              <a:rPr lang="zh-CN" altLang="en-US">
+                <a:sym typeface="+mn-ea"/>
+              </a:rPr>
+              <a:t>的</a:t>
+            </a:r>
+            <a:r>
+              <a:rPr lang="en-US" altLang="zh-CN">
+                <a:sym typeface="+mn-ea"/>
+              </a:rPr>
+              <a:t> a </a:t>
+            </a:r>
+            <a:r>
+              <a:rPr lang="zh-CN" altLang="en-US">
+                <a:sym typeface="+mn-ea"/>
+              </a:rPr>
+              <a:t>波动，而且</a:t>
+            </a:r>
+            <a:r>
+              <a:rPr lang="en-US" altLang="zh-CN">
+                <a:sym typeface="+mn-ea"/>
+              </a:rPr>
+              <a:t> trial </a:t>
+            </a:r>
+            <a:r>
+              <a:rPr lang="zh-CN" altLang="en-US">
+                <a:sym typeface="+mn-ea"/>
+              </a:rPr>
+              <a:t>层波动很大。</a:t>
+            </a:r>
+            <a:endParaRPr lang="zh-CN" altLang="en-US"/>
+          </a:p>
+          <a:p>
+            <a:r>
+              <a:rPr lang="zh-CN" altLang="en-US">
+                <a:sym typeface="+mn-ea"/>
+              </a:rPr>
+              <a:t>新版：</a:t>
+            </a:r>
+            <a:endParaRPr lang="zh-CN" altLang="en-US"/>
+          </a:p>
+          <a:p>
+            <a:pPr lvl="1"/>
+            <a:r>
+              <a:rPr lang="en-US" altLang="zh-CN">
+                <a:sym typeface="+mn-ea"/>
+              </a:rPr>
+              <a:t>compute_a(M) </a:t>
+            </a:r>
+            <a:r>
+              <a:rPr lang="zh-CN" altLang="en-US">
+                <a:sym typeface="+mn-ea"/>
+              </a:rPr>
+              <a:t>是确定性的，只给出</a:t>
+            </a:r>
+            <a:r>
+              <a:rPr lang="en-US" altLang="zh-CN">
+                <a:sym typeface="+mn-ea"/>
+              </a:rPr>
+              <a:t> a_1</a:t>
+            </a:r>
+            <a:endParaRPr lang="en-US" altLang="zh-CN"/>
+          </a:p>
+          <a:p>
+            <a:pPr lvl="1"/>
+            <a:r>
+              <a:rPr lang="zh-CN" altLang="en-US">
+                <a:sym typeface="+mn-ea"/>
+              </a:rPr>
+              <a:t>然后在被试层一次性加噪声：</a:t>
+            </a:r>
+            <a:r>
+              <a:rPr lang="en-US" altLang="zh-CN">
+                <a:sym typeface="+mn-ea"/>
+              </a:rPr>
+              <a:t>a ~ Normal(a_base, a_base * A_CV)</a:t>
+            </a:r>
+            <a:r>
+              <a:rPr lang="zh-CN" altLang="en-US">
+                <a:sym typeface="+mn-ea"/>
+              </a:rPr>
+              <a:t>，其中</a:t>
+            </a:r>
+            <a:r>
+              <a:rPr lang="en-US" altLang="zh-CN">
+                <a:sym typeface="+mn-ea"/>
+              </a:rPr>
+              <a:t> A_CV = 0.15</a:t>
+            </a:r>
+            <a:endParaRPr lang="en-US" altLang="zh-CN"/>
+          </a:p>
+          <a:p>
+            <a:pPr lvl="1"/>
+            <a:r>
+              <a:rPr lang="zh-CN" altLang="en-US">
+                <a:sym typeface="+mn-ea"/>
+              </a:rPr>
+              <a:t>后续同一个被试的</a:t>
+            </a:r>
+            <a:r>
+              <a:rPr lang="en-US" altLang="zh-CN">
+                <a:sym typeface="+mn-ea"/>
+              </a:rPr>
+              <a:t> trial </a:t>
+            </a:r>
+            <a:r>
+              <a:rPr lang="zh-CN" altLang="en-US">
+                <a:sym typeface="+mn-ea"/>
+              </a:rPr>
+              <a:t>共用这个</a:t>
+            </a:r>
+            <a:r>
+              <a:rPr lang="en-US" altLang="zh-CN">
+                <a:sym typeface="+mn-ea"/>
+              </a:rPr>
+              <a:t> a</a:t>
+            </a:r>
+            <a:endParaRPr lang="en-US" altLang="zh-CN"/>
+          </a:p>
+          <a:p>
+            <a:pPr lvl="1"/>
+            <a:r>
+              <a:rPr lang="zh-CN" altLang="en-US">
+                <a:sym typeface="+mn-ea"/>
+              </a:rPr>
+              <a:t>这意味着新版的</a:t>
+            </a:r>
+            <a:r>
+              <a:rPr lang="en-US" altLang="zh-CN">
+                <a:sym typeface="+mn-ea"/>
+              </a:rPr>
+              <a:t> a </a:t>
+            </a:r>
+            <a:r>
+              <a:rPr lang="zh-CN" altLang="en-US">
+                <a:sym typeface="+mn-ea"/>
+              </a:rPr>
+              <a:t>更稳定，也更像</a:t>
+            </a:r>
+            <a:r>
+              <a:rPr lang="en-US" altLang="zh-CN">
+                <a:sym typeface="+mn-ea"/>
+              </a:rPr>
+              <a:t>“</a:t>
+            </a:r>
+            <a:r>
+              <a:rPr lang="zh-CN" altLang="en-US">
+                <a:sym typeface="+mn-ea"/>
+              </a:rPr>
+              <a:t>被试间差异</a:t>
+            </a:r>
+            <a:r>
+              <a:rPr lang="en-US" altLang="zh-CN">
+                <a:sym typeface="+mn-ea"/>
+              </a:rPr>
+              <a:t>”</a:t>
+            </a:r>
+            <a:r>
+              <a:rPr lang="zh-CN" altLang="en-US">
+                <a:sym typeface="+mn-ea"/>
+              </a:rPr>
+              <a:t>；旧版更像</a:t>
+            </a:r>
+            <a:r>
+              <a:rPr lang="en-US" altLang="zh-CN">
+                <a:sym typeface="+mn-ea"/>
+              </a:rPr>
+              <a:t>“</a:t>
+            </a:r>
+            <a:r>
+              <a:rPr lang="zh-CN" altLang="en-US">
+                <a:sym typeface="+mn-ea"/>
+              </a:rPr>
+              <a:t>每个</a:t>
+            </a:r>
+            <a:r>
+              <a:rPr lang="en-US" altLang="zh-CN">
+                <a:sym typeface="+mn-ea"/>
+              </a:rPr>
+              <a:t> trial </a:t>
+            </a:r>
+            <a:r>
+              <a:rPr lang="zh-CN" altLang="en-US">
+                <a:sym typeface="+mn-ea"/>
+              </a:rPr>
+              <a:t>的边界都在乱跳</a:t>
+            </a:r>
+            <a:r>
+              <a:rPr lang="en-US" altLang="zh-CN">
+                <a:sym typeface="+mn-ea"/>
+              </a:rPr>
+              <a:t>”</a:t>
+            </a:r>
+            <a:r>
+              <a:rPr lang="zh-CN" altLang="en-US">
+                <a:sym typeface="+mn-ea"/>
+              </a:rPr>
+              <a:t>。</a:t>
+            </a:r>
+            <a:endParaRPr lang="zh-CN" altLang="en-US"/>
+          </a:p>
+          <a:p>
+            <a:endParaRPr lang="en-US" altLang="zh-CN"/>
+          </a:p>
+          <a:p>
+            <a:r>
+              <a:rPr lang="en-US" altLang="zh-CN">
+                <a:sym typeface="+mn-ea"/>
+              </a:rPr>
+              <a:t>v </a:t>
+            </a:r>
+            <a:r>
+              <a:rPr lang="zh-CN" altLang="en-US">
+                <a:sym typeface="+mn-ea"/>
+              </a:rPr>
+              <a:t>的噪声位置变了，但分布思想基本一致</a:t>
+            </a:r>
+            <a:endParaRPr lang="zh-CN" altLang="en-US"/>
+          </a:p>
+          <a:p>
+            <a:r>
+              <a:rPr lang="zh-CN" altLang="en-US">
+                <a:sym typeface="+mn-ea"/>
+              </a:rPr>
+              <a:t>旧版是在</a:t>
+            </a:r>
+            <a:r>
+              <a:rPr lang="en-US" altLang="zh-CN">
+                <a:sym typeface="+mn-ea"/>
+              </a:rPr>
+              <a:t> compute_v() </a:t>
+            </a:r>
+            <a:r>
+              <a:rPr lang="zh-CN" altLang="en-US">
+                <a:sym typeface="+mn-ea"/>
+              </a:rPr>
+              <a:t>里面直接</a:t>
+            </a:r>
+            <a:r>
+              <a:rPr lang="en-US" altLang="zh-CN">
+                <a:sym typeface="+mn-ea"/>
+              </a:rPr>
+              <a:t> v = np.random.normal(v_1, 1)</a:t>
+            </a:r>
+            <a:r>
+              <a:rPr lang="zh-CN" altLang="en-US">
+                <a:sym typeface="+mn-ea"/>
+              </a:rPr>
+              <a:t>。</a:t>
+            </a:r>
+            <a:endParaRPr lang="zh-CN" altLang="en-US"/>
+          </a:p>
+          <a:p>
+            <a:r>
+              <a:rPr lang="zh-CN" altLang="en-US">
+                <a:sym typeface="+mn-ea"/>
+              </a:rPr>
+              <a:t>新版</a:t>
+            </a:r>
+            <a:r>
+              <a:rPr lang="en-US" altLang="zh-CN">
+                <a:sym typeface="+mn-ea"/>
+              </a:rPr>
+              <a:t> compute_v() </a:t>
+            </a:r>
+            <a:r>
+              <a:rPr lang="zh-CN" altLang="en-US">
+                <a:sym typeface="+mn-ea"/>
+              </a:rPr>
+              <a:t>返回确定性的</a:t>
+            </a:r>
+            <a:r>
+              <a:rPr lang="en-US" altLang="zh-CN">
+                <a:sym typeface="+mn-ea"/>
+              </a:rPr>
+              <a:t> v_1</a:t>
+            </a:r>
+            <a:r>
+              <a:rPr lang="zh-CN" altLang="en-US">
+                <a:sym typeface="+mn-ea"/>
+              </a:rPr>
+              <a:t>，然后在生成</a:t>
+            </a:r>
+            <a:r>
+              <a:rPr lang="en-US" altLang="zh-CN">
+                <a:sym typeface="+mn-ea"/>
+              </a:rPr>
+              <a:t> trial </a:t>
+            </a:r>
+            <a:r>
+              <a:rPr lang="zh-CN" altLang="en-US">
+                <a:sym typeface="+mn-ea"/>
+              </a:rPr>
+              <a:t>时再做</a:t>
+            </a:r>
+            <a:r>
+              <a:rPr lang="en-US" altLang="zh-CN">
+                <a:sym typeface="+mn-ea"/>
+              </a:rPr>
+              <a:t> v = np.random.normal(v, 1)</a:t>
+            </a:r>
+            <a:r>
+              <a:rPr lang="zh-CN" altLang="en-US">
+                <a:sym typeface="+mn-ea"/>
+              </a:rPr>
+              <a:t>。</a:t>
+            </a:r>
+            <a:endParaRPr lang="zh-CN" altLang="en-US"/>
+          </a:p>
+          <a:p>
+            <a:r>
+              <a:rPr lang="zh-CN" altLang="en-US">
+                <a:sym typeface="+mn-ea"/>
+              </a:rPr>
+              <a:t>数学效果接近，但新版把</a:t>
+            </a:r>
+            <a:r>
+              <a:rPr lang="en-US" altLang="zh-CN">
+                <a:sym typeface="+mn-ea"/>
+              </a:rPr>
+              <a:t>“</a:t>
+            </a:r>
+            <a:r>
+              <a:rPr lang="zh-CN" altLang="en-US">
+                <a:sym typeface="+mn-ea"/>
+              </a:rPr>
+              <a:t>参数函数</a:t>
+            </a:r>
+            <a:r>
+              <a:rPr lang="en-US" altLang="zh-CN">
+                <a:sym typeface="+mn-ea"/>
+              </a:rPr>
+              <a:t>”</a:t>
+            </a:r>
+            <a:r>
+              <a:rPr lang="zh-CN" altLang="en-US">
+                <a:sym typeface="+mn-ea"/>
+              </a:rPr>
+              <a:t>和</a:t>
+            </a:r>
+            <a:r>
+              <a:rPr lang="en-US" altLang="zh-CN">
+                <a:sym typeface="+mn-ea"/>
+              </a:rPr>
+              <a:t>“</a:t>
+            </a:r>
+            <a:r>
+              <a:rPr lang="zh-CN" altLang="en-US">
+                <a:sym typeface="+mn-ea"/>
+              </a:rPr>
+              <a:t>随机采样</a:t>
+            </a:r>
+            <a:r>
+              <a:rPr lang="en-US" altLang="zh-CN">
+                <a:sym typeface="+mn-ea"/>
+              </a:rPr>
+              <a:t>”</a:t>
+            </a:r>
+            <a:r>
+              <a:rPr lang="zh-CN" altLang="en-US">
+                <a:sym typeface="+mn-ea"/>
+              </a:rPr>
+              <a:t>拆开了，结构更清楚。可复现性设置更完整</a:t>
+            </a:r>
+            <a:endParaRPr lang="zh-CN" altLang="en-US"/>
+          </a:p>
+        </p:txBody>
+      </p:sp>
+    </p:spTree>
+  </p:cSld>
+  <p:clrMapOvr>
+    <a:masterClrMapping/>
+  </p:clrMapOvr>
+</p:sld>
+</file>
+
+<file path=ppt/slides/slide6.xml><?xml version="1.0" encoding="utf-8"?>
+<p:sld xmlns:a="http://schemas.openxmlformats.org/drawingml/2006/main" xmlns:r="http://schemas.openxmlformats.org/officeDocument/2006/relationships" xmlns:p="http://schemas.openxmlformats.org/presentationml/2006/main">
+  <p:cSld>
+    <p:spTree>
+      <p:nvGrpSpPr>
+        <p:cNvPr id="1" name=""/>
+        <p:cNvGrpSpPr/>
+        <p:nvPr/>
+      </p:nvGrpSpPr>
+      <p:grpSpPr/>
+      <p:sp>
+        <p:nvSpPr>
+          <p:cNvPr id="4" name="文本框 3"/>
+          <p:cNvSpPr txBox="1"/>
+          <p:nvPr/>
+        </p:nvSpPr>
+        <p:spPr>
+          <a:xfrm>
+            <a:off x="563880" y="208280"/>
+            <a:ext cx="4064000" cy="368300"/>
+          </a:xfrm>
+          <a:prstGeom prst="rect">
+            <a:avLst/>
+          </a:prstGeom>
+          <a:noFill/>
+        </p:spPr>
+        <p:txBody>
+          <a:bodyPr wrap="square" rtlCol="0">
+            <a:spAutoFit/>
+          </a:bodyPr>
+          <a:p>
+            <a:r>
+              <a:rPr lang="en-US" altLang="zh-CN"/>
+              <a:t>S2_gen_data_optimized.ipynb</a:t>
+            </a:r>
+            <a:endParaRPr lang="en-US" altLang="zh-CN"/>
+          </a:p>
+        </p:txBody>
+      </p:sp>
+      <p:sp>
+        <p:nvSpPr>
+          <p:cNvPr id="5" name="文本框 4"/>
+          <p:cNvSpPr txBox="1"/>
+          <p:nvPr/>
+        </p:nvSpPr>
+        <p:spPr>
+          <a:xfrm>
+            <a:off x="196850" y="890270"/>
+            <a:ext cx="11995150" cy="5908040"/>
+          </a:xfrm>
+          <a:prstGeom prst="rect">
+            <a:avLst/>
+          </a:prstGeom>
+          <a:noFill/>
+        </p:spPr>
+        <p:txBody>
+          <a:bodyPr wrap="square" rtlCol="0">
+            <a:spAutoFit/>
+          </a:bodyPr>
+          <a:p>
+            <a:r>
+              <a:rPr lang="en-US" altLang="zh-CN">
+                <a:sym typeface="+mn-ea"/>
+              </a:rPr>
+              <a:t>S2_gen_data_optimized.ipynb </a:t>
+            </a:r>
+            <a:r>
+              <a:rPr lang="zh-CN" altLang="en-US">
+                <a:sym typeface="+mn-ea"/>
+              </a:rPr>
+              <a:t>不是完全换了一个模型，而是在保留</a:t>
+            </a:r>
+            <a:r>
+              <a:rPr lang="en-US" altLang="zh-CN">
+                <a:sym typeface="+mn-ea"/>
+              </a:rPr>
+              <a:t> P/T/W -&gt; v/a -&gt; RT/response </a:t>
+            </a:r>
+            <a:r>
+              <a:rPr lang="zh-CN" altLang="en-US">
+                <a:sym typeface="+mn-ea"/>
+              </a:rPr>
+              <a:t>这条主思路的基础上，修正了部分参数设定，重构了</a:t>
+            </a:r>
+            <a:r>
+              <a:rPr lang="en-US" altLang="zh-CN">
+                <a:sym typeface="+mn-ea"/>
+              </a:rPr>
+              <a:t> a </a:t>
+            </a:r>
+            <a:r>
+              <a:rPr lang="zh-CN" altLang="en-US">
+                <a:sym typeface="+mn-ea"/>
+              </a:rPr>
+              <a:t>的噪声层级，并且把生成流程改成了</a:t>
+            </a:r>
+            <a:r>
+              <a:rPr lang="en-US" altLang="zh-CN">
+                <a:sym typeface="+mn-ea"/>
+              </a:rPr>
+              <a:t>“</a:t>
+            </a:r>
+            <a:r>
+              <a:rPr lang="zh-CN" altLang="en-US">
+                <a:sym typeface="+mn-ea"/>
+              </a:rPr>
+              <a:t>可验证、可并行、可复现</a:t>
+            </a:r>
+            <a:r>
+              <a:rPr lang="en-US" altLang="zh-CN">
+                <a:sym typeface="+mn-ea"/>
+              </a:rPr>
+              <a:t>”</a:t>
+            </a:r>
+            <a:r>
+              <a:rPr lang="zh-CN" altLang="en-US">
+                <a:sym typeface="+mn-ea"/>
+              </a:rPr>
+              <a:t>的版本。真正大的差异主要有两类：参数函数不同，和有效</a:t>
+            </a:r>
+            <a:r>
+              <a:rPr lang="en-US" altLang="zh-CN">
+                <a:sym typeface="+mn-ea"/>
+              </a:rPr>
+              <a:t> trial </a:t>
+            </a:r>
+            <a:r>
+              <a:rPr lang="zh-CN" altLang="en-US">
+                <a:sym typeface="+mn-ea"/>
+              </a:rPr>
+              <a:t>的保留策略不同。</a:t>
+            </a:r>
+            <a:endParaRPr lang="zh-CN" altLang="en-US"/>
+          </a:p>
+          <a:p>
+            <a:endParaRPr lang="en-US" altLang="zh-CN"/>
+          </a:p>
+          <a:p>
+            <a:r>
+              <a:rPr lang="en-US" altLang="zh-CN">
+                <a:sym typeface="+mn-ea"/>
+              </a:rPr>
+              <a:t>2. </a:t>
+            </a:r>
+            <a:r>
+              <a:rPr lang="zh-CN" altLang="en-US">
+                <a:sym typeface="+mn-ea"/>
+              </a:rPr>
+              <a:t>数据生成流程上的差异</a:t>
+            </a:r>
+            <a:endParaRPr lang="zh-CN" altLang="en-US"/>
+          </a:p>
+          <a:p>
+            <a:endParaRPr lang="en-US" altLang="zh-CN"/>
+          </a:p>
+          <a:p>
+            <a:r>
+              <a:rPr lang="zh-CN" altLang="en-US">
+                <a:sym typeface="+mn-ea"/>
+              </a:rPr>
+              <a:t>旧版会</a:t>
+            </a:r>
+            <a:r>
+              <a:rPr lang="en-US" altLang="zh-CN">
+                <a:sym typeface="+mn-ea"/>
+              </a:rPr>
+              <a:t>“</a:t>
+            </a:r>
+            <a:r>
+              <a:rPr lang="zh-CN" altLang="en-US">
+                <a:sym typeface="+mn-ea"/>
+              </a:rPr>
+              <a:t>补足有效</a:t>
+            </a:r>
+            <a:r>
+              <a:rPr lang="en-US" altLang="zh-CN">
+                <a:sym typeface="+mn-ea"/>
+              </a:rPr>
+              <a:t> trial”</a:t>
+            </a:r>
+            <a:r>
+              <a:rPr lang="zh-CN" altLang="en-US">
+                <a:sym typeface="+mn-ea"/>
+              </a:rPr>
+              <a:t>，新版不会</a:t>
+            </a:r>
+            <a:endParaRPr lang="zh-CN" altLang="en-US"/>
+          </a:p>
+          <a:p>
+            <a:r>
+              <a:rPr lang="zh-CN" altLang="en-US">
+                <a:sym typeface="+mn-ea"/>
+              </a:rPr>
+              <a:t>这是最关键的生成差异。</a:t>
+            </a:r>
+            <a:endParaRPr lang="zh-CN" altLang="en-US"/>
+          </a:p>
+          <a:p>
+            <a:endParaRPr lang="en-US" altLang="zh-CN"/>
+          </a:p>
+          <a:p>
+            <a:r>
+              <a:rPr lang="zh-CN" altLang="en-US">
+                <a:sym typeface="+mn-ea"/>
+              </a:rPr>
+              <a:t>旧版在</a:t>
+            </a:r>
+            <a:r>
+              <a:rPr lang="en-US" altLang="zh-CN">
+                <a:sym typeface="+mn-ea"/>
+              </a:rPr>
+              <a:t> S2_gen_data.ipynb </a:t>
+            </a:r>
+            <a:r>
+              <a:rPr lang="zh-CN" altLang="en-US">
+                <a:sym typeface="+mn-ea"/>
+              </a:rPr>
+              <a:t>里用：</a:t>
+            </a:r>
+            <a:endParaRPr lang="zh-CN" altLang="en-US"/>
+          </a:p>
+          <a:p>
+            <a:r>
+              <a:rPr lang="en-US" altLang="zh-CN">
+                <a:sym typeface="+mn-ea"/>
+              </a:rPr>
+              <a:t>while trial_count &lt; trials_per_condition</a:t>
+            </a:r>
+            <a:endParaRPr lang="en-US" altLang="zh-CN"/>
+          </a:p>
+          <a:p>
+            <a:endParaRPr lang="en-US" altLang="zh-CN"/>
+          </a:p>
+          <a:p>
+            <a:r>
+              <a:rPr lang="zh-CN" altLang="en-US">
+                <a:sym typeface="+mn-ea"/>
+              </a:rPr>
+              <a:t>只有</a:t>
+            </a:r>
+            <a:r>
+              <a:rPr lang="en-US" altLang="zh-CN">
+                <a:sym typeface="+mn-ea"/>
+              </a:rPr>
+              <a:t> trial </a:t>
+            </a:r>
+            <a:r>
+              <a:rPr lang="zh-CN" altLang="en-US">
+                <a:sym typeface="+mn-ea"/>
+              </a:rPr>
+              <a:t>有效时才</a:t>
+            </a:r>
+            <a:r>
+              <a:rPr lang="en-US" altLang="zh-CN">
+                <a:sym typeface="+mn-ea"/>
+              </a:rPr>
+              <a:t> trial_count += 1</a:t>
+            </a:r>
+            <a:r>
+              <a:rPr lang="zh-CN" altLang="en-US">
+                <a:sym typeface="+mn-ea"/>
+              </a:rPr>
+              <a:t>，所以它会一直试，直到每个条件攒够目标</a:t>
+            </a:r>
+            <a:r>
+              <a:rPr lang="en-US" altLang="zh-CN">
+                <a:sym typeface="+mn-ea"/>
+              </a:rPr>
+              <a:t> trial </a:t>
+            </a:r>
+            <a:r>
+              <a:rPr lang="zh-CN" altLang="en-US">
+                <a:sym typeface="+mn-ea"/>
+              </a:rPr>
+              <a:t>数。</a:t>
+            </a:r>
+            <a:endParaRPr lang="zh-CN" altLang="en-US"/>
+          </a:p>
+          <a:p>
+            <a:r>
+              <a:rPr lang="zh-CN" altLang="en-US">
+                <a:sym typeface="+mn-ea"/>
+              </a:rPr>
+              <a:t>结果是：每个被试、每个条件的有效</a:t>
+            </a:r>
+            <a:r>
+              <a:rPr lang="en-US" altLang="zh-CN">
+                <a:sym typeface="+mn-ea"/>
+              </a:rPr>
+              <a:t> trial </a:t>
+            </a:r>
+            <a:r>
+              <a:rPr lang="zh-CN" altLang="en-US">
+                <a:sym typeface="+mn-ea"/>
+              </a:rPr>
+              <a:t>数基本固定。</a:t>
+            </a:r>
+            <a:endParaRPr lang="zh-CN" altLang="en-US"/>
+          </a:p>
+          <a:p>
+            <a:endParaRPr lang="en-US" altLang="zh-CN"/>
+          </a:p>
+          <a:p>
+            <a:r>
+              <a:rPr lang="zh-CN" altLang="en-US">
+                <a:sym typeface="+mn-ea"/>
+              </a:rPr>
+              <a:t>新版在</a:t>
+            </a:r>
+            <a:r>
+              <a:rPr lang="en-US" altLang="zh-CN">
+                <a:sym typeface="+mn-ea"/>
+              </a:rPr>
+              <a:t> S2_gen_data_optimized.ipynb </a:t>
+            </a:r>
+            <a:r>
+              <a:rPr lang="zh-CN" altLang="en-US">
+                <a:sym typeface="+mn-ea"/>
+              </a:rPr>
+              <a:t>里是：</a:t>
+            </a:r>
+            <a:endParaRPr lang="zh-CN" altLang="en-US"/>
+          </a:p>
+          <a:p>
+            <a:r>
+              <a:rPr lang="en-US" altLang="zh-CN">
+                <a:sym typeface="+mn-ea"/>
+              </a:rPr>
+              <a:t>for trial in range(trials_per_condition)</a:t>
+            </a:r>
+            <a:endParaRPr lang="en-US" altLang="zh-CN"/>
+          </a:p>
+          <a:p>
+            <a:r>
+              <a:rPr lang="zh-CN" altLang="en-US">
+                <a:sym typeface="+mn-ea"/>
+              </a:rPr>
+              <a:t>如果</a:t>
+            </a:r>
+            <a:r>
+              <a:rPr lang="en-US" altLang="zh-CN">
+                <a:sym typeface="+mn-ea"/>
+              </a:rPr>
+              <a:t> trial </a:t>
+            </a:r>
+            <a:r>
+              <a:rPr lang="zh-CN" altLang="en-US">
+                <a:sym typeface="+mn-ea"/>
+              </a:rPr>
+              <a:t>无效，就直接丢弃，不重试。</a:t>
+            </a:r>
+            <a:endParaRPr lang="zh-CN" altLang="en-US"/>
+          </a:p>
+          <a:p>
+            <a:r>
+              <a:rPr lang="zh-CN" altLang="en-US">
+                <a:sym typeface="+mn-ea"/>
+              </a:rPr>
+              <a:t>结果是：最终每个被试、每个条件保留下来的行数可能少于计划值，而且不同条件之间会不完全一样。</a:t>
+            </a:r>
+            <a:endParaRPr lang="zh-CN" altLang="en-US"/>
+          </a:p>
+          <a:p>
+            <a:endParaRPr lang="en-US" altLang="zh-CN"/>
+          </a:p>
+          <a:p>
+            <a:r>
+              <a:rPr lang="zh-CN" altLang="en-US">
+                <a:sym typeface="+mn-ea"/>
+              </a:rPr>
+              <a:t>这个差异会直接影响后续的均值、准确率、</a:t>
+            </a:r>
+            <a:r>
+              <a:rPr lang="en-US" altLang="zh-CN">
+                <a:sym typeface="+mn-ea"/>
+              </a:rPr>
+              <a:t>Cohen's d</a:t>
+            </a:r>
+            <a:r>
+              <a:rPr lang="zh-CN" altLang="en-US">
+                <a:sym typeface="+mn-ea"/>
+              </a:rPr>
+              <a:t>，甚至设计空间表面的平滑程度。</a:t>
+            </a:r>
+            <a:endParaRPr lang="zh-CN" altLang="en-US"/>
+          </a:p>
+        </p:txBody>
+      </p:sp>
+    </p:spTree>
+  </p:cSld>
+  <p:clrMapOvr>
+    <a:masterClrMapping/>
+  </p:clrMapOvr>
+</p:sld>
+</file>
+
+<file path=ppt/slides/slide7.xml><?xml version="1.0" encoding="utf-8"?>
 <p:sld xmlns:a="http://schemas.openxmlformats.org/drawingml/2006/main" xmlns:r="http://schemas.openxmlformats.org/officeDocument/2006/relationships" xmlns:p="http://schemas.openxmlformats.org/presentationml/2006/main">
   <p:cSld>
     <p:spTree>

--- a/4_Reports/Code_Version.pptx
+++ b/4_Reports/Code_Version.pptx
@@ -12,6 +12,8 @@
     <p:sldId id="261" r:id="rId7"/>
     <p:sldId id="262" r:id="rId8"/>
     <p:sldId id="259" r:id="rId9"/>
+    <p:sldId id="263" r:id="rId10"/>
+    <p:sldId id="264" r:id="rId11"/>
   </p:sldIdLst>
   <p:sldSz cx="12192000" cy="6858000"/>
   <p:notesSz cx="6858000" cy="9144000"/>
@@ -5361,6 +5363,5278 @@
         <p:nvPr/>
       </p:nvGrpSpPr>
       <p:grpSpPr/>
+      <p:graphicFrame>
+        <p:nvGraphicFramePr>
+          <p:cNvPr id="2" name="表格 1"/>
+          <p:cNvGraphicFramePr/>
+          <p:nvPr/>
+        </p:nvGraphicFramePr>
+        <p:xfrm>
+          <a:off x="0" y="635"/>
+          <a:ext cx="12192000" cy="6857365"/>
+        </p:xfrm>
+        <a:graphic>
+          <a:graphicData uri="http://schemas.openxmlformats.org/drawingml/2006/table">
+            <a:tbl>
+              <a:tblPr/>
+              <a:tblGrid>
+                <a:gridCol w="2711450"/>
+                <a:gridCol w="2634615"/>
+                <a:gridCol w="3649980"/>
+                <a:gridCol w="3195955"/>
+              </a:tblGrid>
+              <a:tr h="342265">
+                <a:tc>
+                  <a:txBody>
+                    <a:bodyPr/>
+                    <a:p>
+                      <a:pPr algn="ctr" fontAlgn="ctr"/>
+                      <a:r>
+                        <a:rPr lang="zh-CN" altLang="en-US" sz="2000" b="1" i="0">
+                          <a:solidFill>
+                            <a:srgbClr val="616161"/>
+                          </a:solidFill>
+                          <a:latin typeface="宋体" panose="02010600030101010101" pitchFamily="2" charset="-122"/>
+                          <a:ea typeface="宋体" panose="02010600030101010101" pitchFamily="2" charset="-122"/>
+                        </a:rPr>
+                        <a:t>项目</a:t>
+                      </a:r>
+                      <a:endParaRPr lang="zh-CN" altLang="en-US" sz="2000" b="1" i="0">
+                        <a:solidFill>
+                          <a:srgbClr val="616161"/>
+                        </a:solidFill>
+                        <a:latin typeface="宋体" panose="02010600030101010101" pitchFamily="2" charset="-122"/>
+                        <a:ea typeface="宋体" panose="02010600030101010101" pitchFamily="2" charset="-122"/>
+                      </a:endParaRPr>
+                    </a:p>
+                  </a:txBody>
+                  <a:tcPr marL="6667" marR="6667" marT="6667" marB="0" anchor="ctr" anchorCtr="0">
+                    <a:lnL>
+                      <a:noFill/>
+                    </a:lnL>
+                    <a:lnR>
+                      <a:noFill/>
+                    </a:lnR>
+                    <a:lnT>
+                      <a:noFill/>
+                    </a:lnT>
+                    <a:lnB>
+                      <a:noFill/>
+                    </a:lnB>
+                    <a:solidFill>
+                      <a:schemeClr val="accent5">
+                        <a:lumMod val="40000"/>
+                        <a:lumOff val="60000"/>
+                      </a:schemeClr>
+                    </a:solidFill>
+                  </a:tcPr>
+                </a:tc>
+                <a:tc>
+                  <a:txBody>
+                    <a:bodyPr/>
+                    <a:p>
+                      <a:pPr algn="ctr" fontAlgn="ctr"/>
+                      <a:r>
+                        <a:rPr lang="zh-CN" altLang="en-US" sz="2000" b="1" i="0">
+                          <a:solidFill>
+                            <a:srgbClr val="616161"/>
+                          </a:solidFill>
+                          <a:latin typeface="宋体" panose="02010600030101010101" pitchFamily="2" charset="-122"/>
+                          <a:ea typeface="宋体" panose="02010600030101010101" pitchFamily="2" charset="-122"/>
+                        </a:rPr>
+                        <a:t>旧版 </a:t>
+                      </a:r>
+                      <a:r>
+                        <a:rPr lang="en-US" altLang="zh-CN" sz="2000" b="1" i="0">
+                          <a:solidFill>
+                            <a:srgbClr val="616161"/>
+                          </a:solidFill>
+                          <a:latin typeface="宋体" panose="02010600030101010101" pitchFamily="2" charset="-122"/>
+                          <a:ea typeface="宋体" panose="02010600030101010101" pitchFamily="2" charset="-122"/>
+                        </a:rPr>
+                        <a:t>S2_gen_data.ipynb</a:t>
+                      </a:r>
+                      <a:endParaRPr lang="en-US" altLang="zh-CN" sz="2000" b="1" i="0">
+                        <a:solidFill>
+                          <a:srgbClr val="616161"/>
+                        </a:solidFill>
+                        <a:latin typeface="宋体" panose="02010600030101010101" pitchFamily="2" charset="-122"/>
+                        <a:ea typeface="宋体" panose="02010600030101010101" pitchFamily="2" charset="-122"/>
+                      </a:endParaRPr>
+                    </a:p>
+                  </a:txBody>
+                  <a:tcPr marL="6667" marR="6667" marT="6667" marB="0" anchor="ctr" anchorCtr="0">
+                    <a:lnL>
+                      <a:noFill/>
+                    </a:lnL>
+                    <a:lnR>
+                      <a:noFill/>
+                    </a:lnR>
+                    <a:lnT>
+                      <a:noFill/>
+                    </a:lnT>
+                    <a:lnB>
+                      <a:noFill/>
+                    </a:lnB>
+                    <a:solidFill>
+                      <a:schemeClr val="accent5">
+                        <a:lumMod val="40000"/>
+                        <a:lumOff val="60000"/>
+                      </a:schemeClr>
+                    </a:solidFill>
+                  </a:tcPr>
+                </a:tc>
+                <a:tc>
+                  <a:txBody>
+                    <a:bodyPr/>
+                    <a:p>
+                      <a:pPr algn="ctr" fontAlgn="ctr"/>
+                      <a:r>
+                        <a:rPr lang="zh-CN" altLang="en-US" sz="2000" b="1" i="0">
+                          <a:solidFill>
+                            <a:srgbClr val="616161"/>
+                          </a:solidFill>
+                          <a:latin typeface="宋体" panose="02010600030101010101" pitchFamily="2" charset="-122"/>
+                          <a:ea typeface="宋体" panose="02010600030101010101" pitchFamily="2" charset="-122"/>
+                        </a:rPr>
+                        <a:t>新版 </a:t>
+                      </a:r>
+                      <a:r>
+                        <a:rPr lang="en-US" altLang="zh-CN" sz="2000" b="1" i="0">
+                          <a:solidFill>
+                            <a:srgbClr val="616161"/>
+                          </a:solidFill>
+                          <a:latin typeface="宋体" panose="02010600030101010101" pitchFamily="2" charset="-122"/>
+                          <a:ea typeface="宋体" panose="02010600030101010101" pitchFamily="2" charset="-122"/>
+                        </a:rPr>
+                        <a:t>S2_gen_data_optimized.ipynb</a:t>
+                      </a:r>
+                      <a:endParaRPr lang="en-US" altLang="zh-CN" sz="2000" b="1" i="0">
+                        <a:solidFill>
+                          <a:srgbClr val="616161"/>
+                        </a:solidFill>
+                        <a:latin typeface="宋体" panose="02010600030101010101" pitchFamily="2" charset="-122"/>
+                        <a:ea typeface="宋体" panose="02010600030101010101" pitchFamily="2" charset="-122"/>
+                      </a:endParaRPr>
+                    </a:p>
+                  </a:txBody>
+                  <a:tcPr marL="6667" marR="6667" marT="6667" marB="0" anchor="ctr" anchorCtr="0">
+                    <a:lnL>
+                      <a:noFill/>
+                    </a:lnL>
+                    <a:lnR>
+                      <a:noFill/>
+                    </a:lnR>
+                    <a:lnT>
+                      <a:noFill/>
+                    </a:lnT>
+                    <a:lnB>
+                      <a:noFill/>
+                    </a:lnB>
+                    <a:solidFill>
+                      <a:schemeClr val="accent5">
+                        <a:lumMod val="40000"/>
+                        <a:lumOff val="60000"/>
+                      </a:schemeClr>
+                    </a:solidFill>
+                  </a:tcPr>
+                </a:tc>
+                <a:tc>
+                  <a:txBody>
+                    <a:bodyPr/>
+                    <a:p>
+                      <a:pPr algn="ctr" fontAlgn="ctr"/>
+                      <a:r>
+                        <a:rPr lang="zh-CN" altLang="en-US" sz="2000" b="1" i="0">
+                          <a:solidFill>
+                            <a:srgbClr val="616161"/>
+                          </a:solidFill>
+                          <a:latin typeface="宋体" panose="02010600030101010101" pitchFamily="2" charset="-122"/>
+                          <a:ea typeface="宋体" panose="02010600030101010101" pitchFamily="2" charset="-122"/>
+                        </a:rPr>
+                        <a:t>变化含义</a:t>
+                      </a:r>
+                      <a:endParaRPr lang="zh-CN" altLang="en-US" sz="2000" b="1" i="0">
+                        <a:solidFill>
+                          <a:srgbClr val="616161"/>
+                        </a:solidFill>
+                        <a:latin typeface="宋体" panose="02010600030101010101" pitchFamily="2" charset="-122"/>
+                        <a:ea typeface="宋体" panose="02010600030101010101" pitchFamily="2" charset="-122"/>
+                      </a:endParaRPr>
+                    </a:p>
+                  </a:txBody>
+                  <a:tcPr marL="6667" marR="6667" marT="6667" marB="0" anchor="ctr" anchorCtr="0">
+                    <a:lnL>
+                      <a:noFill/>
+                    </a:lnL>
+                    <a:lnR>
+                      <a:noFill/>
+                    </a:lnR>
+                    <a:lnT>
+                      <a:noFill/>
+                    </a:lnT>
+                    <a:lnB>
+                      <a:noFill/>
+                    </a:lnB>
+                    <a:solidFill>
+                      <a:schemeClr val="accent5">
+                        <a:lumMod val="40000"/>
+                        <a:lumOff val="60000"/>
+                      </a:schemeClr>
+                    </a:solidFill>
+                  </a:tcPr>
+                </a:tc>
+              </a:tr>
+              <a:tr h="184150">
+                <a:tc>
+                  <a:txBody>
+                    <a:bodyPr/>
+                    <a:p>
+                      <a:pPr algn="ctr" fontAlgn="ctr"/>
+                      <a:r>
+                        <a:rPr lang="en-US" altLang="zh-CN" sz="2000" b="1" i="0">
+                          <a:solidFill>
+                            <a:srgbClr val="657B83"/>
+                          </a:solidFill>
+                          <a:latin typeface="Segoe UI" panose="020B0502040204020203"/>
+                          <a:ea typeface="Segoe UI" panose="020B0502040204020203"/>
+                        </a:rPr>
+                        <a:t>notebook </a:t>
+                      </a:r>
+                      <a:r>
+                        <a:rPr lang="zh-CN" altLang="en-US" sz="2000" b="1" i="0">
+                          <a:solidFill>
+                            <a:srgbClr val="657B83"/>
+                          </a:solidFill>
+                          <a:latin typeface="Segoe UI" panose="020B0502040204020203"/>
+                          <a:ea typeface="Segoe UI" panose="020B0502040204020203"/>
+                        </a:rPr>
+                        <a:t>定位</a:t>
+                      </a:r>
+                      <a:endParaRPr lang="zh-CN" altLang="en-US" sz="2000" b="1" i="0">
+                        <a:solidFill>
+                          <a:srgbClr val="657B83"/>
+                        </a:solidFill>
+                        <a:latin typeface="Segoe UI" panose="020B0502040204020203"/>
+                        <a:ea typeface="Segoe UI" panose="020B0502040204020203"/>
+                      </a:endParaRPr>
+                    </a:p>
+                  </a:txBody>
+                  <a:tcPr marL="6667" marR="6667" marT="6667" marB="0" anchor="ctr" anchorCtr="0">
+                    <a:lnL>
+                      <a:noFill/>
+                    </a:lnL>
+                    <a:lnR>
+                      <a:noFill/>
+                    </a:lnR>
+                    <a:lnT>
+                      <a:noFill/>
+                    </a:lnT>
+                    <a:lnB>
+                      <a:noFill/>
+                    </a:lnB>
+                    <a:noFill/>
+                  </a:tcPr>
+                </a:tc>
+                <a:tc>
+                  <a:txBody>
+                    <a:bodyPr/>
+                    <a:p>
+                      <a:pPr algn="ctr" fontAlgn="ctr"/>
+                      <a:r>
+                        <a:rPr lang="zh-CN" altLang="en-US" sz="2000" b="1" i="0">
+                          <a:solidFill>
+                            <a:srgbClr val="657B83"/>
+                          </a:solidFill>
+                          <a:latin typeface="宋体" panose="02010600030101010101" pitchFamily="2" charset="-122"/>
+                          <a:ea typeface="宋体" panose="02010600030101010101" pitchFamily="2" charset="-122"/>
+                        </a:rPr>
+                        <a:t>早期原型</a:t>
+                      </a:r>
+                      <a:r>
+                        <a:rPr lang="en-US" altLang="zh-CN" sz="2000" b="1" i="0">
+                          <a:solidFill>
+                            <a:srgbClr val="657B83"/>
+                          </a:solidFill>
+                          <a:latin typeface="宋体" panose="02010600030101010101" pitchFamily="2" charset="-122"/>
+                          <a:ea typeface="宋体" panose="02010600030101010101" pitchFamily="2" charset="-122"/>
+                        </a:rPr>
+                        <a:t>/</a:t>
+                      </a:r>
+                      <a:r>
+                        <a:rPr lang="zh-CN" altLang="en-US" sz="2000" b="1" i="0">
+                          <a:solidFill>
+                            <a:srgbClr val="657B83"/>
+                          </a:solidFill>
+                          <a:latin typeface="宋体" panose="02010600030101010101" pitchFamily="2" charset="-122"/>
+                          <a:ea typeface="宋体" panose="02010600030101010101" pitchFamily="2" charset="-122"/>
+                        </a:rPr>
+                        <a:t>探索脚本</a:t>
+                      </a:r>
+                      <a:endParaRPr lang="zh-CN" altLang="en-US" sz="2000" b="1" i="0">
+                        <a:solidFill>
+                          <a:srgbClr val="657B83"/>
+                        </a:solidFill>
+                        <a:latin typeface="宋体" panose="02010600030101010101" pitchFamily="2" charset="-122"/>
+                        <a:ea typeface="宋体" panose="02010600030101010101" pitchFamily="2" charset="-122"/>
+                      </a:endParaRPr>
+                    </a:p>
+                  </a:txBody>
+                  <a:tcPr marL="6667" marR="6667" marT="6667" marB="0" anchor="ctr" anchorCtr="0">
+                    <a:lnL>
+                      <a:noFill/>
+                    </a:lnL>
+                    <a:lnR>
+                      <a:noFill/>
+                    </a:lnR>
+                    <a:lnT>
+                      <a:noFill/>
+                    </a:lnT>
+                    <a:lnB>
+                      <a:noFill/>
+                    </a:lnB>
+                    <a:noFill/>
+                  </a:tcPr>
+                </a:tc>
+                <a:tc>
+                  <a:txBody>
+                    <a:bodyPr/>
+                    <a:p>
+                      <a:pPr algn="ctr" fontAlgn="ctr"/>
+                      <a:r>
+                        <a:rPr lang="zh-CN" altLang="en-US" sz="2000" b="1" i="0">
+                          <a:solidFill>
+                            <a:srgbClr val="657B83"/>
+                          </a:solidFill>
+                          <a:latin typeface="宋体" panose="02010600030101010101" pitchFamily="2" charset="-122"/>
+                          <a:ea typeface="宋体" panose="02010600030101010101" pitchFamily="2" charset="-122"/>
+                        </a:rPr>
+                        <a:t>当前整理后的主生成器</a:t>
+                      </a:r>
+                      <a:endParaRPr lang="zh-CN" altLang="en-US" sz="2000" b="1" i="0">
+                        <a:solidFill>
+                          <a:srgbClr val="657B83"/>
+                        </a:solidFill>
+                        <a:latin typeface="宋体" panose="02010600030101010101" pitchFamily="2" charset="-122"/>
+                        <a:ea typeface="宋体" panose="02010600030101010101" pitchFamily="2" charset="-122"/>
+                      </a:endParaRPr>
+                    </a:p>
+                  </a:txBody>
+                  <a:tcPr marL="6667" marR="6667" marT="6667" marB="0" anchor="ctr" anchorCtr="0">
+                    <a:lnL>
+                      <a:noFill/>
+                    </a:lnL>
+                    <a:lnR>
+                      <a:noFill/>
+                    </a:lnR>
+                    <a:lnT>
+                      <a:noFill/>
+                    </a:lnT>
+                    <a:lnB>
+                      <a:noFill/>
+                    </a:lnB>
+                    <a:noFill/>
+                  </a:tcPr>
+                </a:tc>
+                <a:tc>
+                  <a:txBody>
+                    <a:bodyPr/>
+                    <a:p>
+                      <a:pPr algn="ctr" fontAlgn="ctr"/>
+                      <a:r>
+                        <a:rPr lang="zh-CN" altLang="en-US" sz="2000" b="1" i="0">
+                          <a:solidFill>
+                            <a:srgbClr val="657B83"/>
+                          </a:solidFill>
+                          <a:latin typeface="宋体" panose="02010600030101010101" pitchFamily="2" charset="-122"/>
+                          <a:ea typeface="宋体" panose="02010600030101010101" pitchFamily="2" charset="-122"/>
+                        </a:rPr>
+                        <a:t>新版更像正式版</a:t>
+                      </a:r>
+                      <a:endParaRPr lang="zh-CN" altLang="en-US" sz="2000" b="1" i="0">
+                        <a:solidFill>
+                          <a:srgbClr val="657B83"/>
+                        </a:solidFill>
+                        <a:latin typeface="宋体" panose="02010600030101010101" pitchFamily="2" charset="-122"/>
+                        <a:ea typeface="宋体" panose="02010600030101010101" pitchFamily="2" charset="-122"/>
+                      </a:endParaRPr>
+                    </a:p>
+                  </a:txBody>
+                  <a:tcPr marL="6667" marR="6667" marT="6667" marB="0" anchor="ctr" anchorCtr="0">
+                    <a:lnL>
+                      <a:noFill/>
+                    </a:lnL>
+                    <a:lnR>
+                      <a:noFill/>
+                    </a:lnR>
+                    <a:lnT>
+                      <a:noFill/>
+                    </a:lnT>
+                    <a:lnB>
+                      <a:noFill/>
+                    </a:lnB>
+                    <a:noFill/>
+                  </a:tcPr>
+                </a:tc>
+              </a:tr>
+              <a:tr h="185420">
+                <a:tc>
+                  <a:txBody>
+                    <a:bodyPr/>
+                    <a:p>
+                      <a:pPr algn="ctr" fontAlgn="ctr"/>
+                      <a:r>
+                        <a:rPr lang="zh-CN" altLang="en-US" sz="2000" b="1" i="0">
+                          <a:solidFill>
+                            <a:srgbClr val="657B83"/>
+                          </a:solidFill>
+                          <a:latin typeface="宋体" panose="02010600030101010101" pitchFamily="2" charset="-122"/>
+                          <a:ea typeface="宋体" panose="02010600030101010101" pitchFamily="2" charset="-122"/>
+                        </a:rPr>
+                        <a:t>随机种子</a:t>
+                      </a:r>
+                      <a:endParaRPr lang="zh-CN" altLang="en-US" sz="2000" b="1" i="0">
+                        <a:solidFill>
+                          <a:srgbClr val="657B83"/>
+                        </a:solidFill>
+                        <a:latin typeface="宋体" panose="02010600030101010101" pitchFamily="2" charset="-122"/>
+                        <a:ea typeface="宋体" panose="02010600030101010101" pitchFamily="2" charset="-122"/>
+                      </a:endParaRPr>
+                    </a:p>
+                  </a:txBody>
+                  <a:tcPr marL="6667" marR="6667" marT="6667" marB="0" anchor="ctr" anchorCtr="0">
+                    <a:lnL>
+                      <a:noFill/>
+                    </a:lnL>
+                    <a:lnR>
+                      <a:noFill/>
+                    </a:lnR>
+                    <a:lnT>
+                      <a:noFill/>
+                    </a:lnT>
+                    <a:lnB>
+                      <a:noFill/>
+                    </a:lnB>
+                    <a:noFill/>
+                  </a:tcPr>
+                </a:tc>
+                <a:tc>
+                  <a:txBody>
+                    <a:bodyPr/>
+                    <a:p>
+                      <a:pPr algn="ctr" fontAlgn="ctr"/>
+                      <a:r>
+                        <a:rPr lang="zh-CN" altLang="en-US" sz="2000" b="1" i="0">
+                          <a:solidFill>
+                            <a:srgbClr val="657B83"/>
+                          </a:solidFill>
+                          <a:latin typeface="宋体" panose="02010600030101010101" pitchFamily="2" charset="-122"/>
+                          <a:ea typeface="宋体" panose="02010600030101010101" pitchFamily="2" charset="-122"/>
+                        </a:rPr>
+                        <a:t>分散在执行单元里手动设</a:t>
+                      </a:r>
+                      <a:endParaRPr lang="zh-CN" altLang="en-US" sz="2000" b="1" i="0">
+                        <a:solidFill>
+                          <a:srgbClr val="657B83"/>
+                        </a:solidFill>
+                        <a:latin typeface="宋体" panose="02010600030101010101" pitchFamily="2" charset="-122"/>
+                        <a:ea typeface="宋体" panose="02010600030101010101" pitchFamily="2" charset="-122"/>
+                      </a:endParaRPr>
+                    </a:p>
+                  </a:txBody>
+                  <a:tcPr marL="6667" marR="6667" marT="6667" marB="0" anchor="ctr" anchorCtr="0">
+                    <a:lnL>
+                      <a:noFill/>
+                    </a:lnL>
+                    <a:lnR>
+                      <a:noFill/>
+                    </a:lnR>
+                    <a:lnT>
+                      <a:noFill/>
+                    </a:lnT>
+                    <a:lnB>
+                      <a:noFill/>
+                    </a:lnB>
+                    <a:noFill/>
+                  </a:tcPr>
+                </a:tc>
+                <a:tc>
+                  <a:txBody>
+                    <a:bodyPr/>
+                    <a:p>
+                      <a:pPr algn="ctr" fontAlgn="ctr"/>
+                      <a:r>
+                        <a:rPr lang="en-US" altLang="zh-CN" sz="2000" b="1" i="0">
+                          <a:solidFill>
+                            <a:srgbClr val="657B83"/>
+                          </a:solidFill>
+                          <a:latin typeface="Consolas" panose="020B0609020204030204"/>
+                          <a:ea typeface="Consolas" panose="020B0609020204030204"/>
+                        </a:rPr>
+                        <a:t>SEED = 42 </a:t>
+                      </a:r>
+                      <a:r>
+                        <a:rPr lang="zh-CN" altLang="en-US" sz="2000" b="1" i="0">
+                          <a:solidFill>
+                            <a:srgbClr val="657B83"/>
+                          </a:solidFill>
+                          <a:latin typeface="Consolas" panose="020B0609020204030204"/>
+                          <a:ea typeface="Consolas" panose="020B0609020204030204"/>
+                        </a:rPr>
+                        <a:t>统一管理</a:t>
+                      </a:r>
+                      <a:endParaRPr lang="zh-CN" altLang="en-US" sz="2000" b="1" i="0">
+                        <a:solidFill>
+                          <a:srgbClr val="657B83"/>
+                        </a:solidFill>
+                        <a:latin typeface="Consolas" panose="020B0609020204030204"/>
+                        <a:ea typeface="Consolas" panose="020B0609020204030204"/>
+                      </a:endParaRPr>
+                    </a:p>
+                  </a:txBody>
+                  <a:tcPr marL="6667" marR="6667" marT="6667" marB="0" anchor="ctr" anchorCtr="0">
+                    <a:lnL>
+                      <a:noFill/>
+                    </a:lnL>
+                    <a:lnR>
+                      <a:noFill/>
+                    </a:lnR>
+                    <a:lnT>
+                      <a:noFill/>
+                    </a:lnT>
+                    <a:lnB>
+                      <a:noFill/>
+                    </a:lnB>
+                    <a:noFill/>
+                  </a:tcPr>
+                </a:tc>
+                <a:tc>
+                  <a:txBody>
+                    <a:bodyPr/>
+                    <a:p>
+                      <a:pPr algn="ctr" fontAlgn="ctr"/>
+                      <a:r>
+                        <a:rPr lang="zh-CN" altLang="en-US" sz="2000" b="1" i="0">
+                          <a:solidFill>
+                            <a:srgbClr val="657B83"/>
+                          </a:solidFill>
+                          <a:latin typeface="宋体" panose="02010600030101010101" pitchFamily="2" charset="-122"/>
+                          <a:ea typeface="宋体" panose="02010600030101010101" pitchFamily="2" charset="-122"/>
+                        </a:rPr>
+                        <a:t>新版更可复现</a:t>
+                      </a:r>
+                      <a:endParaRPr lang="zh-CN" altLang="en-US" sz="2000" b="1" i="0">
+                        <a:solidFill>
+                          <a:srgbClr val="657B83"/>
+                        </a:solidFill>
+                        <a:latin typeface="宋体" panose="02010600030101010101" pitchFamily="2" charset="-122"/>
+                        <a:ea typeface="宋体" panose="02010600030101010101" pitchFamily="2" charset="-122"/>
+                      </a:endParaRPr>
+                    </a:p>
+                  </a:txBody>
+                  <a:tcPr marL="6667" marR="6667" marT="6667" marB="0" anchor="ctr" anchorCtr="0">
+                    <a:lnL>
+                      <a:noFill/>
+                    </a:lnL>
+                    <a:lnR>
+                      <a:noFill/>
+                    </a:lnR>
+                    <a:lnT>
+                      <a:noFill/>
+                    </a:lnT>
+                    <a:lnB>
+                      <a:noFill/>
+                    </a:lnB>
+                    <a:noFill/>
+                  </a:tcPr>
+                </a:tc>
+              </a:tr>
+              <a:tr h="325120">
+                <a:tc>
+                  <a:txBody>
+                    <a:bodyPr/>
+                    <a:p>
+                      <a:pPr algn="ctr" fontAlgn="ctr"/>
+                      <a:r>
+                        <a:rPr lang="zh-CN" altLang="en-US" sz="2000" b="1" i="0">
+                          <a:solidFill>
+                            <a:srgbClr val="657B83"/>
+                          </a:solidFill>
+                          <a:latin typeface="宋体" panose="02010600030101010101" pitchFamily="2" charset="-122"/>
+                          <a:ea typeface="宋体" panose="02010600030101010101" pitchFamily="2" charset="-122"/>
+                        </a:rPr>
+                        <a:t>条件标签</a:t>
+                      </a:r>
+                      <a:endParaRPr lang="zh-CN" altLang="en-US" sz="2000" b="1" i="0">
+                        <a:solidFill>
+                          <a:srgbClr val="657B83"/>
+                        </a:solidFill>
+                        <a:latin typeface="宋体" panose="02010600030101010101" pitchFamily="2" charset="-122"/>
+                        <a:ea typeface="宋体" panose="02010600030101010101" pitchFamily="2" charset="-122"/>
+                      </a:endParaRPr>
+                    </a:p>
+                  </a:txBody>
+                  <a:tcPr marL="6667" marR="6667" marT="6667" marB="0" anchor="ctr" anchorCtr="0">
+                    <a:lnL>
+                      <a:noFill/>
+                    </a:lnL>
+                    <a:lnR>
+                      <a:noFill/>
+                    </a:lnR>
+                    <a:lnT>
+                      <a:noFill/>
+                    </a:lnT>
+                    <a:lnB>
+                      <a:noFill/>
+                    </a:lnB>
+                    <a:noFill/>
+                  </a:tcPr>
+                </a:tc>
+                <a:tc>
+                  <a:txBody>
+                    <a:bodyPr/>
+                    <a:p>
+                      <a:pPr algn="ctr" fontAlgn="ctr"/>
+                      <a:r>
+                        <a:rPr lang="en-US" altLang="zh-CN" sz="2000" b="1" i="0">
+                          <a:solidFill>
+                            <a:srgbClr val="657B83"/>
+                          </a:solidFill>
+                          <a:latin typeface="Consolas" panose="020B0609020204030204"/>
+                          <a:ea typeface="Consolas" panose="020B0609020204030204"/>
+                        </a:rPr>
+                        <a:t>conditions = {0: 'stranger', 1: 'self'}</a:t>
+                      </a:r>
+                      <a:endParaRPr lang="en-US" altLang="zh-CN" sz="2000" b="1" i="0">
+                        <a:solidFill>
+                          <a:srgbClr val="657B83"/>
+                        </a:solidFill>
+                        <a:latin typeface="Consolas" panose="020B0609020204030204"/>
+                        <a:ea typeface="Consolas" panose="020B0609020204030204"/>
+                      </a:endParaRPr>
+                    </a:p>
+                  </a:txBody>
+                  <a:tcPr marL="6667" marR="6667" marT="6667" marB="0" anchor="ctr" anchorCtr="0">
+                    <a:lnL>
+                      <a:noFill/>
+                    </a:lnL>
+                    <a:lnR>
+                      <a:noFill/>
+                    </a:lnR>
+                    <a:lnT>
+                      <a:noFill/>
+                    </a:lnT>
+                    <a:lnB>
+                      <a:noFill/>
+                    </a:lnB>
+                    <a:noFill/>
+                  </a:tcPr>
+                </a:tc>
+                <a:tc>
+                  <a:txBody>
+                    <a:bodyPr/>
+                    <a:p>
+                      <a:pPr algn="ctr" fontAlgn="ctr"/>
+                      <a:r>
+                        <a:rPr lang="en-US" altLang="zh-CN" sz="2000" b="1" i="0">
+                          <a:solidFill>
+                            <a:srgbClr val="657B83"/>
+                          </a:solidFill>
+                          <a:latin typeface="Consolas" panose="020B0609020204030204"/>
+                          <a:ea typeface="Consolas" panose="020B0609020204030204"/>
+                        </a:rPr>
+                        <a:t>CONDITIONS = {0: 'stranger', 1: 'self'}</a:t>
+                      </a:r>
+                      <a:endParaRPr lang="en-US" altLang="zh-CN" sz="2000" b="1" i="0">
+                        <a:solidFill>
+                          <a:srgbClr val="657B83"/>
+                        </a:solidFill>
+                        <a:latin typeface="Consolas" panose="020B0609020204030204"/>
+                        <a:ea typeface="Consolas" panose="020B0609020204030204"/>
+                      </a:endParaRPr>
+                    </a:p>
+                  </a:txBody>
+                  <a:tcPr marL="6667" marR="6667" marT="6667" marB="0" anchor="ctr" anchorCtr="0">
+                    <a:lnL>
+                      <a:noFill/>
+                    </a:lnL>
+                    <a:lnR>
+                      <a:noFill/>
+                    </a:lnR>
+                    <a:lnT>
+                      <a:noFill/>
+                    </a:lnT>
+                    <a:lnB>
+                      <a:noFill/>
+                    </a:lnB>
+                    <a:noFill/>
+                  </a:tcPr>
+                </a:tc>
+                <a:tc>
+                  <a:txBody>
+                    <a:bodyPr/>
+                    <a:p>
+                      <a:pPr algn="ctr" fontAlgn="ctr"/>
+                      <a:r>
+                        <a:rPr lang="zh-CN" altLang="en-US" sz="2000" b="1" i="0">
+                          <a:solidFill>
+                            <a:srgbClr val="657B83"/>
+                          </a:solidFill>
+                          <a:latin typeface="宋体" panose="02010600030101010101" pitchFamily="2" charset="-122"/>
+                          <a:ea typeface="宋体" panose="02010600030101010101" pitchFamily="2" charset="-122"/>
+                        </a:rPr>
+                        <a:t>实质相同</a:t>
+                      </a:r>
+                      <a:endParaRPr lang="zh-CN" altLang="en-US" sz="2000" b="1" i="0">
+                        <a:solidFill>
+                          <a:srgbClr val="657B83"/>
+                        </a:solidFill>
+                        <a:latin typeface="宋体" panose="02010600030101010101" pitchFamily="2" charset="-122"/>
+                        <a:ea typeface="宋体" panose="02010600030101010101" pitchFamily="2" charset="-122"/>
+                      </a:endParaRPr>
+                    </a:p>
+                  </a:txBody>
+                  <a:tcPr marL="6667" marR="6667" marT="6667" marB="0" anchor="ctr" anchorCtr="0">
+                    <a:lnL>
+                      <a:noFill/>
+                    </a:lnL>
+                    <a:lnR>
+                      <a:noFill/>
+                    </a:lnR>
+                    <a:lnT>
+                      <a:noFill/>
+                    </a:lnT>
+                    <a:lnB>
+                      <a:noFill/>
+                    </a:lnB>
+                    <a:noFill/>
+                  </a:tcPr>
+                </a:tc>
+              </a:tr>
+              <a:tr h="186055">
+                <a:tc>
+                  <a:txBody>
+                    <a:bodyPr/>
+                    <a:p>
+                      <a:pPr algn="ctr" fontAlgn="ctr"/>
+                      <a:r>
+                        <a:rPr lang="en-US" altLang="zh-CN" sz="2000" b="1" i="0">
+                          <a:solidFill>
+                            <a:srgbClr val="657B83"/>
+                          </a:solidFill>
+                          <a:latin typeface="Consolas" panose="020B0609020204030204"/>
+                          <a:ea typeface="Consolas" panose="020B0609020204030204"/>
+                        </a:rPr>
+                        <a:t>ALPHA1 / alaph1</a:t>
+                      </a:r>
+                      <a:endParaRPr lang="en-US" altLang="zh-CN" sz="2000" b="1" i="0">
+                        <a:solidFill>
+                          <a:srgbClr val="657B83"/>
+                        </a:solidFill>
+                        <a:latin typeface="Consolas" panose="020B0609020204030204"/>
+                        <a:ea typeface="Consolas" panose="020B0609020204030204"/>
+                      </a:endParaRPr>
+                    </a:p>
+                  </a:txBody>
+                  <a:tcPr marL="6667" marR="6667" marT="6667" marB="0" anchor="ctr" anchorCtr="0">
+                    <a:lnL>
+                      <a:noFill/>
+                    </a:lnL>
+                    <a:lnR>
+                      <a:noFill/>
+                    </a:lnR>
+                    <a:lnT>
+                      <a:noFill/>
+                    </a:lnT>
+                    <a:lnB>
+                      <a:noFill/>
+                    </a:lnB>
+                    <a:noFill/>
+                  </a:tcPr>
+                </a:tc>
+                <a:tc>
+                  <a:txBody>
+                    <a:bodyPr/>
+                    <a:p>
+                      <a:pPr algn="ctr" fontAlgn="ctr"/>
+                      <a:r>
+                        <a:rPr lang="en-US" altLang="zh-CN" sz="2000" b="1" i="0">
+                          <a:solidFill>
+                            <a:srgbClr val="657B83"/>
+                          </a:solidFill>
+                          <a:latin typeface="Consolas" panose="020B0609020204030204"/>
+                          <a:ea typeface="Consolas" panose="020B0609020204030204"/>
+                        </a:rPr>
+                        <a:t>1.5</a:t>
+                      </a:r>
+                      <a:endParaRPr lang="en-US" altLang="zh-CN" sz="2000" b="1" i="0">
+                        <a:solidFill>
+                          <a:srgbClr val="657B83"/>
+                        </a:solidFill>
+                        <a:latin typeface="Consolas" panose="020B0609020204030204"/>
+                        <a:ea typeface="Consolas" panose="020B0609020204030204"/>
+                      </a:endParaRPr>
+                    </a:p>
+                  </a:txBody>
+                  <a:tcPr marL="6667" marR="6667" marT="6667" marB="0" anchor="ctr" anchorCtr="0">
+                    <a:lnL>
+                      <a:noFill/>
+                    </a:lnL>
+                    <a:lnR>
+                      <a:noFill/>
+                    </a:lnR>
+                    <a:lnT>
+                      <a:noFill/>
+                    </a:lnT>
+                    <a:lnB>
+                      <a:noFill/>
+                    </a:lnB>
+                    <a:noFill/>
+                  </a:tcPr>
+                </a:tc>
+                <a:tc>
+                  <a:txBody>
+                    <a:bodyPr/>
+                    <a:p>
+                      <a:pPr algn="ctr" fontAlgn="ctr"/>
+                      <a:r>
+                        <a:rPr lang="en-US" altLang="zh-CN" sz="2000" b="1" i="0">
+                          <a:solidFill>
+                            <a:srgbClr val="657B83"/>
+                          </a:solidFill>
+                          <a:latin typeface="Consolas" panose="020B0609020204030204"/>
+                          <a:ea typeface="Consolas" panose="020B0609020204030204"/>
+                        </a:rPr>
+                        <a:t>1.5</a:t>
+                      </a:r>
+                      <a:endParaRPr lang="en-US" altLang="zh-CN" sz="2000" b="1" i="0">
+                        <a:solidFill>
+                          <a:srgbClr val="657B83"/>
+                        </a:solidFill>
+                        <a:latin typeface="Consolas" panose="020B0609020204030204"/>
+                        <a:ea typeface="Consolas" panose="020B0609020204030204"/>
+                      </a:endParaRPr>
+                    </a:p>
+                  </a:txBody>
+                  <a:tcPr marL="6667" marR="6667" marT="6667" marB="0" anchor="ctr" anchorCtr="0">
+                    <a:lnL>
+                      <a:noFill/>
+                    </a:lnL>
+                    <a:lnR>
+                      <a:noFill/>
+                    </a:lnR>
+                    <a:lnT>
+                      <a:noFill/>
+                    </a:lnT>
+                    <a:lnB>
+                      <a:noFill/>
+                    </a:lnB>
+                    <a:noFill/>
+                  </a:tcPr>
+                </a:tc>
+                <a:tc>
+                  <a:txBody>
+                    <a:bodyPr/>
+                    <a:p>
+                      <a:pPr algn="ctr" fontAlgn="ctr"/>
+                      <a:r>
+                        <a:rPr lang="en-US" altLang="zh-CN" sz="2000" b="1" i="0">
+                          <a:solidFill>
+                            <a:srgbClr val="657B83"/>
+                          </a:solidFill>
+                          <a:latin typeface="Segoe UI" panose="020B0502040204020203"/>
+                          <a:ea typeface="Segoe UI" panose="020B0502040204020203"/>
+                        </a:rPr>
+                        <a:t>self </a:t>
+                      </a:r>
+                      <a:r>
+                        <a:rPr lang="zh-CN" altLang="en-US" sz="2000" b="1" i="0">
+                          <a:solidFill>
+                            <a:srgbClr val="657B83"/>
+                          </a:solidFill>
+                          <a:latin typeface="Segoe UI" panose="020B0502040204020203"/>
+                          <a:ea typeface="Segoe UI" panose="020B0502040204020203"/>
+                        </a:rPr>
+                        <a:t>对 </a:t>
+                      </a:r>
+                      <a:r>
+                        <a:rPr lang="en-US" altLang="zh-CN" sz="2000" b="1" i="0">
+                          <a:solidFill>
+                            <a:srgbClr val="657B83"/>
+                          </a:solidFill>
+                          <a:latin typeface="Segoe UI" panose="020B0502040204020203"/>
+                          <a:ea typeface="Segoe UI" panose="020B0502040204020203"/>
+                        </a:rPr>
+                        <a:t>v </a:t>
+                      </a:r>
+                      <a:r>
+                        <a:rPr lang="zh-CN" altLang="en-US" sz="2000" b="1" i="0">
+                          <a:solidFill>
+                            <a:srgbClr val="657B83"/>
+                          </a:solidFill>
+                          <a:latin typeface="Segoe UI" panose="020B0502040204020203"/>
+                          <a:ea typeface="Segoe UI" panose="020B0502040204020203"/>
+                        </a:rPr>
+                        <a:t>的加成没变</a:t>
+                      </a:r>
+                      <a:endParaRPr lang="zh-CN" altLang="en-US" sz="2000" b="1" i="0">
+                        <a:solidFill>
+                          <a:srgbClr val="657B83"/>
+                        </a:solidFill>
+                        <a:latin typeface="Segoe UI" panose="020B0502040204020203"/>
+                        <a:ea typeface="Segoe UI" panose="020B0502040204020203"/>
+                      </a:endParaRPr>
+                    </a:p>
+                  </a:txBody>
+                  <a:tcPr marL="6667" marR="6667" marT="6667" marB="0" anchor="ctr" anchorCtr="0">
+                    <a:lnL>
+                      <a:noFill/>
+                    </a:lnL>
+                    <a:lnR>
+                      <a:noFill/>
+                    </a:lnR>
+                    <a:lnT>
+                      <a:noFill/>
+                    </a:lnT>
+                    <a:lnB>
+                      <a:noFill/>
+                    </a:lnB>
+                    <a:noFill/>
+                  </a:tcPr>
+                </a:tc>
+              </a:tr>
+              <a:tr h="184150">
+                <a:tc>
+                  <a:txBody>
+                    <a:bodyPr/>
+                    <a:p>
+                      <a:pPr algn="ctr" fontAlgn="ctr"/>
+                      <a:r>
+                        <a:rPr lang="en-US" altLang="zh-CN" sz="2000" b="1" i="0">
+                          <a:solidFill>
+                            <a:srgbClr val="657B83"/>
+                          </a:solidFill>
+                          <a:latin typeface="Consolas" panose="020B0609020204030204"/>
+                          <a:ea typeface="Consolas" panose="020B0609020204030204"/>
+                        </a:rPr>
+                        <a:t>ALPHA2 / alaph2</a:t>
+                      </a:r>
+                      <a:endParaRPr lang="en-US" altLang="zh-CN" sz="2000" b="1" i="0">
+                        <a:solidFill>
+                          <a:srgbClr val="657B83"/>
+                        </a:solidFill>
+                        <a:latin typeface="Consolas" panose="020B0609020204030204"/>
+                        <a:ea typeface="Consolas" panose="020B0609020204030204"/>
+                      </a:endParaRPr>
+                    </a:p>
+                  </a:txBody>
+                  <a:tcPr marL="6667" marR="6667" marT="6667" marB="0" anchor="ctr" anchorCtr="0">
+                    <a:lnL>
+                      <a:noFill/>
+                    </a:lnL>
+                    <a:lnR>
+                      <a:noFill/>
+                    </a:lnR>
+                    <a:lnT>
+                      <a:noFill/>
+                    </a:lnT>
+                    <a:lnB>
+                      <a:noFill/>
+                    </a:lnB>
+                    <a:noFill/>
+                  </a:tcPr>
+                </a:tc>
+                <a:tc>
+                  <a:txBody>
+                    <a:bodyPr/>
+                    <a:p>
+                      <a:pPr algn="ctr" fontAlgn="ctr"/>
+                      <a:r>
+                        <a:rPr lang="en-US" altLang="zh-CN" sz="2000" b="1" i="0">
+                          <a:solidFill>
+                            <a:srgbClr val="657B83"/>
+                          </a:solidFill>
+                          <a:latin typeface="Consolas" panose="020B0609020204030204"/>
+                          <a:ea typeface="Consolas" panose="020B0609020204030204"/>
+                        </a:rPr>
+                        <a:t>-0.4</a:t>
+                      </a:r>
+                      <a:endParaRPr lang="en-US" altLang="zh-CN" sz="2000" b="1" i="0">
+                        <a:solidFill>
+                          <a:srgbClr val="657B83"/>
+                        </a:solidFill>
+                        <a:latin typeface="Consolas" panose="020B0609020204030204"/>
+                        <a:ea typeface="Consolas" panose="020B0609020204030204"/>
+                      </a:endParaRPr>
+                    </a:p>
+                  </a:txBody>
+                  <a:tcPr marL="6667" marR="6667" marT="6667" marB="0" anchor="ctr" anchorCtr="0">
+                    <a:lnL>
+                      <a:noFill/>
+                    </a:lnL>
+                    <a:lnR>
+                      <a:noFill/>
+                    </a:lnR>
+                    <a:lnT>
+                      <a:noFill/>
+                    </a:lnT>
+                    <a:lnB>
+                      <a:noFill/>
+                    </a:lnB>
+                    <a:noFill/>
+                  </a:tcPr>
+                </a:tc>
+                <a:tc>
+                  <a:txBody>
+                    <a:bodyPr/>
+                    <a:p>
+                      <a:pPr algn="ctr" fontAlgn="ctr"/>
+                      <a:r>
+                        <a:rPr lang="en-US" altLang="zh-CN" sz="2000" b="1" i="0">
+                          <a:solidFill>
+                            <a:srgbClr val="657B83"/>
+                          </a:solidFill>
+                          <a:latin typeface="Consolas" panose="020B0609020204030204"/>
+                          <a:ea typeface="Consolas" panose="020B0609020204030204"/>
+                        </a:rPr>
+                        <a:t>-0.4</a:t>
+                      </a:r>
+                      <a:endParaRPr lang="en-US" altLang="zh-CN" sz="2000" b="1" i="0">
+                        <a:solidFill>
+                          <a:srgbClr val="657B83"/>
+                        </a:solidFill>
+                        <a:latin typeface="Consolas" panose="020B0609020204030204"/>
+                        <a:ea typeface="Consolas" panose="020B0609020204030204"/>
+                      </a:endParaRPr>
+                    </a:p>
+                  </a:txBody>
+                  <a:tcPr marL="6667" marR="6667" marT="6667" marB="0" anchor="ctr" anchorCtr="0">
+                    <a:lnL>
+                      <a:noFill/>
+                    </a:lnL>
+                    <a:lnR>
+                      <a:noFill/>
+                    </a:lnR>
+                    <a:lnT>
+                      <a:noFill/>
+                    </a:lnT>
+                    <a:lnB>
+                      <a:noFill/>
+                    </a:lnB>
+                    <a:noFill/>
+                  </a:tcPr>
+                </a:tc>
+                <a:tc>
+                  <a:txBody>
+                    <a:bodyPr/>
+                    <a:p>
+                      <a:pPr algn="ctr" fontAlgn="ctr"/>
+                      <a:r>
+                        <a:rPr lang="en-US" altLang="zh-CN" sz="2000" b="1" i="0">
+                          <a:solidFill>
+                            <a:srgbClr val="657B83"/>
+                          </a:solidFill>
+                          <a:latin typeface="Segoe UI" panose="020B0502040204020203"/>
+                          <a:ea typeface="Segoe UI" panose="020B0502040204020203"/>
+                        </a:rPr>
+                        <a:t>stranger </a:t>
+                      </a:r>
+                      <a:r>
+                        <a:rPr lang="zh-CN" altLang="en-US" sz="2000" b="1" i="0">
+                          <a:solidFill>
+                            <a:srgbClr val="657B83"/>
+                          </a:solidFill>
+                          <a:latin typeface="Segoe UI" panose="020B0502040204020203"/>
+                          <a:ea typeface="Segoe UI" panose="020B0502040204020203"/>
+                        </a:rPr>
+                        <a:t>对 </a:t>
+                      </a:r>
+                      <a:r>
+                        <a:rPr lang="en-US" altLang="zh-CN" sz="2000" b="1" i="0">
+                          <a:solidFill>
+                            <a:srgbClr val="657B83"/>
+                          </a:solidFill>
+                          <a:latin typeface="Segoe UI" panose="020B0502040204020203"/>
+                          <a:ea typeface="Segoe UI" panose="020B0502040204020203"/>
+                        </a:rPr>
+                        <a:t>v </a:t>
+                      </a:r>
+                      <a:r>
+                        <a:rPr lang="zh-CN" altLang="en-US" sz="2000" b="1" i="0">
+                          <a:solidFill>
+                            <a:srgbClr val="657B83"/>
+                          </a:solidFill>
+                          <a:latin typeface="Segoe UI" panose="020B0502040204020203"/>
+                          <a:ea typeface="Segoe UI" panose="020B0502040204020203"/>
+                        </a:rPr>
+                        <a:t>的加成没变</a:t>
+                      </a:r>
+                      <a:endParaRPr lang="zh-CN" altLang="en-US" sz="2000" b="1" i="0">
+                        <a:solidFill>
+                          <a:srgbClr val="657B83"/>
+                        </a:solidFill>
+                        <a:latin typeface="Segoe UI" panose="020B0502040204020203"/>
+                        <a:ea typeface="Segoe UI" panose="020B0502040204020203"/>
+                      </a:endParaRPr>
+                    </a:p>
+                  </a:txBody>
+                  <a:tcPr marL="6667" marR="6667" marT="6667" marB="0" anchor="ctr" anchorCtr="0">
+                    <a:lnL>
+                      <a:noFill/>
+                    </a:lnL>
+                    <a:lnR>
+                      <a:noFill/>
+                    </a:lnR>
+                    <a:lnT>
+                      <a:noFill/>
+                    </a:lnT>
+                    <a:lnB>
+                      <a:noFill/>
+                    </a:lnB>
+                    <a:noFill/>
+                  </a:tcPr>
+                </a:tc>
+              </a:tr>
+              <a:tr h="185420">
+                <a:tc>
+                  <a:txBody>
+                    <a:bodyPr/>
+                    <a:p>
+                      <a:pPr algn="ctr" fontAlgn="ctr"/>
+                      <a:r>
+                        <a:rPr lang="en-US" altLang="zh-CN" sz="2000" b="1" i="0">
+                          <a:solidFill>
+                            <a:srgbClr val="657B83"/>
+                          </a:solidFill>
+                          <a:latin typeface="Consolas" panose="020B0609020204030204"/>
+                          <a:ea typeface="Consolas" panose="020B0609020204030204"/>
+                        </a:rPr>
+                        <a:t>BETA1</a:t>
+                      </a:r>
+                      <a:endParaRPr lang="en-US" altLang="zh-CN" sz="2000" b="1" i="0">
+                        <a:solidFill>
+                          <a:srgbClr val="657B83"/>
+                        </a:solidFill>
+                        <a:latin typeface="Consolas" panose="020B0609020204030204"/>
+                        <a:ea typeface="Consolas" panose="020B0609020204030204"/>
+                      </a:endParaRPr>
+                    </a:p>
+                  </a:txBody>
+                  <a:tcPr marL="6667" marR="6667" marT="6667" marB="0" anchor="ctr" anchorCtr="0">
+                    <a:lnL>
+                      <a:noFill/>
+                    </a:lnL>
+                    <a:lnR>
+                      <a:noFill/>
+                    </a:lnR>
+                    <a:lnT>
+                      <a:noFill/>
+                    </a:lnT>
+                    <a:lnB>
+                      <a:noFill/>
+                    </a:lnB>
+                    <a:noFill/>
+                  </a:tcPr>
+                </a:tc>
+                <a:tc>
+                  <a:txBody>
+                    <a:bodyPr/>
+                    <a:p>
+                      <a:pPr algn="ctr" fontAlgn="ctr"/>
+                      <a:r>
+                        <a:rPr lang="en-US" altLang="zh-CN" sz="2000" b="1" i="0">
+                          <a:solidFill>
+                            <a:srgbClr val="657B83"/>
+                          </a:solidFill>
+                          <a:latin typeface="Consolas" panose="020B0609020204030204"/>
+                          <a:ea typeface="Consolas" panose="020B0609020204030204"/>
+                        </a:rPr>
+                        <a:t>0.2</a:t>
+                      </a:r>
+                      <a:endParaRPr lang="en-US" altLang="zh-CN" sz="2000" b="1" i="0">
+                        <a:solidFill>
+                          <a:srgbClr val="657B83"/>
+                        </a:solidFill>
+                        <a:latin typeface="Consolas" panose="020B0609020204030204"/>
+                        <a:ea typeface="Consolas" panose="020B0609020204030204"/>
+                      </a:endParaRPr>
+                    </a:p>
+                  </a:txBody>
+                  <a:tcPr marL="6667" marR="6667" marT="6667" marB="0" anchor="ctr" anchorCtr="0">
+                    <a:lnL>
+                      <a:noFill/>
+                    </a:lnL>
+                    <a:lnR>
+                      <a:noFill/>
+                    </a:lnR>
+                    <a:lnT>
+                      <a:noFill/>
+                    </a:lnT>
+                    <a:lnB>
+                      <a:noFill/>
+                    </a:lnB>
+                    <a:noFill/>
+                  </a:tcPr>
+                </a:tc>
+                <a:tc>
+                  <a:txBody>
+                    <a:bodyPr/>
+                    <a:p>
+                      <a:pPr algn="ctr" fontAlgn="ctr"/>
+                      <a:r>
+                        <a:rPr lang="en-US" altLang="zh-CN" sz="2000" b="1" i="0">
+                          <a:solidFill>
+                            <a:srgbClr val="657B83"/>
+                          </a:solidFill>
+                          <a:latin typeface="Consolas" panose="020B0609020204030204"/>
+                          <a:ea typeface="Consolas" panose="020B0609020204030204"/>
+                        </a:rPr>
+                        <a:t>0.2</a:t>
+                      </a:r>
+                      <a:endParaRPr lang="en-US" altLang="zh-CN" sz="2000" b="1" i="0">
+                        <a:solidFill>
+                          <a:srgbClr val="657B83"/>
+                        </a:solidFill>
+                        <a:latin typeface="Consolas" panose="020B0609020204030204"/>
+                        <a:ea typeface="Consolas" panose="020B0609020204030204"/>
+                      </a:endParaRPr>
+                    </a:p>
+                  </a:txBody>
+                  <a:tcPr marL="6667" marR="6667" marT="6667" marB="0" anchor="ctr" anchorCtr="0">
+                    <a:lnL>
+                      <a:noFill/>
+                    </a:lnL>
+                    <a:lnR>
+                      <a:noFill/>
+                    </a:lnR>
+                    <a:lnT>
+                      <a:noFill/>
+                    </a:lnT>
+                    <a:lnB>
+                      <a:noFill/>
+                    </a:lnB>
+                    <a:noFill/>
+                  </a:tcPr>
+                </a:tc>
+                <a:tc>
+                  <a:txBody>
+                    <a:bodyPr/>
+                    <a:p>
+                      <a:pPr algn="ctr" fontAlgn="ctr"/>
+                      <a:r>
+                        <a:rPr lang="en-US" altLang="zh-CN" sz="2000" b="1" i="0">
+                          <a:solidFill>
+                            <a:srgbClr val="657B83"/>
+                          </a:solidFill>
+                          <a:latin typeface="Consolas" panose="020B0609020204030204"/>
+                          <a:ea typeface="Consolas" panose="020B0609020204030204"/>
+                        </a:rPr>
+                        <a:t>M&gt;600 </a:t>
+                      </a:r>
+                      <a:r>
+                        <a:rPr lang="zh-CN" altLang="en-US" sz="2000" b="1" i="0">
+                          <a:solidFill>
+                            <a:srgbClr val="657B83"/>
+                          </a:solidFill>
+                          <a:latin typeface="Consolas" panose="020B0609020204030204"/>
+                          <a:ea typeface="Consolas" panose="020B0609020204030204"/>
+                        </a:rPr>
+                        <a:t>时对 </a:t>
+                      </a:r>
+                      <a:r>
+                        <a:rPr lang="en-US" altLang="zh-CN" sz="2000" b="1" i="0">
+                          <a:solidFill>
+                            <a:srgbClr val="657B83"/>
+                          </a:solidFill>
+                          <a:latin typeface="Consolas" panose="020B0609020204030204"/>
+                          <a:ea typeface="Consolas" panose="020B0609020204030204"/>
+                        </a:rPr>
+                        <a:t>a </a:t>
+                      </a:r>
+                      <a:r>
+                        <a:rPr lang="zh-CN" altLang="en-US" sz="2000" b="1" i="0">
+                          <a:solidFill>
+                            <a:srgbClr val="657B83"/>
+                          </a:solidFill>
+                          <a:latin typeface="Consolas" panose="020B0609020204030204"/>
+                          <a:ea typeface="Consolas" panose="020B0609020204030204"/>
+                        </a:rPr>
+                        <a:t>的提升没变</a:t>
+                      </a:r>
+                      <a:endParaRPr lang="zh-CN" altLang="en-US" sz="2000" b="1" i="0">
+                        <a:solidFill>
+                          <a:srgbClr val="657B83"/>
+                        </a:solidFill>
+                        <a:latin typeface="Consolas" panose="020B0609020204030204"/>
+                        <a:ea typeface="Consolas" panose="020B0609020204030204"/>
+                      </a:endParaRPr>
+                    </a:p>
+                  </a:txBody>
+                  <a:tcPr marL="6667" marR="6667" marT="6667" marB="0" anchor="ctr" anchorCtr="0">
+                    <a:lnL>
+                      <a:noFill/>
+                    </a:lnL>
+                    <a:lnR>
+                      <a:noFill/>
+                    </a:lnR>
+                    <a:lnT>
+                      <a:noFill/>
+                    </a:lnT>
+                    <a:lnB>
+                      <a:noFill/>
+                    </a:lnB>
+                    <a:noFill/>
+                  </a:tcPr>
+                </a:tc>
+              </a:tr>
+              <a:tr h="341630">
+                <a:tc>
+                  <a:txBody>
+                    <a:bodyPr/>
+                    <a:p>
+                      <a:pPr algn="ctr" fontAlgn="ctr"/>
+                      <a:r>
+                        <a:rPr lang="en-US" altLang="zh-CN" sz="2000" b="1" i="0">
+                          <a:solidFill>
+                            <a:srgbClr val="657B83"/>
+                          </a:solidFill>
+                          <a:latin typeface="Consolas" panose="020B0609020204030204"/>
+                          <a:ea typeface="Consolas" panose="020B0609020204030204"/>
+                        </a:rPr>
+                        <a:t>BETA2</a:t>
+                      </a:r>
+                      <a:endParaRPr lang="en-US" altLang="zh-CN" sz="2000" b="1" i="0">
+                        <a:solidFill>
+                          <a:srgbClr val="657B83"/>
+                        </a:solidFill>
+                        <a:latin typeface="Consolas" panose="020B0609020204030204"/>
+                        <a:ea typeface="Consolas" panose="020B0609020204030204"/>
+                      </a:endParaRPr>
+                    </a:p>
+                  </a:txBody>
+                  <a:tcPr marL="6667" marR="6667" marT="6667" marB="0" anchor="ctr" anchorCtr="0">
+                    <a:lnL>
+                      <a:noFill/>
+                    </a:lnL>
+                    <a:lnR>
+                      <a:noFill/>
+                    </a:lnR>
+                    <a:lnT>
+                      <a:noFill/>
+                    </a:lnT>
+                    <a:lnB>
+                      <a:noFill/>
+                    </a:lnB>
+                    <a:noFill/>
+                  </a:tcPr>
+                </a:tc>
+                <a:tc>
+                  <a:txBody>
+                    <a:bodyPr/>
+                    <a:p>
+                      <a:pPr algn="ctr" fontAlgn="ctr"/>
+                      <a:r>
+                        <a:rPr lang="en-US" altLang="zh-CN" sz="2000" b="1" i="0">
+                          <a:solidFill>
+                            <a:srgbClr val="657B83"/>
+                          </a:solidFill>
+                          <a:latin typeface="Consolas" panose="020B0609020204030204"/>
+                          <a:ea typeface="Consolas" panose="020B0609020204030204"/>
+                        </a:rPr>
+                        <a:t>0</a:t>
+                      </a:r>
+                      <a:endParaRPr lang="en-US" altLang="zh-CN" sz="2000" b="1" i="0">
+                        <a:solidFill>
+                          <a:srgbClr val="657B83"/>
+                        </a:solidFill>
+                        <a:latin typeface="Consolas" panose="020B0609020204030204"/>
+                        <a:ea typeface="Consolas" panose="020B0609020204030204"/>
+                      </a:endParaRPr>
+                    </a:p>
+                  </a:txBody>
+                  <a:tcPr marL="6667" marR="6667" marT="6667" marB="0" anchor="ctr" anchorCtr="0">
+                    <a:lnL>
+                      <a:noFill/>
+                    </a:lnL>
+                    <a:lnR>
+                      <a:noFill/>
+                    </a:lnR>
+                    <a:lnT>
+                      <a:noFill/>
+                    </a:lnT>
+                    <a:lnB>
+                      <a:noFill/>
+                    </a:lnB>
+                    <a:noFill/>
+                  </a:tcPr>
+                </a:tc>
+                <a:tc>
+                  <a:txBody>
+                    <a:bodyPr/>
+                    <a:p>
+                      <a:pPr algn="ctr" fontAlgn="ctr"/>
+                      <a:r>
+                        <a:rPr lang="en-US" altLang="zh-CN" sz="2000" b="1" i="0">
+                          <a:solidFill>
+                            <a:srgbClr val="657B83"/>
+                          </a:solidFill>
+                          <a:latin typeface="Consolas" panose="020B0609020204030204"/>
+                          <a:ea typeface="Consolas" panose="020B0609020204030204"/>
+                        </a:rPr>
+                        <a:t>0</a:t>
+                      </a:r>
+                      <a:endParaRPr lang="en-US" altLang="zh-CN" sz="2000" b="1" i="0">
+                        <a:solidFill>
+                          <a:srgbClr val="657B83"/>
+                        </a:solidFill>
+                        <a:latin typeface="Consolas" panose="020B0609020204030204"/>
+                        <a:ea typeface="Consolas" panose="020B0609020204030204"/>
+                      </a:endParaRPr>
+                    </a:p>
+                  </a:txBody>
+                  <a:tcPr marL="6667" marR="6667" marT="6667" marB="0" anchor="ctr" anchorCtr="0">
+                    <a:lnL>
+                      <a:noFill/>
+                    </a:lnL>
+                    <a:lnR>
+                      <a:noFill/>
+                    </a:lnR>
+                    <a:lnT>
+                      <a:noFill/>
+                    </a:lnT>
+                    <a:lnB>
+                      <a:noFill/>
+                    </a:lnB>
+                    <a:noFill/>
+                  </a:tcPr>
+                </a:tc>
+                <a:tc>
+                  <a:txBody>
+                    <a:bodyPr/>
+                    <a:p>
+                      <a:pPr algn="ctr" fontAlgn="ctr"/>
+                      <a:r>
+                        <a:rPr lang="en-US" altLang="zh-CN" sz="2000" b="1" i="0">
+                          <a:solidFill>
+                            <a:srgbClr val="657B83"/>
+                          </a:solidFill>
+                          <a:latin typeface="Consolas" panose="020B0609020204030204"/>
+                          <a:ea typeface="Consolas" panose="020B0609020204030204"/>
+                        </a:rPr>
+                        <a:t>M&lt;=600 </a:t>
+                      </a:r>
+                      <a:r>
+                        <a:rPr lang="zh-CN" altLang="en-US" sz="2000" b="1" i="0">
+                          <a:solidFill>
+                            <a:srgbClr val="657B83"/>
+                          </a:solidFill>
+                          <a:latin typeface="Consolas" panose="020B0609020204030204"/>
+                          <a:ea typeface="Consolas" panose="020B0609020204030204"/>
+                        </a:rPr>
+                        <a:t>时不额外提升，没变</a:t>
+                      </a:r>
+                      <a:endParaRPr lang="zh-CN" altLang="en-US" sz="2000" b="1" i="0">
+                        <a:solidFill>
+                          <a:srgbClr val="657B83"/>
+                        </a:solidFill>
+                        <a:latin typeface="Consolas" panose="020B0609020204030204"/>
+                        <a:ea typeface="Consolas" panose="020B0609020204030204"/>
+                      </a:endParaRPr>
+                    </a:p>
+                  </a:txBody>
+                  <a:tcPr marL="6667" marR="6667" marT="6667" marB="0" anchor="ctr" anchorCtr="0">
+                    <a:lnL>
+                      <a:noFill/>
+                    </a:lnL>
+                    <a:lnR>
+                      <a:noFill/>
+                    </a:lnR>
+                    <a:lnT>
+                      <a:noFill/>
+                    </a:lnT>
+                    <a:lnB>
+                      <a:noFill/>
+                    </a:lnB>
+                    <a:noFill/>
+                  </a:tcPr>
+                </a:tc>
+              </a:tr>
+              <a:tr h="369570">
+                <a:tc>
+                  <a:txBody>
+                    <a:bodyPr/>
+                    <a:p>
+                      <a:pPr algn="ctr" fontAlgn="ctr"/>
+                      <a:r>
+                        <a:rPr lang="en-US" altLang="zh-CN" sz="2000" b="1" i="0">
+                          <a:solidFill>
+                            <a:srgbClr val="657B83"/>
+                          </a:solidFill>
+                          <a:latin typeface="Consolas" panose="020B0609020204030204"/>
+                          <a:ea typeface="Consolas" panose="020B0609020204030204"/>
+                        </a:rPr>
+                        <a:t>gamma / GAMMA</a:t>
+                      </a:r>
+                      <a:endParaRPr lang="en-US" altLang="zh-CN" sz="2000" b="1" i="0">
+                        <a:solidFill>
+                          <a:srgbClr val="657B83"/>
+                        </a:solidFill>
+                        <a:latin typeface="Consolas" panose="020B0609020204030204"/>
+                        <a:ea typeface="Consolas" panose="020B0609020204030204"/>
+                      </a:endParaRPr>
+                    </a:p>
+                  </a:txBody>
+                  <a:tcPr marL="6667" marR="6667" marT="6667" marB="0" anchor="ctr" anchorCtr="0">
+                    <a:lnL>
+                      <a:noFill/>
+                    </a:lnL>
+                    <a:lnR>
+                      <a:noFill/>
+                    </a:lnR>
+                    <a:lnT>
+                      <a:noFill/>
+                    </a:lnT>
+                    <a:lnB>
+                      <a:noFill/>
+                    </a:lnB>
+                    <a:noFill/>
+                  </a:tcPr>
+                </a:tc>
+                <a:tc>
+                  <a:txBody>
+                    <a:bodyPr/>
+                    <a:p>
+                      <a:pPr algn="ctr" fontAlgn="ctr"/>
+                      <a:r>
+                        <a:rPr lang="en-US" altLang="zh-CN" sz="2000" b="1" i="0">
+                          <a:solidFill>
+                            <a:srgbClr val="657B83"/>
+                          </a:solidFill>
+                          <a:latin typeface="Consolas" panose="020B0609020204030204"/>
+                          <a:ea typeface="Consolas" panose="020B0609020204030204"/>
+                        </a:rPr>
+                        <a:t>0.2</a:t>
+                      </a:r>
+                      <a:endParaRPr lang="en-US" altLang="zh-CN" sz="2000" b="1" i="0">
+                        <a:solidFill>
+                          <a:srgbClr val="657B83"/>
+                        </a:solidFill>
+                        <a:latin typeface="Consolas" panose="020B0609020204030204"/>
+                        <a:ea typeface="Consolas" panose="020B0609020204030204"/>
+                      </a:endParaRPr>
+                    </a:p>
+                  </a:txBody>
+                  <a:tcPr marL="6667" marR="6667" marT="6667" marB="0" anchor="ctr" anchorCtr="0">
+                    <a:lnL>
+                      <a:noFill/>
+                    </a:lnL>
+                    <a:lnR>
+                      <a:noFill/>
+                    </a:lnR>
+                    <a:lnT>
+                      <a:noFill/>
+                    </a:lnT>
+                    <a:lnB>
+                      <a:noFill/>
+                    </a:lnB>
+                    <a:noFill/>
+                  </a:tcPr>
+                </a:tc>
+                <a:tc>
+                  <a:txBody>
+                    <a:bodyPr/>
+                    <a:p>
+                      <a:pPr algn="ctr" fontAlgn="ctr"/>
+                      <a:r>
+                        <a:rPr lang="en-US" altLang="zh-CN" sz="2000" b="1" i="0">
+                          <a:solidFill>
+                            <a:srgbClr val="657B83"/>
+                          </a:solidFill>
+                          <a:latin typeface="Consolas" panose="020B0609020204030204"/>
+                          <a:ea typeface="Consolas" panose="020B0609020204030204"/>
+                        </a:rPr>
+                        <a:t>0.1</a:t>
+                      </a:r>
+                      <a:endParaRPr lang="en-US" altLang="zh-CN" sz="2000" b="1" i="0">
+                        <a:solidFill>
+                          <a:srgbClr val="657B83"/>
+                        </a:solidFill>
+                        <a:latin typeface="Consolas" panose="020B0609020204030204"/>
+                        <a:ea typeface="Consolas" panose="020B0609020204030204"/>
+                      </a:endParaRPr>
+                    </a:p>
+                  </a:txBody>
+                  <a:tcPr marL="6667" marR="6667" marT="6667" marB="0" anchor="ctr" anchorCtr="0">
+                    <a:lnL>
+                      <a:noFill/>
+                    </a:lnL>
+                    <a:lnR>
+                      <a:noFill/>
+                    </a:lnR>
+                    <a:lnT>
+                      <a:noFill/>
+                    </a:lnT>
+                    <a:lnB>
+                      <a:noFill/>
+                    </a:lnB>
+                    <a:noFill/>
+                  </a:tcPr>
+                </a:tc>
+                <a:tc>
+                  <a:txBody>
+                    <a:bodyPr/>
+                    <a:p>
+                      <a:pPr algn="ctr" fontAlgn="ctr"/>
+                      <a:r>
+                        <a:rPr lang="zh-CN" altLang="en-US" sz="2000" b="1" i="0">
+                          <a:solidFill>
+                            <a:srgbClr val="657B83"/>
+                          </a:solidFill>
+                          <a:latin typeface="宋体" panose="02010600030101010101" pitchFamily="2" charset="-122"/>
+                          <a:ea typeface="宋体" panose="02010600030101010101" pitchFamily="2" charset="-122"/>
+                        </a:rPr>
+                        <a:t>新版让 </a:t>
+                      </a:r>
+                      <a:r>
+                        <a:rPr lang="en-US" altLang="zh-CN" sz="2000" b="1" i="0">
+                          <a:solidFill>
+                            <a:srgbClr val="657B83"/>
+                          </a:solidFill>
+                          <a:latin typeface="宋体" panose="02010600030101010101" pitchFamily="2" charset="-122"/>
+                          <a:ea typeface="宋体" panose="02010600030101010101" pitchFamily="2" charset="-122"/>
+                        </a:rPr>
+                        <a:t>practice </a:t>
+                      </a:r>
+                      <a:r>
+                        <a:rPr lang="zh-CN" altLang="en-US" sz="2000" b="1" i="0">
+                          <a:solidFill>
+                            <a:srgbClr val="657B83"/>
+                          </a:solidFill>
+                          <a:latin typeface="宋体" panose="02010600030101010101" pitchFamily="2" charset="-122"/>
+                          <a:ea typeface="宋体" panose="02010600030101010101" pitchFamily="2" charset="-122"/>
+                        </a:rPr>
+                        <a:t>相关 </a:t>
+                      </a:r>
+                      <a:r>
+                        <a:rPr lang="en-US" altLang="zh-CN" sz="2000" b="1" i="0">
+                          <a:solidFill>
+                            <a:srgbClr val="657B83"/>
+                          </a:solidFill>
+                          <a:latin typeface="宋体" panose="02010600030101010101" pitchFamily="2" charset="-122"/>
+                          <a:ea typeface="宋体" panose="02010600030101010101" pitchFamily="2" charset="-122"/>
+                        </a:rPr>
+                        <a:t>sigmoid </a:t>
+                      </a:r>
+                      <a:r>
+                        <a:rPr lang="zh-CN" altLang="en-US" sz="2000" b="1" i="0">
+                          <a:solidFill>
+                            <a:srgbClr val="657B83"/>
+                          </a:solidFill>
+                          <a:latin typeface="宋体" panose="02010600030101010101" pitchFamily="2" charset="-122"/>
+                          <a:ea typeface="宋体" panose="02010600030101010101" pitchFamily="2" charset="-122"/>
+                        </a:rPr>
+                        <a:t>更平缓</a:t>
+                      </a:r>
+                      <a:endParaRPr lang="zh-CN" altLang="en-US" sz="2000" b="1" i="0">
+                        <a:solidFill>
+                          <a:srgbClr val="657B83"/>
+                        </a:solidFill>
+                        <a:latin typeface="宋体" panose="02010600030101010101" pitchFamily="2" charset="-122"/>
+                        <a:ea typeface="宋体" panose="02010600030101010101" pitchFamily="2" charset="-122"/>
+                      </a:endParaRPr>
+                    </a:p>
+                  </a:txBody>
+                  <a:tcPr marL="6667" marR="6667" marT="6667" marB="0" anchor="ctr" anchorCtr="0">
+                    <a:lnL>
+                      <a:noFill/>
+                    </a:lnL>
+                    <a:lnR>
+                      <a:noFill/>
+                    </a:lnR>
+                    <a:lnT>
+                      <a:noFill/>
+                    </a:lnT>
+                    <a:lnB>
+                      <a:noFill/>
+                    </a:lnB>
+                    <a:noFill/>
+                  </a:tcPr>
+                </a:tc>
+              </a:tr>
+              <a:tr h="185420">
+                <a:tc>
+                  <a:txBody>
+                    <a:bodyPr/>
+                    <a:p>
+                      <a:pPr algn="ctr" fontAlgn="ctr"/>
+                      <a:r>
+                        <a:rPr lang="en-US" altLang="zh-CN" sz="2000" b="1" i="0">
+                          <a:solidFill>
+                            <a:srgbClr val="657B83"/>
+                          </a:solidFill>
+                          <a:latin typeface="Consolas" panose="020B0609020204030204"/>
+                          <a:ea typeface="Consolas" panose="020B0609020204030204"/>
+                        </a:rPr>
+                        <a:t>t0 / T0</a:t>
+                      </a:r>
+                      <a:endParaRPr lang="en-US" altLang="zh-CN" sz="2000" b="1" i="0">
+                        <a:solidFill>
+                          <a:srgbClr val="657B83"/>
+                        </a:solidFill>
+                        <a:latin typeface="Consolas" panose="020B0609020204030204"/>
+                        <a:ea typeface="Consolas" panose="020B0609020204030204"/>
+                      </a:endParaRPr>
+                    </a:p>
+                  </a:txBody>
+                  <a:tcPr marL="6667" marR="6667" marT="6667" marB="0" anchor="ctr" anchorCtr="0">
+                    <a:lnL>
+                      <a:noFill/>
+                    </a:lnL>
+                    <a:lnR>
+                      <a:noFill/>
+                    </a:lnR>
+                    <a:lnT>
+                      <a:noFill/>
+                    </a:lnT>
+                    <a:lnB>
+                      <a:noFill/>
+                    </a:lnB>
+                    <a:noFill/>
+                  </a:tcPr>
+                </a:tc>
+                <a:tc>
+                  <a:txBody>
+                    <a:bodyPr/>
+                    <a:p>
+                      <a:pPr algn="ctr" fontAlgn="ctr"/>
+                      <a:r>
+                        <a:rPr lang="en-US" altLang="zh-CN" sz="2000" b="1" i="0">
+                          <a:solidFill>
+                            <a:srgbClr val="657B83"/>
+                          </a:solidFill>
+                          <a:latin typeface="Consolas" panose="020B0609020204030204"/>
+                          <a:ea typeface="Consolas" panose="020B0609020204030204"/>
+                        </a:rPr>
+                        <a:t>0.2</a:t>
+                      </a:r>
+                      <a:endParaRPr lang="en-US" altLang="zh-CN" sz="2000" b="1" i="0">
+                        <a:solidFill>
+                          <a:srgbClr val="657B83"/>
+                        </a:solidFill>
+                        <a:latin typeface="Consolas" panose="020B0609020204030204"/>
+                        <a:ea typeface="Consolas" panose="020B0609020204030204"/>
+                      </a:endParaRPr>
+                    </a:p>
+                  </a:txBody>
+                  <a:tcPr marL="6667" marR="6667" marT="6667" marB="0" anchor="ctr" anchorCtr="0">
+                    <a:lnL>
+                      <a:noFill/>
+                    </a:lnL>
+                    <a:lnR>
+                      <a:noFill/>
+                    </a:lnR>
+                    <a:lnT>
+                      <a:noFill/>
+                    </a:lnT>
+                    <a:lnB>
+                      <a:noFill/>
+                    </a:lnB>
+                    <a:noFill/>
+                  </a:tcPr>
+                </a:tc>
+                <a:tc>
+                  <a:txBody>
+                    <a:bodyPr/>
+                    <a:p>
+                      <a:pPr algn="ctr" fontAlgn="ctr"/>
+                      <a:r>
+                        <a:rPr lang="en-US" altLang="zh-CN" sz="2000" b="1" i="0">
+                          <a:solidFill>
+                            <a:srgbClr val="657B83"/>
+                          </a:solidFill>
+                          <a:latin typeface="Consolas" panose="020B0609020204030204"/>
+                          <a:ea typeface="Consolas" panose="020B0609020204030204"/>
+                        </a:rPr>
+                        <a:t>0.2</a:t>
+                      </a:r>
+                      <a:endParaRPr lang="en-US" altLang="zh-CN" sz="2000" b="1" i="0">
+                        <a:solidFill>
+                          <a:srgbClr val="657B83"/>
+                        </a:solidFill>
+                        <a:latin typeface="Consolas" panose="020B0609020204030204"/>
+                        <a:ea typeface="Consolas" panose="020B0609020204030204"/>
+                      </a:endParaRPr>
+                    </a:p>
+                  </a:txBody>
+                  <a:tcPr marL="6667" marR="6667" marT="6667" marB="0" anchor="ctr" anchorCtr="0">
+                    <a:lnL>
+                      <a:noFill/>
+                    </a:lnL>
+                    <a:lnR>
+                      <a:noFill/>
+                    </a:lnR>
+                    <a:lnT>
+                      <a:noFill/>
+                    </a:lnT>
+                    <a:lnB>
+                      <a:noFill/>
+                    </a:lnB>
+                    <a:noFill/>
+                  </a:tcPr>
+                </a:tc>
+                <a:tc>
+                  <a:txBody>
+                    <a:bodyPr/>
+                    <a:p>
+                      <a:pPr algn="ctr" fontAlgn="ctr"/>
+                      <a:r>
+                        <a:rPr lang="zh-CN" altLang="en-US" sz="2000" b="1" i="0">
+                          <a:solidFill>
+                            <a:srgbClr val="657B83"/>
+                          </a:solidFill>
+                          <a:latin typeface="宋体" panose="02010600030101010101" pitchFamily="2" charset="-122"/>
+                          <a:ea typeface="宋体" panose="02010600030101010101" pitchFamily="2" charset="-122"/>
+                        </a:rPr>
+                        <a:t>非决策时间没变</a:t>
+                      </a:r>
+                      <a:endParaRPr lang="zh-CN" altLang="en-US" sz="2000" b="1" i="0">
+                        <a:solidFill>
+                          <a:srgbClr val="657B83"/>
+                        </a:solidFill>
+                        <a:latin typeface="宋体" panose="02010600030101010101" pitchFamily="2" charset="-122"/>
+                        <a:ea typeface="宋体" panose="02010600030101010101" pitchFamily="2" charset="-122"/>
+                      </a:endParaRPr>
+                    </a:p>
+                  </a:txBody>
+                  <a:tcPr marL="6667" marR="6667" marT="6667" marB="0" anchor="ctr" anchorCtr="0">
+                    <a:lnL>
+                      <a:noFill/>
+                    </a:lnL>
+                    <a:lnR>
+                      <a:noFill/>
+                    </a:lnR>
+                    <a:lnT>
+                      <a:noFill/>
+                    </a:lnT>
+                    <a:lnB>
+                      <a:noFill/>
+                    </a:lnB>
+                    <a:noFill/>
+                  </a:tcPr>
+                </a:tc>
+              </a:tr>
+            </a:tbl>
+          </a:graphicData>
+        </a:graphic>
+      </p:graphicFrame>
+    </p:spTree>
+  </p:cSld>
+  <p:clrMapOvr>
+    <a:masterClrMapping/>
+  </p:clrMapOvr>
+</p:sld>
+</file>
+
+<file path=ppt/slides/slide8.xml><?xml version="1.0" encoding="utf-8"?>
+<p:sld xmlns:a="http://schemas.openxmlformats.org/drawingml/2006/main" xmlns:r="http://schemas.openxmlformats.org/officeDocument/2006/relationships" xmlns:p="http://schemas.openxmlformats.org/presentationml/2006/main">
+  <p:cSld>
+    <p:spTree>
+      <p:nvGrpSpPr>
+        <p:cNvPr id="1" name=""/>
+        <p:cNvGrpSpPr/>
+        <p:nvPr/>
+      </p:nvGrpSpPr>
+      <p:grpSpPr/>
+      <p:graphicFrame>
+        <p:nvGraphicFramePr>
+          <p:cNvPr id="4" name="表格 3"/>
+          <p:cNvGraphicFramePr/>
+          <p:nvPr/>
+        </p:nvGraphicFramePr>
+        <p:xfrm>
+          <a:off x="0" y="0"/>
+          <a:ext cx="12192000" cy="6464300"/>
+        </p:xfrm>
+        <a:graphic>
+          <a:graphicData uri="http://schemas.openxmlformats.org/drawingml/2006/table">
+            <a:tbl>
+              <a:tblPr/>
+              <a:tblGrid>
+                <a:gridCol w="2711450"/>
+                <a:gridCol w="2634615"/>
+                <a:gridCol w="3649980"/>
+                <a:gridCol w="3195955"/>
+              </a:tblGrid>
+              <a:tr h="177800">
+                <a:tc>
+                  <a:txBody>
+                    <a:bodyPr/>
+                    <a:p>
+                      <a:pPr algn="ctr" fontAlgn="ctr"/>
+                      <a:r>
+                        <a:rPr lang="zh-CN" altLang="en-US" sz="2000" b="1" i="0">
+                          <a:solidFill>
+                            <a:srgbClr val="616161"/>
+                          </a:solidFill>
+                          <a:latin typeface="宋体" panose="02010600030101010101" pitchFamily="2" charset="-122"/>
+                          <a:ea typeface="宋体" panose="02010600030101010101" pitchFamily="2" charset="-122"/>
+                        </a:rPr>
+                        <a:t>项目</a:t>
+                      </a:r>
+                      <a:endParaRPr lang="zh-CN" altLang="en-US" sz="2000" b="1" i="0">
+                        <a:solidFill>
+                          <a:srgbClr val="616161"/>
+                        </a:solidFill>
+                        <a:latin typeface="宋体" panose="02010600030101010101" pitchFamily="2" charset="-122"/>
+                        <a:ea typeface="宋体" panose="02010600030101010101" pitchFamily="2" charset="-122"/>
+                      </a:endParaRPr>
+                    </a:p>
+                  </a:txBody>
+                  <a:tcPr marL="6667" marR="6667" marT="6667" marB="0" anchor="ctr" anchorCtr="0">
+                    <a:lnL>
+                      <a:noFill/>
+                    </a:lnL>
+                    <a:lnR>
+                      <a:noFill/>
+                    </a:lnR>
+                    <a:lnT>
+                      <a:noFill/>
+                    </a:lnT>
+                    <a:lnB>
+                      <a:noFill/>
+                    </a:lnB>
+                    <a:solidFill>
+                      <a:schemeClr val="accent5">
+                        <a:lumMod val="40000"/>
+                        <a:lumOff val="60000"/>
+                      </a:schemeClr>
+                    </a:solidFill>
+                  </a:tcPr>
+                </a:tc>
+                <a:tc>
+                  <a:txBody>
+                    <a:bodyPr/>
+                    <a:p>
+                      <a:pPr algn="ctr" fontAlgn="ctr"/>
+                      <a:r>
+                        <a:rPr lang="zh-CN" altLang="en-US" sz="2000" b="1" i="0">
+                          <a:solidFill>
+                            <a:srgbClr val="616161"/>
+                          </a:solidFill>
+                          <a:latin typeface="宋体" panose="02010600030101010101" pitchFamily="2" charset="-122"/>
+                          <a:ea typeface="宋体" panose="02010600030101010101" pitchFamily="2" charset="-122"/>
+                        </a:rPr>
+                        <a:t>旧版 </a:t>
+                      </a:r>
+                      <a:r>
+                        <a:rPr lang="en-US" altLang="zh-CN" sz="2000" b="1" i="0">
+                          <a:solidFill>
+                            <a:srgbClr val="616161"/>
+                          </a:solidFill>
+                          <a:latin typeface="宋体" panose="02010600030101010101" pitchFamily="2" charset="-122"/>
+                          <a:ea typeface="宋体" panose="02010600030101010101" pitchFamily="2" charset="-122"/>
+                        </a:rPr>
+                        <a:t>S2_gen_data.ipynb</a:t>
+                      </a:r>
+                      <a:endParaRPr lang="en-US" altLang="zh-CN" sz="2000" b="1" i="0">
+                        <a:solidFill>
+                          <a:srgbClr val="616161"/>
+                        </a:solidFill>
+                        <a:latin typeface="宋体" panose="02010600030101010101" pitchFamily="2" charset="-122"/>
+                        <a:ea typeface="宋体" panose="02010600030101010101" pitchFamily="2" charset="-122"/>
+                      </a:endParaRPr>
+                    </a:p>
+                  </a:txBody>
+                  <a:tcPr marL="6667" marR="6667" marT="6667" marB="0" anchor="ctr" anchorCtr="0">
+                    <a:lnL>
+                      <a:noFill/>
+                    </a:lnL>
+                    <a:lnR>
+                      <a:noFill/>
+                    </a:lnR>
+                    <a:lnT>
+                      <a:noFill/>
+                    </a:lnT>
+                    <a:lnB>
+                      <a:noFill/>
+                    </a:lnB>
+                    <a:solidFill>
+                      <a:schemeClr val="accent5">
+                        <a:lumMod val="40000"/>
+                        <a:lumOff val="60000"/>
+                      </a:schemeClr>
+                    </a:solidFill>
+                  </a:tcPr>
+                </a:tc>
+                <a:tc>
+                  <a:txBody>
+                    <a:bodyPr/>
+                    <a:p>
+                      <a:pPr algn="ctr" fontAlgn="ctr"/>
+                      <a:r>
+                        <a:rPr lang="zh-CN" altLang="en-US" sz="2000" b="1" i="0">
+                          <a:solidFill>
+                            <a:srgbClr val="616161"/>
+                          </a:solidFill>
+                          <a:latin typeface="宋体" panose="02010600030101010101" pitchFamily="2" charset="-122"/>
+                          <a:ea typeface="宋体" panose="02010600030101010101" pitchFamily="2" charset="-122"/>
+                        </a:rPr>
+                        <a:t>新版 </a:t>
+                      </a:r>
+                      <a:r>
+                        <a:rPr lang="en-US" altLang="zh-CN" sz="2000" b="1" i="0">
+                          <a:solidFill>
+                            <a:srgbClr val="616161"/>
+                          </a:solidFill>
+                          <a:latin typeface="宋体" panose="02010600030101010101" pitchFamily="2" charset="-122"/>
+                          <a:ea typeface="宋体" panose="02010600030101010101" pitchFamily="2" charset="-122"/>
+                        </a:rPr>
+                        <a:t>S2_gen_data_optimized.ipynb</a:t>
+                      </a:r>
+                      <a:endParaRPr lang="en-US" altLang="zh-CN" sz="2000" b="1" i="0">
+                        <a:solidFill>
+                          <a:srgbClr val="616161"/>
+                        </a:solidFill>
+                        <a:latin typeface="宋体" panose="02010600030101010101" pitchFamily="2" charset="-122"/>
+                        <a:ea typeface="宋体" panose="02010600030101010101" pitchFamily="2" charset="-122"/>
+                      </a:endParaRPr>
+                    </a:p>
+                  </a:txBody>
+                  <a:tcPr marL="6667" marR="6667" marT="6667" marB="0" anchor="ctr" anchorCtr="0">
+                    <a:lnL>
+                      <a:noFill/>
+                    </a:lnL>
+                    <a:lnR>
+                      <a:noFill/>
+                    </a:lnR>
+                    <a:lnT>
+                      <a:noFill/>
+                    </a:lnT>
+                    <a:lnB>
+                      <a:noFill/>
+                    </a:lnB>
+                    <a:solidFill>
+                      <a:schemeClr val="accent5">
+                        <a:lumMod val="40000"/>
+                        <a:lumOff val="60000"/>
+                      </a:schemeClr>
+                    </a:solidFill>
+                  </a:tcPr>
+                </a:tc>
+                <a:tc>
+                  <a:txBody>
+                    <a:bodyPr/>
+                    <a:p>
+                      <a:pPr algn="ctr" fontAlgn="ctr"/>
+                      <a:r>
+                        <a:rPr lang="zh-CN" altLang="en-US" sz="2000" b="1" i="0">
+                          <a:solidFill>
+                            <a:srgbClr val="616161"/>
+                          </a:solidFill>
+                          <a:latin typeface="宋体" panose="02010600030101010101" pitchFamily="2" charset="-122"/>
+                          <a:ea typeface="宋体" panose="02010600030101010101" pitchFamily="2" charset="-122"/>
+                        </a:rPr>
+                        <a:t>变化含义</a:t>
+                      </a:r>
+                      <a:endParaRPr lang="zh-CN" altLang="en-US" sz="2000" b="1" i="0">
+                        <a:solidFill>
+                          <a:srgbClr val="616161"/>
+                        </a:solidFill>
+                        <a:latin typeface="宋体" panose="02010600030101010101" pitchFamily="2" charset="-122"/>
+                        <a:ea typeface="宋体" panose="02010600030101010101" pitchFamily="2" charset="-122"/>
+                      </a:endParaRPr>
+                    </a:p>
+                  </a:txBody>
+                  <a:tcPr marL="6667" marR="6667" marT="6667" marB="0" anchor="ctr" anchorCtr="0">
+                    <a:lnL>
+                      <a:noFill/>
+                    </a:lnL>
+                    <a:lnR>
+                      <a:noFill/>
+                    </a:lnR>
+                    <a:lnT>
+                      <a:noFill/>
+                    </a:lnT>
+                    <a:lnB>
+                      <a:noFill/>
+                    </a:lnB>
+                    <a:solidFill>
+                      <a:schemeClr val="accent5">
+                        <a:lumMod val="40000"/>
+                        <a:lumOff val="60000"/>
+                      </a:schemeClr>
+                    </a:solidFill>
+                  </a:tcPr>
+                </a:tc>
+              </a:tr>
+              <a:tr h="177800">
+                <a:tc>
+                  <a:txBody>
+                    <a:bodyPr/>
+                    <a:p>
+                      <a:pPr algn="ctr" fontAlgn="ctr"/>
+                      <a:r>
+                        <a:rPr lang="en-US" altLang="zh-CN" sz="2000" b="1" i="0">
+                          <a:solidFill>
+                            <a:srgbClr val="657B83"/>
+                          </a:solidFill>
+                          <a:latin typeface="Consolas" panose="020B0609020204030204"/>
+                          <a:ea typeface="Consolas" panose="020B0609020204030204"/>
+                        </a:rPr>
+                        <a:t>DELTA_T</a:t>
+                      </a:r>
+                      <a:endParaRPr lang="en-US" altLang="zh-CN" sz="2000" b="1" i="0">
+                        <a:solidFill>
+                          <a:srgbClr val="657B83"/>
+                        </a:solidFill>
+                        <a:latin typeface="Consolas" panose="020B0609020204030204"/>
+                        <a:ea typeface="Consolas" panose="020B0609020204030204"/>
+                      </a:endParaRPr>
+                    </a:p>
+                  </a:txBody>
+                  <a:tcPr marL="6667" marR="6667" marT="6667" marB="0" anchor="ctr" anchorCtr="0">
+                    <a:lnL>
+                      <a:noFill/>
+                    </a:lnL>
+                    <a:lnR>
+                      <a:noFill/>
+                    </a:lnR>
+                    <a:lnT>
+                      <a:noFill/>
+                    </a:lnT>
+                    <a:lnB>
+                      <a:noFill/>
+                    </a:lnB>
+                    <a:noFill/>
+                  </a:tcPr>
+                </a:tc>
+                <a:tc>
+                  <a:txBody>
+                    <a:bodyPr/>
+                    <a:p>
+                      <a:pPr algn="ctr" fontAlgn="ctr"/>
+                      <a:r>
+                        <a:rPr lang="zh-CN" altLang="en-US" sz="2000" b="1" i="0">
+                          <a:solidFill>
+                            <a:srgbClr val="657B83"/>
+                          </a:solidFill>
+                          <a:latin typeface="宋体" panose="02010600030101010101" pitchFamily="2" charset="-122"/>
+                          <a:ea typeface="宋体" panose="02010600030101010101" pitchFamily="2" charset="-122"/>
+                        </a:rPr>
+                        <a:t>在 </a:t>
+                      </a:r>
+                      <a:r>
+                        <a:rPr lang="en-US" altLang="zh-CN" sz="2000" b="1" i="0">
+                          <a:solidFill>
+                            <a:srgbClr val="657B83"/>
+                          </a:solidFill>
+                          <a:latin typeface="宋体" panose="02010600030101010101" pitchFamily="2" charset="-122"/>
+                          <a:ea typeface="宋体" panose="02010600030101010101" pitchFamily="2" charset="-122"/>
+                        </a:rPr>
+                        <a:t>trial </a:t>
+                      </a:r>
+                      <a:r>
+                        <a:rPr lang="zh-CN" altLang="en-US" sz="2000" b="1" i="0">
+                          <a:solidFill>
+                            <a:srgbClr val="657B83"/>
+                          </a:solidFill>
+                          <a:latin typeface="宋体" panose="02010600030101010101" pitchFamily="2" charset="-122"/>
+                          <a:ea typeface="宋体" panose="02010600030101010101" pitchFamily="2" charset="-122"/>
+                        </a:rPr>
+                        <a:t>循环里写死 </a:t>
+                      </a:r>
+                      <a:r>
+                        <a:rPr lang="en-US" altLang="zh-CN" sz="2000" b="1" i="0">
+                          <a:solidFill>
+                            <a:srgbClr val="657B83"/>
+                          </a:solidFill>
+                          <a:latin typeface="宋体" panose="02010600030101010101" pitchFamily="2" charset="-122"/>
+                          <a:ea typeface="宋体" panose="02010600030101010101" pitchFamily="2" charset="-122"/>
+                        </a:rPr>
+                        <a:t>0.001</a:t>
+                      </a:r>
+                      <a:endParaRPr lang="en-US" altLang="zh-CN" sz="2000" b="1" i="0">
+                        <a:solidFill>
+                          <a:srgbClr val="657B83"/>
+                        </a:solidFill>
+                        <a:latin typeface="宋体" panose="02010600030101010101" pitchFamily="2" charset="-122"/>
+                        <a:ea typeface="宋体" panose="02010600030101010101" pitchFamily="2" charset="-122"/>
+                      </a:endParaRPr>
+                    </a:p>
+                  </a:txBody>
+                  <a:tcPr marL="6667" marR="6667" marT="6667" marB="0" anchor="ctr" anchorCtr="0">
+                    <a:lnL>
+                      <a:noFill/>
+                    </a:lnL>
+                    <a:lnR>
+                      <a:noFill/>
+                    </a:lnR>
+                    <a:lnT>
+                      <a:noFill/>
+                    </a:lnT>
+                    <a:lnB>
+                      <a:noFill/>
+                    </a:lnB>
+                    <a:noFill/>
+                  </a:tcPr>
+                </a:tc>
+                <a:tc>
+                  <a:txBody>
+                    <a:bodyPr/>
+                    <a:p>
+                      <a:pPr algn="ctr" fontAlgn="ctr"/>
+                      <a:r>
+                        <a:rPr lang="zh-CN" altLang="en-US" sz="2000" b="1" i="0">
+                          <a:solidFill>
+                            <a:srgbClr val="657B83"/>
+                          </a:solidFill>
+                          <a:latin typeface="宋体" panose="02010600030101010101" pitchFamily="2" charset="-122"/>
+                          <a:ea typeface="宋体" panose="02010600030101010101" pitchFamily="2" charset="-122"/>
+                        </a:rPr>
+                        <a:t>全局 </a:t>
+                      </a:r>
+                      <a:r>
+                        <a:rPr lang="en-US" altLang="zh-CN" sz="2000" b="1" i="0">
+                          <a:solidFill>
+                            <a:srgbClr val="657B83"/>
+                          </a:solidFill>
+                          <a:latin typeface="宋体" panose="02010600030101010101" pitchFamily="2" charset="-122"/>
+                          <a:ea typeface="宋体" panose="02010600030101010101" pitchFamily="2" charset="-122"/>
+                        </a:rPr>
+                        <a:t>DELTA_T = 0.001</a:t>
+                      </a:r>
+                      <a:endParaRPr lang="en-US" altLang="zh-CN" sz="2000" b="1" i="0">
+                        <a:solidFill>
+                          <a:srgbClr val="657B83"/>
+                        </a:solidFill>
+                        <a:latin typeface="宋体" panose="02010600030101010101" pitchFamily="2" charset="-122"/>
+                        <a:ea typeface="宋体" panose="02010600030101010101" pitchFamily="2" charset="-122"/>
+                      </a:endParaRPr>
+                    </a:p>
+                  </a:txBody>
+                  <a:tcPr marL="6667" marR="6667" marT="6667" marB="0" anchor="ctr" anchorCtr="0">
+                    <a:lnL>
+                      <a:noFill/>
+                    </a:lnL>
+                    <a:lnR>
+                      <a:noFill/>
+                    </a:lnR>
+                    <a:lnT>
+                      <a:noFill/>
+                    </a:lnT>
+                    <a:lnB>
+                      <a:noFill/>
+                    </a:lnB>
+                    <a:noFill/>
+                  </a:tcPr>
+                </a:tc>
+                <a:tc>
+                  <a:txBody>
+                    <a:bodyPr/>
+                    <a:p>
+                      <a:pPr algn="ctr" fontAlgn="ctr"/>
+                      <a:r>
+                        <a:rPr lang="zh-CN" altLang="en-US" sz="2000" b="1" i="0">
+                          <a:solidFill>
+                            <a:srgbClr val="657B83"/>
+                          </a:solidFill>
+                          <a:latin typeface="宋体" panose="02010600030101010101" pitchFamily="2" charset="-122"/>
+                          <a:ea typeface="宋体" panose="02010600030101010101" pitchFamily="2" charset="-122"/>
+                        </a:rPr>
+                        <a:t>数值没变，管理方式更规范</a:t>
+                      </a:r>
+                      <a:endParaRPr lang="zh-CN" altLang="en-US" sz="2000" b="1" i="0">
+                        <a:solidFill>
+                          <a:srgbClr val="657B83"/>
+                        </a:solidFill>
+                        <a:latin typeface="宋体" panose="02010600030101010101" pitchFamily="2" charset="-122"/>
+                        <a:ea typeface="宋体" panose="02010600030101010101" pitchFamily="2" charset="-122"/>
+                      </a:endParaRPr>
+                    </a:p>
+                  </a:txBody>
+                  <a:tcPr marL="6667" marR="6667" marT="6667" marB="0" anchor="ctr" anchorCtr="0">
+                    <a:lnL>
+                      <a:noFill/>
+                    </a:lnL>
+                    <a:lnR>
+                      <a:noFill/>
+                    </a:lnR>
+                    <a:lnT>
+                      <a:noFill/>
+                    </a:lnT>
+                    <a:lnB>
+                      <a:noFill/>
+                    </a:lnB>
+                    <a:noFill/>
+                  </a:tcPr>
+                </a:tc>
+              </a:tr>
+              <a:tr h="487680">
+                <a:tc>
+                  <a:txBody>
+                    <a:bodyPr/>
+                    <a:p>
+                      <a:pPr algn="ctr" fontAlgn="ctr"/>
+                      <a:r>
+                        <a:rPr lang="en-US" altLang="zh-CN" sz="2000" b="1" i="0">
+                          <a:solidFill>
+                            <a:srgbClr val="657B83"/>
+                          </a:solidFill>
+                          <a:latin typeface="Consolas" panose="020B0609020204030204"/>
+                          <a:ea typeface="Consolas" panose="020B0609020204030204"/>
+                        </a:rPr>
+                        <a:t>k_P() </a:t>
+                      </a:r>
+                      <a:r>
+                        <a:rPr lang="zh-CN" altLang="en-US" sz="2000" b="1" i="0">
+                          <a:solidFill>
+                            <a:srgbClr val="657B83"/>
+                          </a:solidFill>
+                          <a:latin typeface="Consolas" panose="020B0609020204030204"/>
+                          <a:ea typeface="Consolas" panose="020B0609020204030204"/>
+                        </a:rPr>
+                        <a:t>默认参数</a:t>
+                      </a:r>
+                      <a:endParaRPr lang="zh-CN" altLang="en-US" sz="2000" b="1" i="0">
+                        <a:solidFill>
+                          <a:srgbClr val="657B83"/>
+                        </a:solidFill>
+                        <a:latin typeface="Consolas" panose="020B0609020204030204"/>
+                        <a:ea typeface="Consolas" panose="020B0609020204030204"/>
+                      </a:endParaRPr>
+                    </a:p>
+                  </a:txBody>
+                  <a:tcPr marL="6667" marR="6667" marT="6667" marB="0" anchor="ctr" anchorCtr="0">
+                    <a:lnL>
+                      <a:noFill/>
+                    </a:lnL>
+                    <a:lnR>
+                      <a:noFill/>
+                    </a:lnR>
+                    <a:lnT>
+                      <a:noFill/>
+                    </a:lnT>
+                    <a:lnB>
+                      <a:noFill/>
+                    </a:lnB>
+                    <a:noFill/>
+                  </a:tcPr>
+                </a:tc>
+                <a:tc>
+                  <a:txBody>
+                    <a:bodyPr/>
+                    <a:p>
+                      <a:pPr algn="ctr" fontAlgn="ctr"/>
+                      <a:r>
+                        <a:rPr lang="en-US" altLang="zh-CN" sz="2000" b="1" i="0">
+                          <a:solidFill>
+                            <a:srgbClr val="657B83"/>
+                          </a:solidFill>
+                          <a:latin typeface="Consolas" panose="020B0609020204030204"/>
+                          <a:ea typeface="Consolas" panose="020B0609020204030204"/>
+                        </a:rPr>
+                        <a:t>k_min=0.01, k_max=0.15, gamma=0.1, P0=32</a:t>
+                      </a:r>
+                      <a:endParaRPr lang="en-US" altLang="zh-CN" sz="2000" b="1" i="0">
+                        <a:solidFill>
+                          <a:srgbClr val="657B83"/>
+                        </a:solidFill>
+                        <a:latin typeface="Consolas" panose="020B0609020204030204"/>
+                        <a:ea typeface="Consolas" panose="020B0609020204030204"/>
+                      </a:endParaRPr>
+                    </a:p>
+                  </a:txBody>
+                  <a:tcPr marL="6667" marR="6667" marT="6667" marB="0" anchor="ctr" anchorCtr="0">
+                    <a:lnL>
+                      <a:noFill/>
+                    </a:lnL>
+                    <a:lnR>
+                      <a:noFill/>
+                    </a:lnR>
+                    <a:lnT>
+                      <a:noFill/>
+                    </a:lnT>
+                    <a:lnB>
+                      <a:noFill/>
+                    </a:lnB>
+                    <a:noFill/>
+                  </a:tcPr>
+                </a:tc>
+                <a:tc>
+                  <a:txBody>
+                    <a:bodyPr/>
+                    <a:p>
+                      <a:pPr algn="ctr" fontAlgn="ctr"/>
+                      <a:r>
+                        <a:rPr lang="en-US" altLang="zh-CN" sz="2000" b="1" i="0">
+                          <a:solidFill>
+                            <a:srgbClr val="657B83"/>
+                          </a:solidFill>
+                          <a:latin typeface="Consolas" panose="020B0609020204030204"/>
+                          <a:ea typeface="Consolas" panose="020B0609020204030204"/>
+                        </a:rPr>
+                        <a:t>k_min=0.01, k_max=0.15, gamma=0.1, P0=32</a:t>
+                      </a:r>
+                      <a:endParaRPr lang="en-US" altLang="zh-CN" sz="2000" b="1" i="0">
+                        <a:solidFill>
+                          <a:srgbClr val="657B83"/>
+                        </a:solidFill>
+                        <a:latin typeface="Consolas" panose="020B0609020204030204"/>
+                        <a:ea typeface="Consolas" panose="020B0609020204030204"/>
+                      </a:endParaRPr>
+                    </a:p>
+                  </a:txBody>
+                  <a:tcPr marL="6667" marR="6667" marT="6667" marB="0" anchor="ctr" anchorCtr="0">
+                    <a:lnL>
+                      <a:noFill/>
+                    </a:lnL>
+                    <a:lnR>
+                      <a:noFill/>
+                    </a:lnR>
+                    <a:lnT>
+                      <a:noFill/>
+                    </a:lnT>
+                    <a:lnB>
+                      <a:noFill/>
+                    </a:lnB>
+                    <a:noFill/>
+                  </a:tcPr>
+                </a:tc>
+                <a:tc>
+                  <a:txBody>
+                    <a:bodyPr/>
+                    <a:p>
+                      <a:pPr algn="ctr" fontAlgn="ctr"/>
+                      <a:r>
+                        <a:rPr lang="zh-CN" altLang="en-US" sz="2000" b="1" i="0">
+                          <a:solidFill>
+                            <a:srgbClr val="657B83"/>
+                          </a:solidFill>
+                          <a:latin typeface="宋体" panose="02010600030101010101" pitchFamily="2" charset="-122"/>
+                          <a:ea typeface="宋体" panose="02010600030101010101" pitchFamily="2" charset="-122"/>
+                        </a:rPr>
+                        <a:t>函数定义本身相同</a:t>
+                      </a:r>
+                      <a:endParaRPr lang="zh-CN" altLang="en-US" sz="2000" b="1" i="0">
+                        <a:solidFill>
+                          <a:srgbClr val="657B83"/>
+                        </a:solidFill>
+                        <a:latin typeface="宋体" panose="02010600030101010101" pitchFamily="2" charset="-122"/>
+                        <a:ea typeface="宋体" panose="02010600030101010101" pitchFamily="2" charset="-122"/>
+                      </a:endParaRPr>
+                    </a:p>
+                  </a:txBody>
+                  <a:tcPr marL="6667" marR="6667" marT="6667" marB="0" anchor="ctr" anchorCtr="0">
+                    <a:lnL>
+                      <a:noFill/>
+                    </a:lnL>
+                    <a:lnR>
+                      <a:noFill/>
+                    </a:lnR>
+                    <a:lnT>
+                      <a:noFill/>
+                    </a:lnT>
+                    <a:lnB>
+                      <a:noFill/>
+                    </a:lnB>
+                    <a:noFill/>
+                  </a:tcPr>
+                </a:tc>
+              </a:tr>
+              <a:tr h="342900">
+                <a:tc>
+                  <a:txBody>
+                    <a:bodyPr/>
+                    <a:p>
+                      <a:pPr algn="ctr" fontAlgn="ctr"/>
+                      <a:r>
+                        <a:rPr lang="en-US" altLang="zh-CN" sz="2000" b="1" i="0">
+                          <a:solidFill>
+                            <a:srgbClr val="657B83"/>
+                          </a:solidFill>
+                          <a:latin typeface="Consolas" panose="020B0609020204030204"/>
+                          <a:ea typeface="Consolas" panose="020B0609020204030204"/>
+                        </a:rPr>
+                        <a:t>compute_v() </a:t>
+                      </a:r>
+                      <a:r>
+                        <a:rPr lang="zh-CN" altLang="en-US" sz="2000" b="1" i="0">
+                          <a:solidFill>
+                            <a:srgbClr val="657B83"/>
+                          </a:solidFill>
+                          <a:latin typeface="Consolas" panose="020B0609020204030204"/>
+                          <a:ea typeface="Consolas" panose="020B0609020204030204"/>
+                        </a:rPr>
+                        <a:t>中 </a:t>
+                      </a:r>
+                      <a:r>
+                        <a:rPr lang="en-US" altLang="zh-CN" sz="2000" b="1" i="0">
+                          <a:solidFill>
+                            <a:srgbClr val="657B83"/>
+                          </a:solidFill>
+                          <a:latin typeface="Consolas" panose="020B0609020204030204"/>
+                          <a:ea typeface="Consolas" panose="020B0609020204030204"/>
+                        </a:rPr>
+                        <a:t>v_P </a:t>
+                      </a:r>
+                      <a:r>
+                        <a:rPr lang="zh-CN" altLang="en-US" sz="2000" b="1" i="0">
+                          <a:solidFill>
+                            <a:srgbClr val="657B83"/>
+                          </a:solidFill>
+                          <a:latin typeface="Consolas" panose="020B0609020204030204"/>
+                          <a:ea typeface="Consolas" panose="020B0609020204030204"/>
+                        </a:rPr>
+                        <a:t>实际传参</a:t>
+                      </a:r>
+                      <a:endParaRPr lang="zh-CN" altLang="en-US" sz="2000" b="1" i="0">
+                        <a:solidFill>
+                          <a:srgbClr val="657B83"/>
+                        </a:solidFill>
+                        <a:latin typeface="Consolas" panose="020B0609020204030204"/>
+                        <a:ea typeface="Consolas" panose="020B0609020204030204"/>
+                      </a:endParaRPr>
+                    </a:p>
+                  </a:txBody>
+                  <a:tcPr marL="6667" marR="6667" marT="6667" marB="0" anchor="ctr" anchorCtr="0">
+                    <a:lnL>
+                      <a:noFill/>
+                    </a:lnL>
+                    <a:lnR>
+                      <a:noFill/>
+                    </a:lnR>
+                    <a:lnT>
+                      <a:noFill/>
+                    </a:lnT>
+                    <a:lnB>
+                      <a:noFill/>
+                    </a:lnB>
+                    <a:noFill/>
+                  </a:tcPr>
+                </a:tc>
+                <a:tc>
+                  <a:txBody>
+                    <a:bodyPr/>
+                    <a:p>
+                      <a:pPr algn="ctr" fontAlgn="ctr"/>
+                      <a:r>
+                        <a:rPr lang="en-US" altLang="zh-CN" sz="2000" b="1" i="0">
+                          <a:solidFill>
+                            <a:srgbClr val="657B83"/>
+                          </a:solidFill>
+                          <a:latin typeface="Consolas" panose="020B0609020204030204"/>
+                          <a:ea typeface="Consolas" panose="020B0609020204030204"/>
+                        </a:rPr>
+                        <a:t>k_min=0.1, k_max=0.05</a:t>
+                      </a:r>
+                      <a:endParaRPr lang="en-US" altLang="zh-CN" sz="2000" b="1" i="0">
+                        <a:solidFill>
+                          <a:srgbClr val="657B83"/>
+                        </a:solidFill>
+                        <a:latin typeface="Consolas" panose="020B0609020204030204"/>
+                        <a:ea typeface="Consolas" panose="020B0609020204030204"/>
+                      </a:endParaRPr>
+                    </a:p>
+                  </a:txBody>
+                  <a:tcPr marL="6667" marR="6667" marT="6667" marB="0" anchor="ctr" anchorCtr="0">
+                    <a:lnL>
+                      <a:noFill/>
+                    </a:lnL>
+                    <a:lnR>
+                      <a:noFill/>
+                    </a:lnR>
+                    <a:lnT>
+                      <a:noFill/>
+                    </a:lnT>
+                    <a:lnB>
+                      <a:noFill/>
+                    </a:lnB>
+                    <a:noFill/>
+                  </a:tcPr>
+                </a:tc>
+                <a:tc>
+                  <a:txBody>
+                    <a:bodyPr/>
+                    <a:p>
+                      <a:pPr algn="ctr" fontAlgn="ctr"/>
+                      <a:r>
+                        <a:rPr lang="en-US" altLang="zh-CN" sz="2000" b="1" i="0">
+                          <a:solidFill>
+                            <a:srgbClr val="657B83"/>
+                          </a:solidFill>
+                          <a:latin typeface="Consolas" panose="020B0609020204030204"/>
+                          <a:ea typeface="Consolas" panose="020B0609020204030204"/>
+                        </a:rPr>
+                        <a:t>k_min=0.01, k_max=0.15</a:t>
+                      </a:r>
+                      <a:endParaRPr lang="en-US" altLang="zh-CN" sz="2000" b="1" i="0">
+                        <a:solidFill>
+                          <a:srgbClr val="657B83"/>
+                        </a:solidFill>
+                        <a:latin typeface="Consolas" panose="020B0609020204030204"/>
+                        <a:ea typeface="Consolas" panose="020B0609020204030204"/>
+                      </a:endParaRPr>
+                    </a:p>
+                  </a:txBody>
+                  <a:tcPr marL="6667" marR="6667" marT="6667" marB="0" anchor="ctr" anchorCtr="0">
+                    <a:lnL>
+                      <a:noFill/>
+                    </a:lnL>
+                    <a:lnR>
+                      <a:noFill/>
+                    </a:lnR>
+                    <a:lnT>
+                      <a:noFill/>
+                    </a:lnT>
+                    <a:lnB>
+                      <a:noFill/>
+                    </a:lnB>
+                    <a:noFill/>
+                  </a:tcPr>
+                </a:tc>
+                <a:tc>
+                  <a:txBody>
+                    <a:bodyPr/>
+                    <a:p>
+                      <a:pPr algn="ctr" fontAlgn="ctr"/>
+                      <a:r>
+                        <a:rPr lang="zh-CN" altLang="en-US" sz="2000" b="1" i="0">
+                          <a:solidFill>
+                            <a:srgbClr val="657B83"/>
+                          </a:solidFill>
+                          <a:latin typeface="宋体" panose="02010600030101010101" pitchFamily="2" charset="-122"/>
+                          <a:ea typeface="宋体" panose="02010600030101010101" pitchFamily="2" charset="-122"/>
+                        </a:rPr>
+                        <a:t>这是非常关键的修正；旧版像是反向传参</a:t>
+                      </a:r>
+                      <a:endParaRPr lang="zh-CN" altLang="en-US" sz="2000" b="1" i="0">
+                        <a:solidFill>
+                          <a:srgbClr val="657B83"/>
+                        </a:solidFill>
+                        <a:latin typeface="宋体" panose="02010600030101010101" pitchFamily="2" charset="-122"/>
+                        <a:ea typeface="宋体" panose="02010600030101010101" pitchFamily="2" charset="-122"/>
+                      </a:endParaRPr>
+                    </a:p>
+                  </a:txBody>
+                  <a:tcPr marL="6667" marR="6667" marT="6667" marB="0" anchor="ctr" anchorCtr="0">
+                    <a:lnL>
+                      <a:noFill/>
+                    </a:lnL>
+                    <a:lnR>
+                      <a:noFill/>
+                    </a:lnR>
+                    <a:lnT>
+                      <a:noFill/>
+                    </a:lnT>
+                    <a:lnB>
+                      <a:noFill/>
+                    </a:lnB>
+                    <a:noFill/>
+                  </a:tcPr>
+                </a:tc>
+              </a:tr>
+              <a:tr h="324485">
+                <a:tc>
+                  <a:txBody>
+                    <a:bodyPr/>
+                    <a:p>
+                      <a:pPr algn="ctr" fontAlgn="ctr"/>
+                      <a:r>
+                        <a:rPr lang="en-US" altLang="zh-CN" sz="2000" b="1" i="0">
+                          <a:solidFill>
+                            <a:srgbClr val="657B83"/>
+                          </a:solidFill>
+                          <a:latin typeface="Consolas" panose="020B0609020204030204"/>
+                          <a:ea typeface="Consolas" panose="020B0609020204030204"/>
+                        </a:rPr>
+                        <a:t>v_T </a:t>
+                      </a:r>
+                      <a:r>
+                        <a:rPr lang="zh-CN" altLang="en-US" sz="2000" b="1" i="0">
+                          <a:solidFill>
+                            <a:srgbClr val="657B83"/>
+                          </a:solidFill>
+                          <a:latin typeface="Consolas" panose="020B0609020204030204"/>
+                          <a:ea typeface="Consolas" panose="020B0609020204030204"/>
+                        </a:rPr>
+                        <a:t>公式</a:t>
+                      </a:r>
+                      <a:endParaRPr lang="zh-CN" altLang="en-US" sz="2000" b="1" i="0">
+                        <a:solidFill>
+                          <a:srgbClr val="657B83"/>
+                        </a:solidFill>
+                        <a:latin typeface="Consolas" panose="020B0609020204030204"/>
+                        <a:ea typeface="Consolas" panose="020B0609020204030204"/>
+                      </a:endParaRPr>
+                    </a:p>
+                  </a:txBody>
+                  <a:tcPr marL="6667" marR="6667" marT="6667" marB="0" anchor="ctr" anchorCtr="0">
+                    <a:lnL>
+                      <a:noFill/>
+                    </a:lnL>
+                    <a:lnR>
+                      <a:noFill/>
+                    </a:lnR>
+                    <a:lnT>
+                      <a:noFill/>
+                    </a:lnT>
+                    <a:lnB>
+                      <a:noFill/>
+                    </a:lnB>
+                    <a:noFill/>
+                  </a:tcPr>
+                </a:tc>
+                <a:tc>
+                  <a:txBody>
+                    <a:bodyPr/>
+                    <a:p>
+                      <a:pPr algn="ctr" fontAlgn="ctr"/>
+                      <a:r>
+                        <a:rPr lang="en-US" altLang="zh-CN" sz="2000" b="1" i="0">
+                          <a:solidFill>
+                            <a:srgbClr val="657B83"/>
+                          </a:solidFill>
+                          <a:latin typeface="Consolas" panose="020B0609020204030204"/>
+                          <a:ea typeface="Consolas" panose="020B0609020204030204"/>
+                        </a:rPr>
+                        <a:t>sigmoid(T; T0=100, k=0.01)</a:t>
+                      </a:r>
+                      <a:endParaRPr lang="en-US" altLang="zh-CN" sz="2000" b="1" i="0">
+                        <a:solidFill>
+                          <a:srgbClr val="657B83"/>
+                        </a:solidFill>
+                        <a:latin typeface="Consolas" panose="020B0609020204030204"/>
+                        <a:ea typeface="Consolas" panose="020B0609020204030204"/>
+                      </a:endParaRPr>
+                    </a:p>
+                  </a:txBody>
+                  <a:tcPr marL="6667" marR="6667" marT="6667" marB="0" anchor="ctr" anchorCtr="0">
+                    <a:lnL>
+                      <a:noFill/>
+                    </a:lnL>
+                    <a:lnR>
+                      <a:noFill/>
+                    </a:lnR>
+                    <a:lnT>
+                      <a:noFill/>
+                    </a:lnT>
+                    <a:lnB>
+                      <a:noFill/>
+                    </a:lnB>
+                    <a:noFill/>
+                  </a:tcPr>
+                </a:tc>
+                <a:tc>
+                  <a:txBody>
+                    <a:bodyPr/>
+                    <a:p>
+                      <a:pPr algn="ctr" fontAlgn="ctr"/>
+                      <a:r>
+                        <a:rPr lang="zh-CN" altLang="en-US" sz="2000" b="1" i="0">
+                          <a:solidFill>
+                            <a:srgbClr val="657B83"/>
+                          </a:solidFill>
+                          <a:latin typeface="宋体" panose="02010600030101010101" pitchFamily="2" charset="-122"/>
+                          <a:ea typeface="宋体" panose="02010600030101010101" pitchFamily="2" charset="-122"/>
+                        </a:rPr>
+                        <a:t>同样</a:t>
+                      </a:r>
+                      <a:endParaRPr lang="zh-CN" altLang="en-US" sz="2000" b="1" i="0">
+                        <a:solidFill>
+                          <a:srgbClr val="657B83"/>
+                        </a:solidFill>
+                        <a:latin typeface="宋体" panose="02010600030101010101" pitchFamily="2" charset="-122"/>
+                        <a:ea typeface="宋体" panose="02010600030101010101" pitchFamily="2" charset="-122"/>
+                      </a:endParaRPr>
+                    </a:p>
+                  </a:txBody>
+                  <a:tcPr marL="6667" marR="6667" marT="6667" marB="0" anchor="ctr" anchorCtr="0">
+                    <a:lnL>
+                      <a:noFill/>
+                    </a:lnL>
+                    <a:lnR>
+                      <a:noFill/>
+                    </a:lnR>
+                    <a:lnT>
+                      <a:noFill/>
+                    </a:lnT>
+                    <a:lnB>
+                      <a:noFill/>
+                    </a:lnB>
+                    <a:noFill/>
+                  </a:tcPr>
+                </a:tc>
+                <a:tc>
+                  <a:txBody>
+                    <a:bodyPr/>
+                    <a:p>
+                      <a:pPr algn="ctr" fontAlgn="ctr"/>
+                      <a:r>
+                        <a:rPr lang="zh-CN" altLang="en-US" sz="2000" b="1" i="0">
+                          <a:solidFill>
+                            <a:srgbClr val="657B83"/>
+                          </a:solidFill>
+                          <a:latin typeface="宋体" panose="02010600030101010101" pitchFamily="2" charset="-122"/>
+                          <a:ea typeface="宋体" panose="02010600030101010101" pitchFamily="2" charset="-122"/>
+                        </a:rPr>
+                        <a:t>没变</a:t>
+                      </a:r>
+                      <a:endParaRPr lang="zh-CN" altLang="en-US" sz="2000" b="1" i="0">
+                        <a:solidFill>
+                          <a:srgbClr val="657B83"/>
+                        </a:solidFill>
+                        <a:latin typeface="宋体" panose="02010600030101010101" pitchFamily="2" charset="-122"/>
+                        <a:ea typeface="宋体" panose="02010600030101010101" pitchFamily="2" charset="-122"/>
+                      </a:endParaRPr>
+                    </a:p>
+                  </a:txBody>
+                  <a:tcPr marL="6667" marR="6667" marT="6667" marB="0" anchor="ctr" anchorCtr="0">
+                    <a:lnL>
+                      <a:noFill/>
+                    </a:lnL>
+                    <a:lnR>
+                      <a:noFill/>
+                    </a:lnR>
+                    <a:lnT>
+                      <a:noFill/>
+                    </a:lnT>
+                    <a:lnB>
+                      <a:noFill/>
+                    </a:lnB>
+                    <a:noFill/>
+                  </a:tcPr>
+                </a:tc>
+              </a:tr>
+              <a:tr h="184785">
+                <a:tc>
+                  <a:txBody>
+                    <a:bodyPr/>
+                    <a:p>
+                      <a:pPr algn="ctr" fontAlgn="ctr"/>
+                      <a:r>
+                        <a:rPr lang="en-US" altLang="zh-CN" sz="2000" b="1" i="0">
+                          <a:solidFill>
+                            <a:srgbClr val="657B83"/>
+                          </a:solidFill>
+                          <a:latin typeface="Consolas" panose="020B0609020204030204"/>
+                          <a:ea typeface="Consolas" panose="020B0609020204030204"/>
+                        </a:rPr>
+                        <a:t>v_0 </a:t>
+                      </a:r>
+                      <a:r>
+                        <a:rPr lang="zh-CN" altLang="en-US" sz="2000" b="1" i="0">
+                          <a:solidFill>
+                            <a:srgbClr val="657B83"/>
+                          </a:solidFill>
+                          <a:latin typeface="Consolas" panose="020B0609020204030204"/>
+                          <a:ea typeface="Consolas" panose="020B0609020204030204"/>
+                        </a:rPr>
+                        <a:t>基线</a:t>
+                      </a:r>
+                      <a:endParaRPr lang="zh-CN" altLang="en-US" sz="2000" b="1" i="0">
+                        <a:solidFill>
+                          <a:srgbClr val="657B83"/>
+                        </a:solidFill>
+                        <a:latin typeface="Consolas" panose="020B0609020204030204"/>
+                        <a:ea typeface="Consolas" panose="020B0609020204030204"/>
+                      </a:endParaRPr>
+                    </a:p>
+                  </a:txBody>
+                  <a:tcPr marL="6667" marR="6667" marT="6667" marB="0" anchor="ctr" anchorCtr="0">
+                    <a:lnL>
+                      <a:noFill/>
+                    </a:lnL>
+                    <a:lnR>
+                      <a:noFill/>
+                    </a:lnR>
+                    <a:lnT>
+                      <a:noFill/>
+                    </a:lnT>
+                    <a:lnB>
+                      <a:noFill/>
+                    </a:lnB>
+                    <a:noFill/>
+                  </a:tcPr>
+                </a:tc>
+                <a:tc>
+                  <a:txBody>
+                    <a:bodyPr/>
+                    <a:p>
+                      <a:pPr algn="ctr" fontAlgn="ctr"/>
+                      <a:r>
+                        <a:rPr lang="en-US" altLang="zh-CN" sz="2000" b="1" i="0">
+                          <a:solidFill>
+                            <a:srgbClr val="657B83"/>
+                          </a:solidFill>
+                          <a:latin typeface="Consolas" panose="020B0609020204030204"/>
+                          <a:ea typeface="Consolas" panose="020B0609020204030204"/>
+                        </a:rPr>
+                        <a:t>v_T * v_P * 3</a:t>
+                      </a:r>
+                      <a:endParaRPr lang="en-US" altLang="zh-CN" sz="2000" b="1" i="0">
+                        <a:solidFill>
+                          <a:srgbClr val="657B83"/>
+                        </a:solidFill>
+                        <a:latin typeface="Consolas" panose="020B0609020204030204"/>
+                        <a:ea typeface="Consolas" panose="020B0609020204030204"/>
+                      </a:endParaRPr>
+                    </a:p>
+                  </a:txBody>
+                  <a:tcPr marL="6667" marR="6667" marT="6667" marB="0" anchor="ctr" anchorCtr="0">
+                    <a:lnL>
+                      <a:noFill/>
+                    </a:lnL>
+                    <a:lnR>
+                      <a:noFill/>
+                    </a:lnR>
+                    <a:lnT>
+                      <a:noFill/>
+                    </a:lnT>
+                    <a:lnB>
+                      <a:noFill/>
+                    </a:lnB>
+                    <a:noFill/>
+                  </a:tcPr>
+                </a:tc>
+                <a:tc>
+                  <a:txBody>
+                    <a:bodyPr/>
+                    <a:p>
+                      <a:pPr algn="ctr" fontAlgn="ctr"/>
+                      <a:r>
+                        <a:rPr lang="en-US" altLang="zh-CN" sz="2000" b="1" i="0">
+                          <a:solidFill>
+                            <a:srgbClr val="657B83"/>
+                          </a:solidFill>
+                          <a:latin typeface="Consolas" panose="020B0609020204030204"/>
+                          <a:ea typeface="Consolas" panose="020B0609020204030204"/>
+                        </a:rPr>
+                        <a:t>v_T * v_P * 3</a:t>
+                      </a:r>
+                      <a:endParaRPr lang="en-US" altLang="zh-CN" sz="2000" b="1" i="0">
+                        <a:solidFill>
+                          <a:srgbClr val="657B83"/>
+                        </a:solidFill>
+                        <a:latin typeface="Consolas" panose="020B0609020204030204"/>
+                        <a:ea typeface="Consolas" panose="020B0609020204030204"/>
+                      </a:endParaRPr>
+                    </a:p>
+                  </a:txBody>
+                  <a:tcPr marL="6667" marR="6667" marT="6667" marB="0" anchor="ctr" anchorCtr="0">
+                    <a:lnL>
+                      <a:noFill/>
+                    </a:lnL>
+                    <a:lnR>
+                      <a:noFill/>
+                    </a:lnR>
+                    <a:lnT>
+                      <a:noFill/>
+                    </a:lnT>
+                    <a:lnB>
+                      <a:noFill/>
+                    </a:lnB>
+                    <a:noFill/>
+                  </a:tcPr>
+                </a:tc>
+                <a:tc>
+                  <a:txBody>
+                    <a:bodyPr/>
+                    <a:p>
+                      <a:pPr algn="ctr" fontAlgn="ctr"/>
+                      <a:r>
+                        <a:rPr lang="zh-CN" altLang="en-US" sz="2000" b="1" i="0">
+                          <a:solidFill>
+                            <a:srgbClr val="657B83"/>
+                          </a:solidFill>
+                          <a:latin typeface="宋体" panose="02010600030101010101" pitchFamily="2" charset="-122"/>
+                          <a:ea typeface="宋体" panose="02010600030101010101" pitchFamily="2" charset="-122"/>
+                        </a:rPr>
+                        <a:t>没变</a:t>
+                      </a:r>
+                      <a:endParaRPr lang="zh-CN" altLang="en-US" sz="2000" b="1" i="0">
+                        <a:solidFill>
+                          <a:srgbClr val="657B83"/>
+                        </a:solidFill>
+                        <a:latin typeface="宋体" panose="02010600030101010101" pitchFamily="2" charset="-122"/>
+                        <a:ea typeface="宋体" panose="02010600030101010101" pitchFamily="2" charset="-122"/>
+                      </a:endParaRPr>
+                    </a:p>
+                  </a:txBody>
+                  <a:tcPr marL="6667" marR="6667" marT="6667" marB="0" anchor="ctr" anchorCtr="0">
+                    <a:lnL>
+                      <a:noFill/>
+                    </a:lnL>
+                    <a:lnR>
+                      <a:noFill/>
+                    </a:lnR>
+                    <a:lnT>
+                      <a:noFill/>
+                    </a:lnT>
+                    <a:lnB>
+                      <a:noFill/>
+                    </a:lnB>
+                    <a:noFill/>
+                  </a:tcPr>
+                </a:tc>
+              </a:tr>
+              <a:tr h="369570">
+                <a:tc>
+                  <a:txBody>
+                    <a:bodyPr/>
+                    <a:p>
+                      <a:pPr algn="ctr" fontAlgn="ctr"/>
+                      <a:r>
+                        <a:rPr lang="en-US" altLang="zh-CN" sz="2000" b="1" i="0">
+                          <a:solidFill>
+                            <a:srgbClr val="657B83"/>
+                          </a:solidFill>
+                          <a:latin typeface="Consolas" panose="020B0609020204030204"/>
+                          <a:ea typeface="Consolas" panose="020B0609020204030204"/>
+                        </a:rPr>
+                        <a:t>v </a:t>
+                      </a:r>
+                      <a:r>
+                        <a:rPr lang="zh-CN" altLang="en-US" sz="2000" b="1" i="0">
+                          <a:solidFill>
+                            <a:srgbClr val="657B83"/>
+                          </a:solidFill>
+                          <a:latin typeface="Consolas" panose="020B0609020204030204"/>
+                          <a:ea typeface="Consolas" panose="020B0609020204030204"/>
+                        </a:rPr>
+                        <a:t>的随机扰动位置</a:t>
+                      </a:r>
+                      <a:endParaRPr lang="zh-CN" altLang="en-US" sz="2000" b="1" i="0">
+                        <a:solidFill>
+                          <a:srgbClr val="657B83"/>
+                        </a:solidFill>
+                        <a:latin typeface="Consolas" panose="020B0609020204030204"/>
+                        <a:ea typeface="Consolas" panose="020B0609020204030204"/>
+                      </a:endParaRPr>
+                    </a:p>
+                  </a:txBody>
+                  <a:tcPr marL="6667" marR="6667" marT="6667" marB="0" anchor="ctr" anchorCtr="0">
+                    <a:lnL>
+                      <a:noFill/>
+                    </a:lnL>
+                    <a:lnR>
+                      <a:noFill/>
+                    </a:lnR>
+                    <a:lnT>
+                      <a:noFill/>
+                    </a:lnT>
+                    <a:lnB>
+                      <a:noFill/>
+                    </a:lnB>
+                    <a:noFill/>
+                  </a:tcPr>
+                </a:tc>
+                <a:tc>
+                  <a:txBody>
+                    <a:bodyPr/>
+                    <a:p>
+                      <a:pPr algn="ctr" fontAlgn="ctr"/>
+                      <a:r>
+                        <a:rPr lang="zh-CN" altLang="en-US" sz="2000" b="1" i="0">
+                          <a:solidFill>
+                            <a:srgbClr val="657B83"/>
+                          </a:solidFill>
+                          <a:latin typeface="宋体" panose="02010600030101010101" pitchFamily="2" charset="-122"/>
+                          <a:ea typeface="宋体" panose="02010600030101010101" pitchFamily="2" charset="-122"/>
+                        </a:rPr>
+                        <a:t>在 </a:t>
+                      </a:r>
+                      <a:r>
+                        <a:rPr lang="en-US" altLang="zh-CN" sz="2000" b="1" i="0">
+                          <a:solidFill>
+                            <a:srgbClr val="657B83"/>
+                          </a:solidFill>
+                          <a:latin typeface="宋体" panose="02010600030101010101" pitchFamily="2" charset="-122"/>
+                          <a:ea typeface="宋体" panose="02010600030101010101" pitchFamily="2" charset="-122"/>
+                        </a:rPr>
+                        <a:t>compute_v() </a:t>
+                      </a:r>
+                      <a:r>
+                        <a:rPr lang="zh-CN" altLang="en-US" sz="2000" b="1" i="0">
+                          <a:solidFill>
+                            <a:srgbClr val="657B83"/>
+                          </a:solidFill>
+                          <a:latin typeface="宋体" panose="02010600030101010101" pitchFamily="2" charset="-122"/>
+                          <a:ea typeface="宋体" panose="02010600030101010101" pitchFamily="2" charset="-122"/>
+                        </a:rPr>
+                        <a:t>内直接 </a:t>
+                      </a:r>
+                      <a:r>
+                        <a:rPr lang="en-US" altLang="zh-CN" sz="2000" b="1" i="0">
+                          <a:solidFill>
+                            <a:srgbClr val="657B83"/>
+                          </a:solidFill>
+                          <a:latin typeface="宋体" panose="02010600030101010101" pitchFamily="2" charset="-122"/>
+                          <a:ea typeface="宋体" panose="02010600030101010101" pitchFamily="2" charset="-122"/>
+                        </a:rPr>
+                        <a:t>Normal(v_1, 1)</a:t>
+                      </a:r>
+                      <a:endParaRPr lang="en-US" altLang="zh-CN" sz="2000" b="1" i="0">
+                        <a:solidFill>
+                          <a:srgbClr val="657B83"/>
+                        </a:solidFill>
+                        <a:latin typeface="宋体" panose="02010600030101010101" pitchFamily="2" charset="-122"/>
+                        <a:ea typeface="宋体" panose="02010600030101010101" pitchFamily="2" charset="-122"/>
+                      </a:endParaRPr>
+                    </a:p>
+                  </a:txBody>
+                  <a:tcPr marL="6667" marR="6667" marT="6667" marB="0" anchor="ctr" anchorCtr="0">
+                    <a:lnL>
+                      <a:noFill/>
+                    </a:lnL>
+                    <a:lnR>
+                      <a:noFill/>
+                    </a:lnR>
+                    <a:lnT>
+                      <a:noFill/>
+                    </a:lnT>
+                    <a:lnB>
+                      <a:noFill/>
+                    </a:lnB>
+                    <a:noFill/>
+                  </a:tcPr>
+                </a:tc>
+                <a:tc>
+                  <a:txBody>
+                    <a:bodyPr/>
+                    <a:p>
+                      <a:pPr algn="ctr" fontAlgn="ctr"/>
+                      <a:r>
+                        <a:rPr lang="zh-CN" altLang="en-US" sz="2000" b="1" i="0">
+                          <a:solidFill>
+                            <a:srgbClr val="657B83"/>
+                          </a:solidFill>
+                          <a:latin typeface="宋体" panose="02010600030101010101" pitchFamily="2" charset="-122"/>
+                          <a:ea typeface="宋体" panose="02010600030101010101" pitchFamily="2" charset="-122"/>
+                        </a:rPr>
+                        <a:t>先返回确定性 </a:t>
+                      </a:r>
+                      <a:r>
+                        <a:rPr lang="en-US" altLang="zh-CN" sz="2000" b="1" i="0">
+                          <a:solidFill>
+                            <a:srgbClr val="657B83"/>
+                          </a:solidFill>
+                          <a:latin typeface="宋体" panose="02010600030101010101" pitchFamily="2" charset="-122"/>
+                          <a:ea typeface="宋体" panose="02010600030101010101" pitchFamily="2" charset="-122"/>
+                        </a:rPr>
+                        <a:t>v_1</a:t>
+                      </a:r>
+                      <a:r>
+                        <a:rPr lang="zh-CN" altLang="en-US" sz="2000" b="1" i="0">
+                          <a:solidFill>
+                            <a:srgbClr val="657B83"/>
+                          </a:solidFill>
+                          <a:latin typeface="宋体" panose="02010600030101010101" pitchFamily="2" charset="-122"/>
+                          <a:ea typeface="宋体" panose="02010600030101010101" pitchFamily="2" charset="-122"/>
+                        </a:rPr>
+                        <a:t>，再在 </a:t>
+                      </a:r>
+                      <a:r>
+                        <a:rPr lang="en-US" altLang="zh-CN" sz="2000" b="1" i="0">
+                          <a:solidFill>
+                            <a:srgbClr val="657B83"/>
+                          </a:solidFill>
+                          <a:latin typeface="宋体" panose="02010600030101010101" pitchFamily="2" charset="-122"/>
+                          <a:ea typeface="宋体" panose="02010600030101010101" pitchFamily="2" charset="-122"/>
+                        </a:rPr>
+                        <a:t>trial </a:t>
+                      </a:r>
+                      <a:r>
+                        <a:rPr lang="zh-CN" altLang="en-US" sz="2000" b="1" i="0">
+                          <a:solidFill>
+                            <a:srgbClr val="657B83"/>
+                          </a:solidFill>
+                          <a:latin typeface="宋体" panose="02010600030101010101" pitchFamily="2" charset="-122"/>
+                          <a:ea typeface="宋体" panose="02010600030101010101" pitchFamily="2" charset="-122"/>
+                        </a:rPr>
+                        <a:t>层 </a:t>
+                      </a:r>
+                      <a:r>
+                        <a:rPr lang="en-US" altLang="zh-CN" sz="2000" b="1" i="0">
+                          <a:solidFill>
+                            <a:srgbClr val="657B83"/>
+                          </a:solidFill>
+                          <a:latin typeface="宋体" panose="02010600030101010101" pitchFamily="2" charset="-122"/>
+                          <a:ea typeface="宋体" panose="02010600030101010101" pitchFamily="2" charset="-122"/>
+                        </a:rPr>
+                        <a:t>Normal(v, 1)</a:t>
+                      </a:r>
+                      <a:endParaRPr lang="en-US" altLang="zh-CN" sz="2000" b="1" i="0">
+                        <a:solidFill>
+                          <a:srgbClr val="657B83"/>
+                        </a:solidFill>
+                        <a:latin typeface="宋体" panose="02010600030101010101" pitchFamily="2" charset="-122"/>
+                        <a:ea typeface="宋体" panose="02010600030101010101" pitchFamily="2" charset="-122"/>
+                      </a:endParaRPr>
+                    </a:p>
+                  </a:txBody>
+                  <a:tcPr marL="6667" marR="6667" marT="6667" marB="0" anchor="ctr" anchorCtr="0">
+                    <a:lnL>
+                      <a:noFill/>
+                    </a:lnL>
+                    <a:lnR>
+                      <a:noFill/>
+                    </a:lnR>
+                    <a:lnT>
+                      <a:noFill/>
+                    </a:lnT>
+                    <a:lnB>
+                      <a:noFill/>
+                    </a:lnB>
+                    <a:noFill/>
+                  </a:tcPr>
+                </a:tc>
+                <a:tc>
+                  <a:txBody>
+                    <a:bodyPr/>
+                    <a:p>
+                      <a:pPr algn="ctr" fontAlgn="ctr"/>
+                      <a:r>
+                        <a:rPr lang="zh-CN" altLang="en-US" sz="2000" b="1" i="0">
+                          <a:solidFill>
+                            <a:srgbClr val="657B83"/>
+                          </a:solidFill>
+                          <a:latin typeface="宋体" panose="02010600030101010101" pitchFamily="2" charset="-122"/>
+                          <a:ea typeface="宋体" panose="02010600030101010101" pitchFamily="2" charset="-122"/>
+                        </a:rPr>
+                        <a:t>分布思想接近，但新版结构更清楚</a:t>
+                      </a:r>
+                      <a:endParaRPr lang="zh-CN" altLang="en-US" sz="2000" b="1" i="0">
+                        <a:solidFill>
+                          <a:srgbClr val="657B83"/>
+                        </a:solidFill>
+                        <a:latin typeface="宋体" panose="02010600030101010101" pitchFamily="2" charset="-122"/>
+                        <a:ea typeface="宋体" panose="02010600030101010101" pitchFamily="2" charset="-122"/>
+                      </a:endParaRPr>
+                    </a:p>
+                  </a:txBody>
+                  <a:tcPr marL="6667" marR="6667" marT="6667" marB="0" anchor="ctr" anchorCtr="0">
+                    <a:lnL>
+                      <a:noFill/>
+                    </a:lnL>
+                    <a:lnR>
+                      <a:noFill/>
+                    </a:lnR>
+                    <a:lnT>
+                      <a:noFill/>
+                    </a:lnT>
+                    <a:lnB>
+                      <a:noFill/>
+                    </a:lnB>
+                    <a:noFill/>
+                  </a:tcPr>
+                </a:tc>
+              </a:tr>
+              <a:tr h="325755">
+                <a:tc>
+                  <a:txBody>
+                    <a:bodyPr/>
+                    <a:p>
+                      <a:pPr algn="ctr" fontAlgn="ctr"/>
+                      <a:r>
+                        <a:rPr lang="en-US" altLang="zh-CN" sz="2000" b="1" i="0">
+                          <a:solidFill>
+                            <a:srgbClr val="657B83"/>
+                          </a:solidFill>
+                          <a:latin typeface="Consolas" panose="020B0609020204030204"/>
+                          <a:ea typeface="Consolas" panose="020B0609020204030204"/>
+                        </a:rPr>
+                        <a:t>a_0 </a:t>
+                      </a:r>
+                      <a:r>
+                        <a:rPr lang="zh-CN" altLang="en-US" sz="2000" b="1" i="0">
+                          <a:solidFill>
+                            <a:srgbClr val="657B83"/>
+                          </a:solidFill>
+                          <a:latin typeface="Consolas" panose="020B0609020204030204"/>
+                          <a:ea typeface="Consolas" panose="020B0609020204030204"/>
+                        </a:rPr>
+                        <a:t>基线</a:t>
+                      </a:r>
+                      <a:endParaRPr lang="zh-CN" altLang="en-US" sz="2000" b="1" i="0">
+                        <a:solidFill>
+                          <a:srgbClr val="657B83"/>
+                        </a:solidFill>
+                        <a:latin typeface="Consolas" panose="020B0609020204030204"/>
+                        <a:ea typeface="Consolas" panose="020B0609020204030204"/>
+                      </a:endParaRPr>
+                    </a:p>
+                  </a:txBody>
+                  <a:tcPr marL="6667" marR="6667" marT="6667" marB="0" anchor="ctr" anchorCtr="0">
+                    <a:lnL>
+                      <a:noFill/>
+                    </a:lnL>
+                    <a:lnR>
+                      <a:noFill/>
+                    </a:lnR>
+                    <a:lnT>
+                      <a:noFill/>
+                    </a:lnT>
+                    <a:lnB>
+                      <a:noFill/>
+                    </a:lnB>
+                    <a:noFill/>
+                  </a:tcPr>
+                </a:tc>
+                <a:tc>
+                  <a:txBody>
+                    <a:bodyPr/>
+                    <a:p>
+                      <a:pPr algn="ctr" fontAlgn="ctr"/>
+                      <a:r>
+                        <a:rPr lang="en-US" altLang="zh-CN" sz="2000" b="1" i="0">
+                          <a:solidFill>
+                            <a:srgbClr val="657B83"/>
+                          </a:solidFill>
+                          <a:latin typeface="Consolas" panose="020B0609020204030204"/>
+                          <a:ea typeface="Consolas" panose="020B0609020204030204"/>
+                        </a:rPr>
+                        <a:t>sigmoid(M; M0=600, k=0.01) * 3</a:t>
+                      </a:r>
+                      <a:endParaRPr lang="en-US" altLang="zh-CN" sz="2000" b="1" i="0">
+                        <a:solidFill>
+                          <a:srgbClr val="657B83"/>
+                        </a:solidFill>
+                        <a:latin typeface="Consolas" panose="020B0609020204030204"/>
+                        <a:ea typeface="Consolas" panose="020B0609020204030204"/>
+                      </a:endParaRPr>
+                    </a:p>
+                  </a:txBody>
+                  <a:tcPr marL="6667" marR="6667" marT="6667" marB="0" anchor="ctr" anchorCtr="0">
+                    <a:lnL>
+                      <a:noFill/>
+                    </a:lnL>
+                    <a:lnR>
+                      <a:noFill/>
+                    </a:lnR>
+                    <a:lnT>
+                      <a:noFill/>
+                    </a:lnT>
+                    <a:lnB>
+                      <a:noFill/>
+                    </a:lnB>
+                    <a:noFill/>
+                  </a:tcPr>
+                </a:tc>
+                <a:tc>
+                  <a:txBody>
+                    <a:bodyPr/>
+                    <a:p>
+                      <a:pPr algn="ctr" fontAlgn="ctr"/>
+                      <a:r>
+                        <a:rPr lang="zh-CN" altLang="en-US" sz="2000" b="1" i="0">
+                          <a:solidFill>
+                            <a:srgbClr val="657B83"/>
+                          </a:solidFill>
+                          <a:latin typeface="宋体" panose="02010600030101010101" pitchFamily="2" charset="-122"/>
+                          <a:ea typeface="宋体" panose="02010600030101010101" pitchFamily="2" charset="-122"/>
+                        </a:rPr>
+                        <a:t>同样</a:t>
+                      </a:r>
+                      <a:endParaRPr lang="zh-CN" altLang="en-US" sz="2000" b="1" i="0">
+                        <a:solidFill>
+                          <a:srgbClr val="657B83"/>
+                        </a:solidFill>
+                        <a:latin typeface="宋体" panose="02010600030101010101" pitchFamily="2" charset="-122"/>
+                        <a:ea typeface="宋体" panose="02010600030101010101" pitchFamily="2" charset="-122"/>
+                      </a:endParaRPr>
+                    </a:p>
+                  </a:txBody>
+                  <a:tcPr marL="6667" marR="6667" marT="6667" marB="0" anchor="ctr" anchorCtr="0">
+                    <a:lnL>
+                      <a:noFill/>
+                    </a:lnL>
+                    <a:lnR>
+                      <a:noFill/>
+                    </a:lnR>
+                    <a:lnT>
+                      <a:noFill/>
+                    </a:lnT>
+                    <a:lnB>
+                      <a:noFill/>
+                    </a:lnB>
+                    <a:noFill/>
+                  </a:tcPr>
+                </a:tc>
+                <a:tc>
+                  <a:txBody>
+                    <a:bodyPr/>
+                    <a:p>
+                      <a:pPr algn="ctr" fontAlgn="ctr"/>
+                      <a:r>
+                        <a:rPr lang="zh-CN" altLang="en-US" sz="2000" b="1" i="0">
+                          <a:solidFill>
+                            <a:srgbClr val="657B83"/>
+                          </a:solidFill>
+                          <a:latin typeface="宋体" panose="02010600030101010101" pitchFamily="2" charset="-122"/>
+                          <a:ea typeface="宋体" panose="02010600030101010101" pitchFamily="2" charset="-122"/>
+                        </a:rPr>
+                        <a:t>没变</a:t>
+                      </a:r>
+                      <a:endParaRPr lang="zh-CN" altLang="en-US" sz="2000" b="1" i="0">
+                        <a:solidFill>
+                          <a:srgbClr val="657B83"/>
+                        </a:solidFill>
+                        <a:latin typeface="宋体" panose="02010600030101010101" pitchFamily="2" charset="-122"/>
+                        <a:ea typeface="宋体" panose="02010600030101010101" pitchFamily="2" charset="-122"/>
+                      </a:endParaRPr>
+                    </a:p>
+                  </a:txBody>
+                  <a:tcPr marL="6667" marR="6667" marT="6667" marB="0" anchor="ctr" anchorCtr="0">
+                    <a:lnL>
+                      <a:noFill/>
+                    </a:lnL>
+                    <a:lnR>
+                      <a:noFill/>
+                    </a:lnR>
+                    <a:lnT>
+                      <a:noFill/>
+                    </a:lnT>
+                    <a:lnB>
+                      <a:noFill/>
+                    </a:lnB>
+                    <a:noFill/>
+                  </a:tcPr>
+                </a:tc>
+              </a:tr>
+              <a:tr h="554990">
+                <a:tc>
+                  <a:txBody>
+                    <a:bodyPr/>
+                    <a:p>
+                      <a:pPr algn="ctr" fontAlgn="ctr"/>
+                      <a:r>
+                        <a:rPr lang="en-US" altLang="zh-CN" sz="2000" b="1" i="0">
+                          <a:solidFill>
+                            <a:srgbClr val="657B83"/>
+                          </a:solidFill>
+                          <a:latin typeface="Consolas" panose="020B0609020204030204"/>
+                          <a:ea typeface="Consolas" panose="020B0609020204030204"/>
+                        </a:rPr>
+                        <a:t>a </a:t>
+                      </a:r>
+                      <a:r>
+                        <a:rPr lang="zh-CN" altLang="en-US" sz="2000" b="1" i="0">
+                          <a:solidFill>
+                            <a:srgbClr val="657B83"/>
+                          </a:solidFill>
+                          <a:latin typeface="Consolas" panose="020B0609020204030204"/>
+                          <a:ea typeface="Consolas" panose="020B0609020204030204"/>
+                        </a:rPr>
+                        <a:t>的随机扰动</a:t>
+                      </a:r>
+                      <a:endParaRPr lang="zh-CN" altLang="en-US" sz="2000" b="1" i="0">
+                        <a:solidFill>
+                          <a:srgbClr val="657B83"/>
+                        </a:solidFill>
+                        <a:latin typeface="Consolas" panose="020B0609020204030204"/>
+                        <a:ea typeface="Consolas" panose="020B0609020204030204"/>
+                      </a:endParaRPr>
+                    </a:p>
+                  </a:txBody>
+                  <a:tcPr marL="6667" marR="6667" marT="6667" marB="0" anchor="ctr" anchorCtr="0">
+                    <a:lnL>
+                      <a:noFill/>
+                    </a:lnL>
+                    <a:lnR>
+                      <a:noFill/>
+                    </a:lnR>
+                    <a:lnT>
+                      <a:noFill/>
+                    </a:lnT>
+                    <a:lnB>
+                      <a:noFill/>
+                    </a:lnB>
+                    <a:noFill/>
+                  </a:tcPr>
+                </a:tc>
+                <a:tc>
+                  <a:txBody>
+                    <a:bodyPr/>
+                    <a:p>
+                      <a:pPr algn="ctr" fontAlgn="ctr"/>
+                      <a:r>
+                        <a:rPr lang="en-US" altLang="zh-CN" sz="2000" b="1" i="0">
+                          <a:solidFill>
+                            <a:srgbClr val="657B83"/>
+                          </a:solidFill>
+                          <a:latin typeface="Consolas" panose="020B0609020204030204"/>
+                          <a:ea typeface="Consolas" panose="020B0609020204030204"/>
+                        </a:rPr>
+                        <a:t>compute_a() </a:t>
+                      </a:r>
+                      <a:r>
+                        <a:rPr lang="zh-CN" altLang="en-US" sz="2000" b="1" i="0">
+                          <a:solidFill>
+                            <a:srgbClr val="657B83"/>
+                          </a:solidFill>
+                          <a:latin typeface="Consolas" panose="020B0609020204030204"/>
+                          <a:ea typeface="Consolas" panose="020B0609020204030204"/>
+                        </a:rPr>
+                        <a:t>里先 </a:t>
+                      </a:r>
+                      <a:r>
+                        <a:rPr lang="en-US" altLang="zh-CN" sz="2000" b="1" i="0">
+                          <a:solidFill>
+                            <a:srgbClr val="657B83"/>
+                          </a:solidFill>
+                          <a:latin typeface="Consolas" panose="020B0609020204030204"/>
+                          <a:ea typeface="Consolas" panose="020B0609020204030204"/>
+                        </a:rPr>
+                        <a:t>Normal(a_1, 0.5)</a:t>
+                      </a:r>
+                      <a:r>
+                        <a:rPr lang="zh-CN" altLang="en-US" sz="2000" b="1" i="0">
+                          <a:solidFill>
+                            <a:srgbClr val="657B83"/>
+                          </a:solidFill>
+                          <a:latin typeface="Consolas" panose="020B0609020204030204"/>
+                          <a:ea typeface="Consolas" panose="020B0609020204030204"/>
+                        </a:rPr>
+                        <a:t>；</a:t>
+                      </a:r>
+                      <a:r>
+                        <a:rPr lang="en-US" altLang="zh-CN" sz="2000" b="1" i="0">
+                          <a:solidFill>
+                            <a:srgbClr val="657B83"/>
+                          </a:solidFill>
+                          <a:latin typeface="Consolas" panose="020B0609020204030204"/>
+                          <a:ea typeface="Consolas" panose="020B0609020204030204"/>
+                        </a:rPr>
+                        <a:t>trial </a:t>
+                      </a:r>
+                      <a:r>
+                        <a:rPr lang="zh-CN" altLang="en-US" sz="2000" b="1" i="0">
+                          <a:solidFill>
+                            <a:srgbClr val="657B83"/>
+                          </a:solidFill>
+                          <a:latin typeface="Consolas" panose="020B0609020204030204"/>
+                          <a:ea typeface="Consolas" panose="020B0609020204030204"/>
+                        </a:rPr>
+                        <a:t>层再 </a:t>
+                      </a:r>
+                      <a:r>
+                        <a:rPr lang="en-US" altLang="zh-CN" sz="2000" b="1" i="0">
+                          <a:solidFill>
+                            <a:srgbClr val="657B83"/>
+                          </a:solidFill>
+                          <a:latin typeface="Consolas" panose="020B0609020204030204"/>
+                          <a:ea typeface="Consolas" panose="020B0609020204030204"/>
+                        </a:rPr>
+                        <a:t>Normal(a, 1)</a:t>
+                      </a:r>
+                      <a:endParaRPr lang="en-US" altLang="zh-CN" sz="2000" b="1" i="0">
+                        <a:solidFill>
+                          <a:srgbClr val="657B83"/>
+                        </a:solidFill>
+                        <a:latin typeface="Consolas" panose="020B0609020204030204"/>
+                        <a:ea typeface="Consolas" panose="020B0609020204030204"/>
+                      </a:endParaRPr>
+                    </a:p>
+                  </a:txBody>
+                  <a:tcPr marL="6667" marR="6667" marT="6667" marB="0" anchor="ctr" anchorCtr="0">
+                    <a:lnL>
+                      <a:noFill/>
+                    </a:lnL>
+                    <a:lnR>
+                      <a:noFill/>
+                    </a:lnR>
+                    <a:lnT>
+                      <a:noFill/>
+                    </a:lnT>
+                    <a:lnB>
+                      <a:noFill/>
+                    </a:lnB>
+                    <a:noFill/>
+                  </a:tcPr>
+                </a:tc>
+                <a:tc>
+                  <a:txBody>
+                    <a:bodyPr/>
+                    <a:p>
+                      <a:pPr algn="ctr" fontAlgn="ctr"/>
+                      <a:r>
+                        <a:rPr lang="zh-CN" altLang="en-US" sz="2000" b="1" i="0">
+                          <a:solidFill>
+                            <a:srgbClr val="657B83"/>
+                          </a:solidFill>
+                          <a:latin typeface="宋体" panose="02010600030101010101" pitchFamily="2" charset="-122"/>
+                          <a:ea typeface="宋体" panose="02010600030101010101" pitchFamily="2" charset="-122"/>
+                        </a:rPr>
+                        <a:t>只在被试层一次性加噪：</a:t>
+                      </a:r>
+                      <a:r>
+                        <a:rPr lang="en-US" altLang="zh-CN" sz="2000" b="1" i="0">
+                          <a:solidFill>
+                            <a:srgbClr val="657B83"/>
+                          </a:solidFill>
+                          <a:latin typeface="宋体" panose="02010600030101010101" pitchFamily="2" charset="-122"/>
+                          <a:ea typeface="宋体" panose="02010600030101010101" pitchFamily="2" charset="-122"/>
+                        </a:rPr>
+                        <a:t>Normal(a_base, a_base * A_CV)</a:t>
+                      </a:r>
+                      <a:endParaRPr lang="en-US" altLang="zh-CN" sz="2000" b="1" i="0">
+                        <a:solidFill>
+                          <a:srgbClr val="657B83"/>
+                        </a:solidFill>
+                        <a:latin typeface="宋体" panose="02010600030101010101" pitchFamily="2" charset="-122"/>
+                        <a:ea typeface="宋体" panose="02010600030101010101" pitchFamily="2" charset="-122"/>
+                      </a:endParaRPr>
+                    </a:p>
+                  </a:txBody>
+                  <a:tcPr marL="6667" marR="6667" marT="6667" marB="0" anchor="ctr" anchorCtr="0">
+                    <a:lnL>
+                      <a:noFill/>
+                    </a:lnL>
+                    <a:lnR>
+                      <a:noFill/>
+                    </a:lnR>
+                    <a:lnT>
+                      <a:noFill/>
+                    </a:lnT>
+                    <a:lnB>
+                      <a:noFill/>
+                    </a:lnB>
+                    <a:noFill/>
+                  </a:tcPr>
+                </a:tc>
+                <a:tc>
+                  <a:txBody>
+                    <a:bodyPr/>
+                    <a:p>
+                      <a:pPr algn="ctr" fontAlgn="ctr"/>
+                      <a:r>
+                        <a:rPr lang="zh-CN" altLang="en-US" sz="2000" b="1" i="0">
+                          <a:solidFill>
+                            <a:srgbClr val="657B83"/>
+                          </a:solidFill>
+                          <a:latin typeface="宋体" panose="02010600030101010101" pitchFamily="2" charset="-122"/>
+                          <a:ea typeface="宋体" panose="02010600030101010101" pitchFamily="2" charset="-122"/>
+                        </a:rPr>
+                        <a:t>新版大幅减少了 </a:t>
+                      </a:r>
+                      <a:r>
+                        <a:rPr lang="en-US" altLang="zh-CN" sz="2000" b="1" i="0">
+                          <a:solidFill>
+                            <a:srgbClr val="657B83"/>
+                          </a:solidFill>
+                          <a:latin typeface="宋体" panose="02010600030101010101" pitchFamily="2" charset="-122"/>
+                          <a:ea typeface="宋体" panose="02010600030101010101" pitchFamily="2" charset="-122"/>
+                        </a:rPr>
+                        <a:t>trial </a:t>
+                      </a:r>
+                      <a:r>
+                        <a:rPr lang="zh-CN" altLang="en-US" sz="2000" b="1" i="0">
+                          <a:solidFill>
+                            <a:srgbClr val="657B83"/>
+                          </a:solidFill>
+                          <a:latin typeface="宋体" panose="02010600030101010101" pitchFamily="2" charset="-122"/>
+                          <a:ea typeface="宋体" panose="02010600030101010101" pitchFamily="2" charset="-122"/>
+                        </a:rPr>
+                        <a:t>层 </a:t>
+                      </a:r>
+                      <a:r>
+                        <a:rPr lang="en-US" altLang="zh-CN" sz="2000" b="1" i="0">
+                          <a:solidFill>
+                            <a:srgbClr val="657B83"/>
+                          </a:solidFill>
+                          <a:latin typeface="宋体" panose="02010600030101010101" pitchFamily="2" charset="-122"/>
+                          <a:ea typeface="宋体" panose="02010600030101010101" pitchFamily="2" charset="-122"/>
+                        </a:rPr>
+                        <a:t>a </a:t>
+                      </a:r>
+                      <a:r>
+                        <a:rPr lang="zh-CN" altLang="en-US" sz="2000" b="1" i="0">
+                          <a:solidFill>
+                            <a:srgbClr val="657B83"/>
+                          </a:solidFill>
+                          <a:latin typeface="宋体" panose="02010600030101010101" pitchFamily="2" charset="-122"/>
+                          <a:ea typeface="宋体" panose="02010600030101010101" pitchFamily="2" charset="-122"/>
+                        </a:rPr>
+                        <a:t>抖动</a:t>
+                      </a:r>
+                      <a:endParaRPr lang="zh-CN" altLang="en-US" sz="2000" b="1" i="0">
+                        <a:solidFill>
+                          <a:srgbClr val="657B83"/>
+                        </a:solidFill>
+                        <a:latin typeface="宋体" panose="02010600030101010101" pitchFamily="2" charset="-122"/>
+                        <a:ea typeface="宋体" panose="02010600030101010101" pitchFamily="2" charset="-122"/>
+                      </a:endParaRPr>
+                    </a:p>
+                  </a:txBody>
+                  <a:tcPr marL="6667" marR="6667" marT="6667" marB="0" anchor="ctr" anchorCtr="0">
+                    <a:lnL>
+                      <a:noFill/>
+                    </a:lnL>
+                    <a:lnR>
+                      <a:noFill/>
+                    </a:lnR>
+                    <a:lnT>
+                      <a:noFill/>
+                    </a:lnT>
+                    <a:lnB>
+                      <a:noFill/>
+                    </a:lnB>
+                    <a:noFill/>
+                  </a:tcPr>
+                </a:tc>
+              </a:tr>
+              <a:tr h="185420">
+                <a:tc>
+                  <a:txBody>
+                    <a:bodyPr/>
+                    <a:p>
+                      <a:pPr algn="ctr" fontAlgn="ctr"/>
+                      <a:r>
+                        <a:rPr lang="en-US" altLang="zh-CN" sz="2000" b="1" i="0">
+                          <a:solidFill>
+                            <a:srgbClr val="657B83"/>
+                          </a:solidFill>
+                          <a:latin typeface="Consolas" panose="020B0609020204030204"/>
+                          <a:ea typeface="Consolas" panose="020B0609020204030204"/>
+                        </a:rPr>
+                        <a:t>A_CV</a:t>
+                      </a:r>
+                      <a:endParaRPr lang="en-US" altLang="zh-CN" sz="2000" b="1" i="0">
+                        <a:solidFill>
+                          <a:srgbClr val="657B83"/>
+                        </a:solidFill>
+                        <a:latin typeface="Consolas" panose="020B0609020204030204"/>
+                        <a:ea typeface="Consolas" panose="020B0609020204030204"/>
+                      </a:endParaRPr>
+                    </a:p>
+                  </a:txBody>
+                  <a:tcPr marL="6667" marR="6667" marT="6667" marB="0" anchor="ctr" anchorCtr="0">
+                    <a:lnL>
+                      <a:noFill/>
+                    </a:lnL>
+                    <a:lnR>
+                      <a:noFill/>
+                    </a:lnR>
+                    <a:lnT>
+                      <a:noFill/>
+                    </a:lnT>
+                    <a:lnB>
+                      <a:noFill/>
+                    </a:lnB>
+                    <a:noFill/>
+                  </a:tcPr>
+                </a:tc>
+                <a:tc>
+                  <a:txBody>
+                    <a:bodyPr/>
+                    <a:p>
+                      <a:pPr algn="ctr" fontAlgn="ctr"/>
+                      <a:r>
+                        <a:rPr lang="zh-CN" altLang="en-US" sz="2000" b="1" i="0">
+                          <a:solidFill>
+                            <a:srgbClr val="657B83"/>
+                          </a:solidFill>
+                          <a:latin typeface="宋体" panose="02010600030101010101" pitchFamily="2" charset="-122"/>
+                          <a:ea typeface="宋体" panose="02010600030101010101" pitchFamily="2" charset="-122"/>
+                        </a:rPr>
+                        <a:t>没有</a:t>
+                      </a:r>
+                      <a:endParaRPr lang="zh-CN" altLang="en-US" sz="2000" b="1" i="0">
+                        <a:solidFill>
+                          <a:srgbClr val="657B83"/>
+                        </a:solidFill>
+                        <a:latin typeface="宋体" panose="02010600030101010101" pitchFamily="2" charset="-122"/>
+                        <a:ea typeface="宋体" panose="02010600030101010101" pitchFamily="2" charset="-122"/>
+                      </a:endParaRPr>
+                    </a:p>
+                  </a:txBody>
+                  <a:tcPr marL="6667" marR="6667" marT="6667" marB="0" anchor="ctr" anchorCtr="0">
+                    <a:lnL>
+                      <a:noFill/>
+                    </a:lnL>
+                    <a:lnR>
+                      <a:noFill/>
+                    </a:lnR>
+                    <a:lnT>
+                      <a:noFill/>
+                    </a:lnT>
+                    <a:lnB>
+                      <a:noFill/>
+                    </a:lnB>
+                    <a:noFill/>
+                  </a:tcPr>
+                </a:tc>
+                <a:tc>
+                  <a:txBody>
+                    <a:bodyPr/>
+                    <a:p>
+                      <a:pPr algn="ctr" fontAlgn="ctr"/>
+                      <a:r>
+                        <a:rPr lang="en-US" altLang="zh-CN" sz="2000" b="1" i="0">
+                          <a:solidFill>
+                            <a:srgbClr val="657B83"/>
+                          </a:solidFill>
+                          <a:latin typeface="Consolas" panose="020B0609020204030204"/>
+                          <a:ea typeface="Consolas" panose="020B0609020204030204"/>
+                        </a:rPr>
+                        <a:t>A_CV = 0.15</a:t>
+                      </a:r>
+                      <a:endParaRPr lang="en-US" altLang="zh-CN" sz="2000" b="1" i="0">
+                        <a:solidFill>
+                          <a:srgbClr val="657B83"/>
+                        </a:solidFill>
+                        <a:latin typeface="Consolas" panose="020B0609020204030204"/>
+                        <a:ea typeface="Consolas" panose="020B0609020204030204"/>
+                      </a:endParaRPr>
+                    </a:p>
+                  </a:txBody>
+                  <a:tcPr marL="6667" marR="6667" marT="6667" marB="0" anchor="ctr" anchorCtr="0">
+                    <a:lnL>
+                      <a:noFill/>
+                    </a:lnL>
+                    <a:lnR>
+                      <a:noFill/>
+                    </a:lnR>
+                    <a:lnT>
+                      <a:noFill/>
+                    </a:lnT>
+                    <a:lnB>
+                      <a:noFill/>
+                    </a:lnB>
+                    <a:noFill/>
+                  </a:tcPr>
+                </a:tc>
+                <a:tc>
+                  <a:txBody>
+                    <a:bodyPr/>
+                    <a:p>
+                      <a:pPr algn="ctr" fontAlgn="ctr"/>
+                      <a:r>
+                        <a:rPr lang="zh-CN" altLang="en-US" sz="2000" b="1" i="0">
+                          <a:solidFill>
+                            <a:srgbClr val="657B83"/>
+                          </a:solidFill>
+                          <a:latin typeface="宋体" panose="02010600030101010101" pitchFamily="2" charset="-122"/>
+                          <a:ea typeface="宋体" panose="02010600030101010101" pitchFamily="2" charset="-122"/>
+                        </a:rPr>
+                        <a:t>新版显式建模被试间 </a:t>
+                      </a:r>
+                      <a:r>
+                        <a:rPr lang="en-US" altLang="zh-CN" sz="2000" b="1" i="0">
+                          <a:solidFill>
+                            <a:srgbClr val="657B83"/>
+                          </a:solidFill>
+                          <a:latin typeface="宋体" panose="02010600030101010101" pitchFamily="2" charset="-122"/>
+                          <a:ea typeface="宋体" panose="02010600030101010101" pitchFamily="2" charset="-122"/>
+                        </a:rPr>
+                        <a:t>a </a:t>
+                      </a:r>
+                      <a:r>
+                        <a:rPr lang="zh-CN" altLang="en-US" sz="2000" b="1" i="0">
+                          <a:solidFill>
+                            <a:srgbClr val="657B83"/>
+                          </a:solidFill>
+                          <a:latin typeface="宋体" panose="02010600030101010101" pitchFamily="2" charset="-122"/>
+                          <a:ea typeface="宋体" panose="02010600030101010101" pitchFamily="2" charset="-122"/>
+                        </a:rPr>
+                        <a:t>变异</a:t>
+                      </a:r>
+                      <a:endParaRPr lang="zh-CN" altLang="en-US" sz="2000" b="1" i="0">
+                        <a:solidFill>
+                          <a:srgbClr val="657B83"/>
+                        </a:solidFill>
+                        <a:latin typeface="宋体" panose="02010600030101010101" pitchFamily="2" charset="-122"/>
+                        <a:ea typeface="宋体" panose="02010600030101010101" pitchFamily="2" charset="-122"/>
+                      </a:endParaRPr>
+                    </a:p>
+                  </a:txBody>
+                  <a:tcPr marL="6667" marR="6667" marT="6667" marB="0" anchor="ctr" anchorCtr="0">
+                    <a:lnL>
+                      <a:noFill/>
+                    </a:lnL>
+                    <a:lnR>
+                      <a:noFill/>
+                    </a:lnR>
+                    <a:lnT>
+                      <a:noFill/>
+                    </a:lnT>
+                    <a:lnB>
+                      <a:noFill/>
+                    </a:lnB>
+                    <a:noFill/>
+                  </a:tcPr>
+                </a:tc>
+              </a:tr>
+            </a:tbl>
+          </a:graphicData>
+        </a:graphic>
+      </p:graphicFrame>
+    </p:spTree>
+  </p:cSld>
+  <p:clrMapOvr>
+    <a:masterClrMapping/>
+  </p:clrMapOvr>
+</p:sld>
+</file>
+
+<file path=ppt/slides/slide9.xml><?xml version="1.0" encoding="utf-8"?>
+<p:sld xmlns:a="http://schemas.openxmlformats.org/drawingml/2006/main" xmlns:r="http://schemas.openxmlformats.org/officeDocument/2006/relationships" xmlns:p="http://schemas.openxmlformats.org/presentationml/2006/main">
+  <p:cSld>
+    <p:spTree>
+      <p:nvGrpSpPr>
+        <p:cNvPr id="1" name=""/>
+        <p:cNvGrpSpPr/>
+        <p:nvPr/>
+      </p:nvGrpSpPr>
+      <p:grpSpPr/>
+      <p:graphicFrame>
+        <p:nvGraphicFramePr>
+          <p:cNvPr id="4" name="表格 3"/>
+          <p:cNvGraphicFramePr/>
+          <p:nvPr/>
+        </p:nvGraphicFramePr>
+        <p:xfrm>
+          <a:off x="0" y="0"/>
+          <a:ext cx="12192000" cy="3151505"/>
+        </p:xfrm>
+        <a:graphic>
+          <a:graphicData uri="http://schemas.openxmlformats.org/drawingml/2006/table">
+            <a:tbl>
+              <a:tblPr/>
+              <a:tblGrid>
+                <a:gridCol w="2711450"/>
+                <a:gridCol w="2634615"/>
+                <a:gridCol w="3649980"/>
+                <a:gridCol w="3195955"/>
+              </a:tblGrid>
+              <a:tr h="370205">
+                <a:tc>
+                  <a:txBody>
+                    <a:bodyPr/>
+                    <a:p>
+                      <a:pPr algn="ctr" fontAlgn="ctr"/>
+                      <a:r>
+                        <a:rPr lang="zh-CN" altLang="en-US" sz="2000" b="1" i="0">
+                          <a:solidFill>
+                            <a:srgbClr val="616161"/>
+                          </a:solidFill>
+                          <a:latin typeface="宋体" panose="02010600030101010101" pitchFamily="2" charset="-122"/>
+                          <a:ea typeface="宋体" panose="02010600030101010101" pitchFamily="2" charset="-122"/>
+                        </a:rPr>
+                        <a:t>项目</a:t>
+                      </a:r>
+                      <a:endParaRPr lang="zh-CN" altLang="en-US" sz="2000" b="1" i="0">
+                        <a:solidFill>
+                          <a:srgbClr val="616161"/>
+                        </a:solidFill>
+                        <a:latin typeface="宋体" panose="02010600030101010101" pitchFamily="2" charset="-122"/>
+                        <a:ea typeface="宋体" panose="02010600030101010101" pitchFamily="2" charset="-122"/>
+                      </a:endParaRPr>
+                    </a:p>
+                  </a:txBody>
+                  <a:tcPr marL="6667" marR="6667" marT="6667" marB="0" anchor="ctr" anchorCtr="0">
+                    <a:lnL>
+                      <a:noFill/>
+                    </a:lnL>
+                    <a:lnR>
+                      <a:noFill/>
+                    </a:lnR>
+                    <a:lnT>
+                      <a:noFill/>
+                    </a:lnT>
+                    <a:lnB>
+                      <a:noFill/>
+                    </a:lnB>
+                    <a:solidFill>
+                      <a:schemeClr val="accent5">
+                        <a:lumMod val="40000"/>
+                        <a:lumOff val="60000"/>
+                      </a:schemeClr>
+                    </a:solidFill>
+                  </a:tcPr>
+                </a:tc>
+                <a:tc>
+                  <a:txBody>
+                    <a:bodyPr/>
+                    <a:p>
+                      <a:pPr algn="ctr" fontAlgn="ctr"/>
+                      <a:r>
+                        <a:rPr lang="zh-CN" altLang="en-US" sz="2000" b="1" i="0">
+                          <a:solidFill>
+                            <a:srgbClr val="616161"/>
+                          </a:solidFill>
+                          <a:latin typeface="宋体" panose="02010600030101010101" pitchFamily="2" charset="-122"/>
+                          <a:ea typeface="宋体" panose="02010600030101010101" pitchFamily="2" charset="-122"/>
+                        </a:rPr>
+                        <a:t>旧版 </a:t>
+                      </a:r>
+                      <a:r>
+                        <a:rPr lang="en-US" altLang="zh-CN" sz="2000" b="1" i="0">
+                          <a:solidFill>
+                            <a:srgbClr val="616161"/>
+                          </a:solidFill>
+                          <a:latin typeface="宋体" panose="02010600030101010101" pitchFamily="2" charset="-122"/>
+                          <a:ea typeface="宋体" panose="02010600030101010101" pitchFamily="2" charset="-122"/>
+                        </a:rPr>
+                        <a:t>S2_gen_data.ipynb</a:t>
+                      </a:r>
+                      <a:endParaRPr lang="en-US" altLang="zh-CN" sz="2000" b="1" i="0">
+                        <a:solidFill>
+                          <a:srgbClr val="616161"/>
+                        </a:solidFill>
+                        <a:latin typeface="宋体" panose="02010600030101010101" pitchFamily="2" charset="-122"/>
+                        <a:ea typeface="宋体" panose="02010600030101010101" pitchFamily="2" charset="-122"/>
+                      </a:endParaRPr>
+                    </a:p>
+                  </a:txBody>
+                  <a:tcPr marL="6667" marR="6667" marT="6667" marB="0" anchor="ctr" anchorCtr="0">
+                    <a:lnL>
+                      <a:noFill/>
+                    </a:lnL>
+                    <a:lnR>
+                      <a:noFill/>
+                    </a:lnR>
+                    <a:lnT>
+                      <a:noFill/>
+                    </a:lnT>
+                    <a:lnB>
+                      <a:noFill/>
+                    </a:lnB>
+                    <a:solidFill>
+                      <a:schemeClr val="accent5">
+                        <a:lumMod val="40000"/>
+                        <a:lumOff val="60000"/>
+                      </a:schemeClr>
+                    </a:solidFill>
+                  </a:tcPr>
+                </a:tc>
+                <a:tc>
+                  <a:txBody>
+                    <a:bodyPr/>
+                    <a:p>
+                      <a:pPr algn="ctr" fontAlgn="ctr"/>
+                      <a:r>
+                        <a:rPr lang="zh-CN" altLang="en-US" sz="2000" b="1" i="0">
+                          <a:solidFill>
+                            <a:srgbClr val="616161"/>
+                          </a:solidFill>
+                          <a:latin typeface="宋体" panose="02010600030101010101" pitchFamily="2" charset="-122"/>
+                          <a:ea typeface="宋体" panose="02010600030101010101" pitchFamily="2" charset="-122"/>
+                        </a:rPr>
+                        <a:t>新版 </a:t>
+                      </a:r>
+                      <a:r>
+                        <a:rPr lang="en-US" altLang="zh-CN" sz="2000" b="1" i="0">
+                          <a:solidFill>
+                            <a:srgbClr val="616161"/>
+                          </a:solidFill>
+                          <a:latin typeface="宋体" panose="02010600030101010101" pitchFamily="2" charset="-122"/>
+                          <a:ea typeface="宋体" panose="02010600030101010101" pitchFamily="2" charset="-122"/>
+                        </a:rPr>
+                        <a:t>S2_gen_data_optimized.ipynb</a:t>
+                      </a:r>
+                      <a:endParaRPr lang="en-US" altLang="zh-CN" sz="2000" b="1" i="0">
+                        <a:solidFill>
+                          <a:srgbClr val="616161"/>
+                        </a:solidFill>
+                        <a:latin typeface="宋体" panose="02010600030101010101" pitchFamily="2" charset="-122"/>
+                        <a:ea typeface="宋体" panose="02010600030101010101" pitchFamily="2" charset="-122"/>
+                      </a:endParaRPr>
+                    </a:p>
+                  </a:txBody>
+                  <a:tcPr marL="6667" marR="6667" marT="6667" marB="0" anchor="ctr" anchorCtr="0">
+                    <a:lnL>
+                      <a:noFill/>
+                    </a:lnL>
+                    <a:lnR>
+                      <a:noFill/>
+                    </a:lnR>
+                    <a:lnT>
+                      <a:noFill/>
+                    </a:lnT>
+                    <a:lnB>
+                      <a:noFill/>
+                    </a:lnB>
+                    <a:solidFill>
+                      <a:schemeClr val="accent5">
+                        <a:lumMod val="40000"/>
+                        <a:lumOff val="60000"/>
+                      </a:schemeClr>
+                    </a:solidFill>
+                  </a:tcPr>
+                </a:tc>
+                <a:tc>
+                  <a:txBody>
+                    <a:bodyPr/>
+                    <a:p>
+                      <a:pPr algn="ctr" fontAlgn="ctr"/>
+                      <a:r>
+                        <a:rPr lang="zh-CN" altLang="en-US" sz="2000" b="1" i="0">
+                          <a:solidFill>
+                            <a:srgbClr val="616161"/>
+                          </a:solidFill>
+                          <a:latin typeface="宋体" panose="02010600030101010101" pitchFamily="2" charset="-122"/>
+                          <a:ea typeface="宋体" panose="02010600030101010101" pitchFamily="2" charset="-122"/>
+                        </a:rPr>
+                        <a:t>变化含义</a:t>
+                      </a:r>
+                      <a:endParaRPr lang="zh-CN" altLang="en-US" sz="2000" b="1" i="0">
+                        <a:solidFill>
+                          <a:srgbClr val="616161"/>
+                        </a:solidFill>
+                        <a:latin typeface="宋体" panose="02010600030101010101" pitchFamily="2" charset="-122"/>
+                        <a:ea typeface="宋体" panose="02010600030101010101" pitchFamily="2" charset="-122"/>
+                      </a:endParaRPr>
+                    </a:p>
+                  </a:txBody>
+                  <a:tcPr marL="6667" marR="6667" marT="6667" marB="0" anchor="ctr" anchorCtr="0">
+                    <a:lnL>
+                      <a:noFill/>
+                    </a:lnL>
+                    <a:lnR>
+                      <a:noFill/>
+                    </a:lnR>
+                    <a:lnT>
+                      <a:noFill/>
+                    </a:lnT>
+                    <a:lnB>
+                      <a:noFill/>
+                    </a:lnB>
+                    <a:solidFill>
+                      <a:schemeClr val="accent5">
+                        <a:lumMod val="40000"/>
+                        <a:lumOff val="60000"/>
+                      </a:schemeClr>
+                    </a:solidFill>
+                  </a:tcPr>
+                </a:tc>
+              </a:tr>
+              <a:tr h="370205">
+                <a:tc>
+                  <a:txBody>
+                    <a:bodyPr/>
+                    <a:p>
+                      <a:pPr algn="ctr" fontAlgn="ctr"/>
+                      <a:r>
+                        <a:rPr lang="en-US" altLang="zh-CN" sz="2000" b="1" i="0">
+                          <a:solidFill>
+                            <a:srgbClr val="657B83"/>
+                          </a:solidFill>
+                          <a:latin typeface="Segoe UI" panose="020B0502040204020203"/>
+                          <a:ea typeface="Segoe UI" panose="020B0502040204020203"/>
+                        </a:rPr>
+                        <a:t>trial </a:t>
+                      </a:r>
+                      <a:r>
+                        <a:rPr lang="zh-CN" altLang="en-US" sz="2000" b="1" i="0">
+                          <a:solidFill>
+                            <a:srgbClr val="657B83"/>
+                          </a:solidFill>
+                          <a:latin typeface="Segoe UI" panose="020B0502040204020203"/>
+                          <a:ea typeface="Segoe UI" panose="020B0502040204020203"/>
+                        </a:rPr>
+                        <a:t>是否补足</a:t>
+                      </a:r>
+                      <a:endParaRPr lang="zh-CN" altLang="en-US" sz="2000" b="1" i="0">
+                        <a:solidFill>
+                          <a:srgbClr val="657B83"/>
+                        </a:solidFill>
+                        <a:latin typeface="Segoe UI" panose="020B0502040204020203"/>
+                        <a:ea typeface="Segoe UI" panose="020B0502040204020203"/>
+                      </a:endParaRPr>
+                    </a:p>
+                  </a:txBody>
+                  <a:tcPr marL="6667" marR="6667" marT="6667" marB="0" anchor="ctr" anchorCtr="0">
+                    <a:lnL>
+                      <a:noFill/>
+                    </a:lnL>
+                    <a:lnR>
+                      <a:noFill/>
+                    </a:lnR>
+                    <a:lnT>
+                      <a:noFill/>
+                    </a:lnT>
+                    <a:lnB>
+                      <a:noFill/>
+                    </a:lnB>
+                    <a:noFill/>
+                  </a:tcPr>
+                </a:tc>
+                <a:tc>
+                  <a:txBody>
+                    <a:bodyPr/>
+                    <a:p>
+                      <a:pPr algn="ctr" fontAlgn="ctr"/>
+                      <a:r>
+                        <a:rPr lang="zh-CN" altLang="en-US" sz="2000" b="1" i="0">
+                          <a:solidFill>
+                            <a:srgbClr val="657B83"/>
+                          </a:solidFill>
+                          <a:latin typeface="宋体" panose="02010600030101010101" pitchFamily="2" charset="-122"/>
+                          <a:ea typeface="宋体" panose="02010600030101010101" pitchFamily="2" charset="-122"/>
+                        </a:rPr>
+                        <a:t>会，直到攒够有效 </a:t>
+                      </a:r>
+                      <a:r>
+                        <a:rPr lang="en-US" altLang="zh-CN" sz="2000" b="1" i="0">
+                          <a:solidFill>
+                            <a:srgbClr val="657B83"/>
+                          </a:solidFill>
+                          <a:latin typeface="宋体" panose="02010600030101010101" pitchFamily="2" charset="-122"/>
+                          <a:ea typeface="宋体" panose="02010600030101010101" pitchFamily="2" charset="-122"/>
+                        </a:rPr>
+                        <a:t>trial</a:t>
+                      </a:r>
+                      <a:endParaRPr lang="en-US" altLang="zh-CN" sz="2000" b="1" i="0">
+                        <a:solidFill>
+                          <a:srgbClr val="657B83"/>
+                        </a:solidFill>
+                        <a:latin typeface="宋体" panose="02010600030101010101" pitchFamily="2" charset="-122"/>
+                        <a:ea typeface="宋体" panose="02010600030101010101" pitchFamily="2" charset="-122"/>
+                      </a:endParaRPr>
+                    </a:p>
+                  </a:txBody>
+                  <a:tcPr marL="6667" marR="6667" marT="6667" marB="0" anchor="ctr" anchorCtr="0">
+                    <a:lnL>
+                      <a:noFill/>
+                    </a:lnL>
+                    <a:lnR>
+                      <a:noFill/>
+                    </a:lnR>
+                    <a:lnT>
+                      <a:noFill/>
+                    </a:lnT>
+                    <a:lnB>
+                      <a:noFill/>
+                    </a:lnB>
+                    <a:noFill/>
+                  </a:tcPr>
+                </a:tc>
+                <a:tc>
+                  <a:txBody>
+                    <a:bodyPr/>
+                    <a:p>
+                      <a:pPr algn="ctr" fontAlgn="ctr"/>
+                      <a:r>
+                        <a:rPr lang="zh-CN" altLang="en-US" sz="2000" b="1" i="0">
+                          <a:solidFill>
+                            <a:srgbClr val="657B83"/>
+                          </a:solidFill>
+                          <a:latin typeface="宋体" panose="02010600030101010101" pitchFamily="2" charset="-122"/>
+                          <a:ea typeface="宋体" panose="02010600030101010101" pitchFamily="2" charset="-122"/>
+                        </a:rPr>
+                        <a:t>不会，只保留有效 </a:t>
+                      </a:r>
+                      <a:r>
+                        <a:rPr lang="en-US" altLang="zh-CN" sz="2000" b="1" i="0">
+                          <a:solidFill>
+                            <a:srgbClr val="657B83"/>
+                          </a:solidFill>
+                          <a:latin typeface="宋体" panose="02010600030101010101" pitchFamily="2" charset="-122"/>
+                          <a:ea typeface="宋体" panose="02010600030101010101" pitchFamily="2" charset="-122"/>
+                        </a:rPr>
+                        <a:t>trial</a:t>
+                      </a:r>
+                      <a:endParaRPr lang="en-US" altLang="zh-CN" sz="2000" b="1" i="0">
+                        <a:solidFill>
+                          <a:srgbClr val="657B83"/>
+                        </a:solidFill>
+                        <a:latin typeface="宋体" panose="02010600030101010101" pitchFamily="2" charset="-122"/>
+                        <a:ea typeface="宋体" panose="02010600030101010101" pitchFamily="2" charset="-122"/>
+                      </a:endParaRPr>
+                    </a:p>
+                  </a:txBody>
+                  <a:tcPr marL="6667" marR="6667" marT="6667" marB="0" anchor="ctr" anchorCtr="0">
+                    <a:lnL>
+                      <a:noFill/>
+                    </a:lnL>
+                    <a:lnR>
+                      <a:noFill/>
+                    </a:lnR>
+                    <a:lnT>
+                      <a:noFill/>
+                    </a:lnT>
+                    <a:lnB>
+                      <a:noFill/>
+                    </a:lnB>
+                    <a:noFill/>
+                  </a:tcPr>
+                </a:tc>
+                <a:tc>
+                  <a:txBody>
+                    <a:bodyPr/>
+                    <a:p>
+                      <a:pPr algn="ctr" fontAlgn="ctr"/>
+                      <a:r>
+                        <a:rPr lang="zh-CN" altLang="en-US" sz="2000" b="1" i="0">
+                          <a:solidFill>
+                            <a:srgbClr val="657B83"/>
+                          </a:solidFill>
+                          <a:latin typeface="宋体" panose="02010600030101010101" pitchFamily="2" charset="-122"/>
+                          <a:ea typeface="宋体" panose="02010600030101010101" pitchFamily="2" charset="-122"/>
+                        </a:rPr>
+                        <a:t>新版可能让每个条件最终 </a:t>
+                      </a:r>
+                      <a:r>
+                        <a:rPr lang="en-US" altLang="zh-CN" sz="2000" b="1" i="0">
+                          <a:solidFill>
+                            <a:srgbClr val="657B83"/>
+                          </a:solidFill>
+                          <a:latin typeface="宋体" panose="02010600030101010101" pitchFamily="2" charset="-122"/>
+                          <a:ea typeface="宋体" panose="02010600030101010101" pitchFamily="2" charset="-122"/>
+                        </a:rPr>
+                        <a:t>trial </a:t>
+                      </a:r>
+                      <a:r>
+                        <a:rPr lang="zh-CN" altLang="en-US" sz="2000" b="1" i="0">
+                          <a:solidFill>
+                            <a:srgbClr val="657B83"/>
+                          </a:solidFill>
+                          <a:latin typeface="宋体" panose="02010600030101010101" pitchFamily="2" charset="-122"/>
+                          <a:ea typeface="宋体" panose="02010600030101010101" pitchFamily="2" charset="-122"/>
+                        </a:rPr>
+                        <a:t>数不完全相同</a:t>
+                      </a:r>
+                      <a:endParaRPr lang="zh-CN" altLang="en-US" sz="2000" b="1" i="0">
+                        <a:solidFill>
+                          <a:srgbClr val="657B83"/>
+                        </a:solidFill>
+                        <a:latin typeface="宋体" panose="02010600030101010101" pitchFamily="2" charset="-122"/>
+                        <a:ea typeface="宋体" panose="02010600030101010101" pitchFamily="2" charset="-122"/>
+                      </a:endParaRPr>
+                    </a:p>
+                  </a:txBody>
+                  <a:tcPr marL="6667" marR="6667" marT="6667" marB="0" anchor="ctr" anchorCtr="0">
+                    <a:lnL>
+                      <a:noFill/>
+                    </a:lnL>
+                    <a:lnR>
+                      <a:noFill/>
+                    </a:lnR>
+                    <a:lnT>
+                      <a:noFill/>
+                    </a:lnT>
+                    <a:lnB>
+                      <a:noFill/>
+                    </a:lnB>
+                    <a:noFill/>
+                  </a:tcPr>
+                </a:tc>
+              </a:tr>
+              <a:tr h="184785">
+                <a:tc>
+                  <a:txBody>
+                    <a:bodyPr/>
+                    <a:p>
+                      <a:pPr algn="ctr" fontAlgn="ctr"/>
+                      <a:r>
+                        <a:rPr lang="zh-CN" altLang="en-US" sz="2000" b="1" i="0">
+                          <a:solidFill>
+                            <a:srgbClr val="657B83"/>
+                          </a:solidFill>
+                          <a:latin typeface="宋体" panose="02010600030101010101" pitchFamily="2" charset="-122"/>
+                          <a:ea typeface="宋体" panose="02010600030101010101" pitchFamily="2" charset="-122"/>
+                        </a:rPr>
+                        <a:t>无效 </a:t>
+                      </a:r>
+                      <a:r>
+                        <a:rPr lang="en-US" altLang="zh-CN" sz="2000" b="1" i="0">
+                          <a:solidFill>
+                            <a:srgbClr val="657B83"/>
+                          </a:solidFill>
+                          <a:latin typeface="宋体" panose="02010600030101010101" pitchFamily="2" charset="-122"/>
+                          <a:ea typeface="宋体" panose="02010600030101010101" pitchFamily="2" charset="-122"/>
+                        </a:rPr>
+                        <a:t>trial </a:t>
+                      </a:r>
+                      <a:r>
+                        <a:rPr lang="zh-CN" altLang="en-US" sz="2000" b="1" i="0">
+                          <a:solidFill>
+                            <a:srgbClr val="657B83"/>
+                          </a:solidFill>
+                          <a:latin typeface="宋体" panose="02010600030101010101" pitchFamily="2" charset="-122"/>
+                          <a:ea typeface="宋体" panose="02010600030101010101" pitchFamily="2" charset="-122"/>
+                        </a:rPr>
+                        <a:t>处理</a:t>
+                      </a:r>
+                      <a:endParaRPr lang="zh-CN" altLang="en-US" sz="2000" b="1" i="0">
+                        <a:solidFill>
+                          <a:srgbClr val="657B83"/>
+                        </a:solidFill>
+                        <a:latin typeface="宋体" panose="02010600030101010101" pitchFamily="2" charset="-122"/>
+                        <a:ea typeface="宋体" panose="02010600030101010101" pitchFamily="2" charset="-122"/>
+                      </a:endParaRPr>
+                    </a:p>
+                  </a:txBody>
+                  <a:tcPr marL="6667" marR="6667" marT="6667" marB="0" anchor="ctr" anchorCtr="0">
+                    <a:lnL>
+                      <a:noFill/>
+                    </a:lnL>
+                    <a:lnR>
+                      <a:noFill/>
+                    </a:lnR>
+                    <a:lnT>
+                      <a:noFill/>
+                    </a:lnT>
+                    <a:lnB>
+                      <a:noFill/>
+                    </a:lnB>
+                    <a:noFill/>
+                  </a:tcPr>
+                </a:tc>
+                <a:tc>
+                  <a:txBody>
+                    <a:bodyPr/>
+                    <a:p>
+                      <a:pPr algn="ctr" fontAlgn="ctr"/>
+                      <a:r>
+                        <a:rPr lang="zh-CN" altLang="en-US" sz="2000" b="1" i="0">
+                          <a:solidFill>
+                            <a:srgbClr val="657B83"/>
+                          </a:solidFill>
+                          <a:latin typeface="宋体" panose="02010600030101010101" pitchFamily="2" charset="-122"/>
+                          <a:ea typeface="宋体" panose="02010600030101010101" pitchFamily="2" charset="-122"/>
+                        </a:rPr>
+                        <a:t>丢弃后继续重试</a:t>
+                      </a:r>
+                      <a:endParaRPr lang="zh-CN" altLang="en-US" sz="2000" b="1" i="0">
+                        <a:solidFill>
+                          <a:srgbClr val="657B83"/>
+                        </a:solidFill>
+                        <a:latin typeface="宋体" panose="02010600030101010101" pitchFamily="2" charset="-122"/>
+                        <a:ea typeface="宋体" panose="02010600030101010101" pitchFamily="2" charset="-122"/>
+                      </a:endParaRPr>
+                    </a:p>
+                  </a:txBody>
+                  <a:tcPr marL="6667" marR="6667" marT="6667" marB="0" anchor="ctr" anchorCtr="0">
+                    <a:lnL>
+                      <a:noFill/>
+                    </a:lnL>
+                    <a:lnR>
+                      <a:noFill/>
+                    </a:lnR>
+                    <a:lnT>
+                      <a:noFill/>
+                    </a:lnT>
+                    <a:lnB>
+                      <a:noFill/>
+                    </a:lnB>
+                    <a:noFill/>
+                  </a:tcPr>
+                </a:tc>
+                <a:tc>
+                  <a:txBody>
+                    <a:bodyPr/>
+                    <a:p>
+                      <a:pPr algn="ctr" fontAlgn="ctr"/>
+                      <a:r>
+                        <a:rPr lang="zh-CN" altLang="en-US" sz="2000" b="1" i="0">
+                          <a:solidFill>
+                            <a:srgbClr val="657B83"/>
+                          </a:solidFill>
+                          <a:latin typeface="宋体" panose="02010600030101010101" pitchFamily="2" charset="-122"/>
+                          <a:ea typeface="宋体" panose="02010600030101010101" pitchFamily="2" charset="-122"/>
+                        </a:rPr>
+                        <a:t>丢弃且不重试</a:t>
+                      </a:r>
+                      <a:endParaRPr lang="zh-CN" altLang="en-US" sz="2000" b="1" i="0">
+                        <a:solidFill>
+                          <a:srgbClr val="657B83"/>
+                        </a:solidFill>
+                        <a:latin typeface="宋体" panose="02010600030101010101" pitchFamily="2" charset="-122"/>
+                        <a:ea typeface="宋体" panose="02010600030101010101" pitchFamily="2" charset="-122"/>
+                      </a:endParaRPr>
+                    </a:p>
+                  </a:txBody>
+                  <a:tcPr marL="6667" marR="6667" marT="6667" marB="0" anchor="ctr" anchorCtr="0">
+                    <a:lnL>
+                      <a:noFill/>
+                    </a:lnL>
+                    <a:lnR>
+                      <a:noFill/>
+                    </a:lnR>
+                    <a:lnT>
+                      <a:noFill/>
+                    </a:lnT>
+                    <a:lnB>
+                      <a:noFill/>
+                    </a:lnB>
+                    <a:noFill/>
+                  </a:tcPr>
+                </a:tc>
+                <a:tc>
+                  <a:txBody>
+                    <a:bodyPr/>
+                    <a:p>
+                      <a:pPr algn="ctr" fontAlgn="ctr"/>
+                      <a:r>
+                        <a:rPr lang="zh-CN" altLang="en-US" sz="2000" b="1" i="0">
+                          <a:solidFill>
+                            <a:srgbClr val="657B83"/>
+                          </a:solidFill>
+                          <a:latin typeface="宋体" panose="02010600030101010101" pitchFamily="2" charset="-122"/>
+                          <a:ea typeface="宋体" panose="02010600030101010101" pitchFamily="2" charset="-122"/>
+                        </a:rPr>
+                        <a:t>这是结果差异的重要来源</a:t>
+                      </a:r>
+                      <a:endParaRPr lang="zh-CN" altLang="en-US" sz="2000" b="1" i="0">
+                        <a:solidFill>
+                          <a:srgbClr val="657B83"/>
+                        </a:solidFill>
+                        <a:latin typeface="宋体" panose="02010600030101010101" pitchFamily="2" charset="-122"/>
+                        <a:ea typeface="宋体" panose="02010600030101010101" pitchFamily="2" charset="-122"/>
+                      </a:endParaRPr>
+                    </a:p>
+                  </a:txBody>
+                  <a:tcPr marL="6667" marR="6667" marT="6667" marB="0" anchor="ctr" anchorCtr="0">
+                    <a:lnL>
+                      <a:noFill/>
+                    </a:lnL>
+                    <a:lnR>
+                      <a:noFill/>
+                    </a:lnR>
+                    <a:lnT>
+                      <a:noFill/>
+                    </a:lnT>
+                    <a:lnB>
+                      <a:noFill/>
+                    </a:lnB>
+                    <a:noFill/>
+                  </a:tcPr>
+                </a:tc>
+              </a:tr>
+              <a:tr h="184150">
+                <a:tc>
+                  <a:txBody>
+                    <a:bodyPr/>
+                    <a:p>
+                      <a:pPr algn="ctr" fontAlgn="ctr"/>
+                      <a:r>
+                        <a:rPr lang="zh-CN" altLang="en-US" sz="2000" b="1" i="0">
+                          <a:solidFill>
+                            <a:srgbClr val="657B83"/>
+                          </a:solidFill>
+                          <a:latin typeface="宋体" panose="02010600030101010101" pitchFamily="2" charset="-122"/>
+                          <a:ea typeface="宋体" panose="02010600030101010101" pitchFamily="2" charset="-122"/>
+                        </a:rPr>
+                        <a:t>证据更新方式</a:t>
+                      </a:r>
+                      <a:endParaRPr lang="zh-CN" altLang="en-US" sz="2000" b="1" i="0">
+                        <a:solidFill>
+                          <a:srgbClr val="657B83"/>
+                        </a:solidFill>
+                        <a:latin typeface="宋体" panose="02010600030101010101" pitchFamily="2" charset="-122"/>
+                        <a:ea typeface="宋体" panose="02010600030101010101" pitchFamily="2" charset="-122"/>
+                      </a:endParaRPr>
+                    </a:p>
+                  </a:txBody>
+                  <a:tcPr marL="6667" marR="6667" marT="6667" marB="0" anchor="ctr" anchorCtr="0">
+                    <a:lnL>
+                      <a:noFill/>
+                    </a:lnL>
+                    <a:lnR>
+                      <a:noFill/>
+                    </a:lnR>
+                    <a:lnT>
+                      <a:noFill/>
+                    </a:lnT>
+                    <a:lnB>
+                      <a:noFill/>
+                    </a:lnB>
+                    <a:noFill/>
+                  </a:tcPr>
+                </a:tc>
+                <a:tc>
+                  <a:txBody>
+                    <a:bodyPr/>
+                    <a:p>
+                      <a:pPr algn="ctr" fontAlgn="ctr"/>
+                      <a:r>
+                        <a:rPr lang="zh-CN" altLang="en-US" sz="2000" b="1" i="0">
+                          <a:solidFill>
+                            <a:srgbClr val="657B83"/>
+                          </a:solidFill>
+                          <a:latin typeface="宋体" panose="02010600030101010101" pitchFamily="2" charset="-122"/>
+                          <a:ea typeface="宋体" panose="02010600030101010101" pitchFamily="2" charset="-122"/>
+                        </a:rPr>
+                        <a:t>逐时间步循环</a:t>
+                      </a:r>
+                      <a:endParaRPr lang="zh-CN" altLang="en-US" sz="2000" b="1" i="0">
+                        <a:solidFill>
+                          <a:srgbClr val="657B83"/>
+                        </a:solidFill>
+                        <a:latin typeface="宋体" panose="02010600030101010101" pitchFamily="2" charset="-122"/>
+                        <a:ea typeface="宋体" panose="02010600030101010101" pitchFamily="2" charset="-122"/>
+                      </a:endParaRPr>
+                    </a:p>
+                  </a:txBody>
+                  <a:tcPr marL="6667" marR="6667" marT="6667" marB="0" anchor="ctr" anchorCtr="0">
+                    <a:lnL>
+                      <a:noFill/>
+                    </a:lnL>
+                    <a:lnR>
+                      <a:noFill/>
+                    </a:lnR>
+                    <a:lnT>
+                      <a:noFill/>
+                    </a:lnT>
+                    <a:lnB>
+                      <a:noFill/>
+                    </a:lnB>
+                    <a:noFill/>
+                  </a:tcPr>
+                </a:tc>
+                <a:tc>
+                  <a:txBody>
+                    <a:bodyPr/>
+                    <a:p>
+                      <a:pPr algn="ctr" fontAlgn="ctr"/>
+                      <a:r>
+                        <a:rPr lang="zh-CN" altLang="en-US" sz="2000" b="1" i="0">
+                          <a:solidFill>
+                            <a:srgbClr val="657B83"/>
+                          </a:solidFill>
+                          <a:latin typeface="宋体" panose="02010600030101010101" pitchFamily="2" charset="-122"/>
+                          <a:ea typeface="宋体" panose="02010600030101010101" pitchFamily="2" charset="-122"/>
+                        </a:rPr>
+                        <a:t>向量化 </a:t>
+                      </a:r>
+                      <a:r>
+                        <a:rPr lang="en-US" altLang="zh-CN" sz="2000" b="1" i="0">
+                          <a:solidFill>
+                            <a:srgbClr val="657B83"/>
+                          </a:solidFill>
+                          <a:latin typeface="宋体" panose="02010600030101010101" pitchFamily="2" charset="-122"/>
+                          <a:ea typeface="宋体" panose="02010600030101010101" pitchFamily="2" charset="-122"/>
+                        </a:rPr>
+                        <a:t>noise + cumsum</a:t>
+                      </a:r>
+                      <a:endParaRPr lang="en-US" altLang="zh-CN" sz="2000" b="1" i="0">
+                        <a:solidFill>
+                          <a:srgbClr val="657B83"/>
+                        </a:solidFill>
+                        <a:latin typeface="宋体" panose="02010600030101010101" pitchFamily="2" charset="-122"/>
+                        <a:ea typeface="宋体" panose="02010600030101010101" pitchFamily="2" charset="-122"/>
+                      </a:endParaRPr>
+                    </a:p>
+                  </a:txBody>
+                  <a:tcPr marL="6667" marR="6667" marT="6667" marB="0" anchor="ctr" anchorCtr="0">
+                    <a:lnL>
+                      <a:noFill/>
+                    </a:lnL>
+                    <a:lnR>
+                      <a:noFill/>
+                    </a:lnR>
+                    <a:lnT>
+                      <a:noFill/>
+                    </a:lnT>
+                    <a:lnB>
+                      <a:noFill/>
+                    </a:lnB>
+                    <a:noFill/>
+                  </a:tcPr>
+                </a:tc>
+                <a:tc>
+                  <a:txBody>
+                    <a:bodyPr/>
+                    <a:p>
+                      <a:pPr algn="ctr" fontAlgn="ctr"/>
+                      <a:r>
+                        <a:rPr lang="zh-CN" altLang="en-US" sz="2000" b="1" i="0">
+                          <a:solidFill>
+                            <a:srgbClr val="657B83"/>
+                          </a:solidFill>
+                          <a:latin typeface="宋体" panose="02010600030101010101" pitchFamily="2" charset="-122"/>
+                          <a:ea typeface="宋体" panose="02010600030101010101" pitchFamily="2" charset="-122"/>
+                        </a:rPr>
+                        <a:t>理论思路相同，新版更快</a:t>
+                      </a:r>
+                      <a:endParaRPr lang="zh-CN" altLang="en-US" sz="2000" b="1" i="0">
+                        <a:solidFill>
+                          <a:srgbClr val="657B83"/>
+                        </a:solidFill>
+                        <a:latin typeface="宋体" panose="02010600030101010101" pitchFamily="2" charset="-122"/>
+                        <a:ea typeface="宋体" panose="02010600030101010101" pitchFamily="2" charset="-122"/>
+                      </a:endParaRPr>
+                    </a:p>
+                  </a:txBody>
+                  <a:tcPr marL="6667" marR="6667" marT="6667" marB="0" anchor="ctr" anchorCtr="0">
+                    <a:lnL>
+                      <a:noFill/>
+                    </a:lnL>
+                    <a:lnR>
+                      <a:noFill/>
+                    </a:lnR>
+                    <a:lnT>
+                      <a:noFill/>
+                    </a:lnT>
+                    <a:lnB>
+                      <a:noFill/>
+                    </a:lnB>
+                    <a:noFill/>
+                  </a:tcPr>
+                </a:tc>
+              </a:tr>
+              <a:tr h="162560">
+                <a:tc>
+                  <a:txBody>
+                    <a:bodyPr/>
+                    <a:p>
+                      <a:pPr algn="ctr" fontAlgn="ctr"/>
+                      <a:r>
+                        <a:rPr lang="zh-CN" altLang="en-US" sz="2000" b="1" i="0">
+                          <a:solidFill>
+                            <a:srgbClr val="657B83"/>
+                          </a:solidFill>
+                          <a:latin typeface="宋体" panose="02010600030101010101" pitchFamily="2" charset="-122"/>
+                          <a:ea typeface="宋体" panose="02010600030101010101" pitchFamily="2" charset="-122"/>
+                        </a:rPr>
+                        <a:t>大样本生成</a:t>
+                      </a:r>
+                      <a:endParaRPr lang="zh-CN" altLang="en-US" sz="2000" b="1" i="0">
+                        <a:solidFill>
+                          <a:srgbClr val="657B83"/>
+                        </a:solidFill>
+                        <a:latin typeface="宋体" panose="02010600030101010101" pitchFamily="2" charset="-122"/>
+                        <a:ea typeface="宋体" panose="02010600030101010101" pitchFamily="2" charset="-122"/>
+                      </a:endParaRPr>
+                    </a:p>
+                  </a:txBody>
+                  <a:tcPr marL="6667" marR="6667" marT="6667" marB="0" anchor="ctr" anchorCtr="0">
+                    <a:lnL>
+                      <a:noFill/>
+                    </a:lnL>
+                    <a:lnR>
+                      <a:noFill/>
+                    </a:lnR>
+                    <a:lnT>
+                      <a:noFill/>
+                    </a:lnT>
+                    <a:lnB>
+                      <a:noFill/>
+                    </a:lnB>
+                    <a:noFill/>
+                  </a:tcPr>
+                </a:tc>
+                <a:tc>
+                  <a:txBody>
+                    <a:bodyPr/>
+                    <a:p>
+                      <a:pPr algn="ctr" fontAlgn="ctr"/>
+                      <a:r>
+                        <a:rPr lang="zh-CN" altLang="en-US" sz="2000" b="1" i="0">
+                          <a:solidFill>
+                            <a:srgbClr val="657B83"/>
+                          </a:solidFill>
+                          <a:latin typeface="宋体" panose="02010600030101010101" pitchFamily="2" charset="-122"/>
+                          <a:ea typeface="宋体" panose="02010600030101010101" pitchFamily="2" charset="-122"/>
+                        </a:rPr>
+                        <a:t>单线程串行</a:t>
+                      </a:r>
+                      <a:endParaRPr lang="zh-CN" altLang="en-US" sz="2000" b="1" i="0">
+                        <a:solidFill>
+                          <a:srgbClr val="657B83"/>
+                        </a:solidFill>
+                        <a:latin typeface="宋体" panose="02010600030101010101" pitchFamily="2" charset="-122"/>
+                        <a:ea typeface="宋体" panose="02010600030101010101" pitchFamily="2" charset="-122"/>
+                      </a:endParaRPr>
+                    </a:p>
+                  </a:txBody>
+                  <a:tcPr marL="6667" marR="6667" marT="6667" marB="0" anchor="ctr" anchorCtr="0">
+                    <a:lnL>
+                      <a:noFill/>
+                    </a:lnL>
+                    <a:lnR>
+                      <a:noFill/>
+                    </a:lnR>
+                    <a:lnT>
+                      <a:noFill/>
+                    </a:lnT>
+                    <a:lnB>
+                      <a:noFill/>
+                    </a:lnB>
+                    <a:noFill/>
+                  </a:tcPr>
+                </a:tc>
+                <a:tc>
+                  <a:txBody>
+                    <a:bodyPr/>
+                    <a:p>
+                      <a:pPr algn="ctr" fontAlgn="ctr"/>
+                      <a:r>
+                        <a:rPr lang="en-US" altLang="zh-CN" sz="2000" b="1" i="0">
+                          <a:solidFill>
+                            <a:srgbClr val="657B83"/>
+                          </a:solidFill>
+                          <a:latin typeface="Consolas" panose="020B0609020204030204"/>
+                          <a:ea typeface="Consolas" panose="020B0609020204030204"/>
+                        </a:rPr>
+                        <a:t>batch + Parallel(joblib)</a:t>
+                      </a:r>
+                      <a:endParaRPr lang="en-US" altLang="zh-CN" sz="2000" b="1" i="0">
+                        <a:solidFill>
+                          <a:srgbClr val="657B83"/>
+                        </a:solidFill>
+                        <a:latin typeface="Consolas" panose="020B0609020204030204"/>
+                        <a:ea typeface="Consolas" panose="020B0609020204030204"/>
+                      </a:endParaRPr>
+                    </a:p>
+                  </a:txBody>
+                  <a:tcPr marL="6667" marR="6667" marT="6667" marB="0" anchor="ctr" anchorCtr="0">
+                    <a:lnL>
+                      <a:noFill/>
+                    </a:lnL>
+                    <a:lnR>
+                      <a:noFill/>
+                    </a:lnR>
+                    <a:lnT>
+                      <a:noFill/>
+                    </a:lnT>
+                    <a:lnB>
+                      <a:noFill/>
+                    </a:lnB>
+                    <a:noFill/>
+                  </a:tcPr>
+                </a:tc>
+                <a:tc>
+                  <a:txBody>
+                    <a:bodyPr/>
+                    <a:p>
+                      <a:pPr algn="ctr" fontAlgn="ctr"/>
+                      <a:r>
+                        <a:rPr lang="zh-CN" altLang="en-US" sz="2000" b="1" i="0">
+                          <a:solidFill>
+                            <a:srgbClr val="657B83"/>
+                          </a:solidFill>
+                          <a:latin typeface="宋体" panose="02010600030101010101" pitchFamily="2" charset="-122"/>
+                          <a:ea typeface="宋体" panose="02010600030101010101" pitchFamily="2" charset="-122"/>
+                        </a:rPr>
+                        <a:t>新版适合大规模模拟</a:t>
+                      </a:r>
+                      <a:endParaRPr lang="zh-CN" altLang="en-US" sz="2000" b="1" i="0">
+                        <a:solidFill>
+                          <a:srgbClr val="657B83"/>
+                        </a:solidFill>
+                        <a:latin typeface="宋体" panose="02010600030101010101" pitchFamily="2" charset="-122"/>
+                        <a:ea typeface="宋体" panose="02010600030101010101" pitchFamily="2" charset="-122"/>
+                      </a:endParaRPr>
+                    </a:p>
+                  </a:txBody>
+                  <a:tcPr marL="6667" marR="6667" marT="6667" marB="0" anchor="ctr" anchorCtr="0">
+                    <a:lnL>
+                      <a:noFill/>
+                    </a:lnL>
+                    <a:lnR>
+                      <a:noFill/>
+                    </a:lnR>
+                    <a:lnT>
+                      <a:noFill/>
+                    </a:lnT>
+                    <a:lnB>
+                      <a:noFill/>
+                    </a:lnB>
+                    <a:noFill/>
+                  </a:tcPr>
+                </a:tc>
+              </a:tr>
+              <a:tr h="186055">
+                <a:tc>
+                  <a:txBody>
+                    <a:bodyPr/>
+                    <a:p>
+                      <a:pPr algn="ctr" fontAlgn="ctr"/>
+                      <a:r>
+                        <a:rPr lang="zh-CN" altLang="en-US" sz="2000" b="1" i="0">
+                          <a:solidFill>
+                            <a:srgbClr val="657B83"/>
+                          </a:solidFill>
+                          <a:latin typeface="宋体" panose="02010600030101010101" pitchFamily="2" charset="-122"/>
+                          <a:ea typeface="宋体" panose="02010600030101010101" pitchFamily="2" charset="-122"/>
+                        </a:rPr>
+                        <a:t>校验机制</a:t>
+                      </a:r>
+                      <a:endParaRPr lang="zh-CN" altLang="en-US" sz="2000" b="1" i="0">
+                        <a:solidFill>
+                          <a:srgbClr val="657B83"/>
+                        </a:solidFill>
+                        <a:latin typeface="宋体" panose="02010600030101010101" pitchFamily="2" charset="-122"/>
+                        <a:ea typeface="宋体" panose="02010600030101010101" pitchFamily="2" charset="-122"/>
+                      </a:endParaRPr>
+                    </a:p>
+                  </a:txBody>
+                  <a:tcPr marL="6667" marR="6667" marT="6667" marB="0" anchor="ctr" anchorCtr="0">
+                    <a:lnL>
+                      <a:noFill/>
+                    </a:lnL>
+                    <a:lnR>
+                      <a:noFill/>
+                    </a:lnR>
+                    <a:lnT>
+                      <a:noFill/>
+                    </a:lnT>
+                    <a:lnB>
+                      <a:noFill/>
+                    </a:lnB>
+                    <a:noFill/>
+                  </a:tcPr>
+                </a:tc>
+                <a:tc>
+                  <a:txBody>
+                    <a:bodyPr/>
+                    <a:p>
+                      <a:pPr algn="ctr" fontAlgn="ctr"/>
+                      <a:r>
+                        <a:rPr lang="zh-CN" altLang="en-US" sz="2000" b="1" i="0">
+                          <a:solidFill>
+                            <a:srgbClr val="657B83"/>
+                          </a:solidFill>
+                          <a:latin typeface="宋体" panose="02010600030101010101" pitchFamily="2" charset="-122"/>
+                          <a:ea typeface="宋体" panose="02010600030101010101" pitchFamily="2" charset="-122"/>
+                        </a:rPr>
+                        <a:t>基本没有系统 </a:t>
+                      </a:r>
+                      <a:r>
+                        <a:rPr lang="en-US" altLang="zh-CN" sz="2000" b="1" i="0">
+                          <a:solidFill>
+                            <a:srgbClr val="657B83"/>
+                          </a:solidFill>
+                          <a:latin typeface="宋体" panose="02010600030101010101" pitchFamily="2" charset="-122"/>
+                          <a:ea typeface="宋体" panose="02010600030101010101" pitchFamily="2" charset="-122"/>
+                        </a:rPr>
+                        <a:t>benchmark</a:t>
+                      </a:r>
+                      <a:endParaRPr lang="en-US" altLang="zh-CN" sz="2000" b="1" i="0">
+                        <a:solidFill>
+                          <a:srgbClr val="657B83"/>
+                        </a:solidFill>
+                        <a:latin typeface="宋体" panose="02010600030101010101" pitchFamily="2" charset="-122"/>
+                        <a:ea typeface="宋体" panose="02010600030101010101" pitchFamily="2" charset="-122"/>
+                      </a:endParaRPr>
+                    </a:p>
+                  </a:txBody>
+                  <a:tcPr marL="6667" marR="6667" marT="6667" marB="0" anchor="ctr" anchorCtr="0">
+                    <a:lnL>
+                      <a:noFill/>
+                    </a:lnL>
+                    <a:lnR>
+                      <a:noFill/>
+                    </a:lnR>
+                    <a:lnT>
+                      <a:noFill/>
+                    </a:lnT>
+                    <a:lnB>
+                      <a:noFill/>
+                    </a:lnB>
+                    <a:noFill/>
+                  </a:tcPr>
+                </a:tc>
+                <a:tc>
+                  <a:txBody>
+                    <a:bodyPr/>
+                    <a:p>
+                      <a:pPr algn="ctr" fontAlgn="ctr"/>
+                      <a:r>
+                        <a:rPr lang="zh-CN" altLang="en-US" sz="2000" b="1" i="0">
+                          <a:solidFill>
+                            <a:srgbClr val="657B83"/>
+                          </a:solidFill>
+                          <a:latin typeface="宋体" panose="02010600030101010101" pitchFamily="2" charset="-122"/>
+                          <a:ea typeface="宋体" panose="02010600030101010101" pitchFamily="2" charset="-122"/>
+                        </a:rPr>
+                        <a:t>有 </a:t>
+                      </a:r>
+                      <a:r>
+                        <a:rPr lang="en-US" altLang="zh-CN" sz="2000" b="1" i="0">
+                          <a:solidFill>
+                            <a:srgbClr val="657B83"/>
+                          </a:solidFill>
+                          <a:latin typeface="宋体" panose="02010600030101010101" pitchFamily="2" charset="-122"/>
+                          <a:ea typeface="宋体" panose="02010600030101010101" pitchFamily="2" charset="-122"/>
+                        </a:rPr>
+                        <a:t>benchmark </a:t>
+                      </a:r>
+                      <a:r>
+                        <a:rPr lang="zh-CN" altLang="en-US" sz="2000" b="1" i="0">
+                          <a:solidFill>
+                            <a:srgbClr val="657B83"/>
+                          </a:solidFill>
+                          <a:latin typeface="宋体" panose="02010600030101010101" pitchFamily="2" charset="-122"/>
+                          <a:ea typeface="宋体" panose="02010600030101010101" pitchFamily="2" charset="-122"/>
+                        </a:rPr>
+                        <a:t>和原版</a:t>
+                      </a:r>
+                      <a:r>
+                        <a:rPr lang="en-US" altLang="zh-CN" sz="2000" b="1" i="0">
+                          <a:solidFill>
+                            <a:srgbClr val="657B83"/>
+                          </a:solidFill>
+                          <a:latin typeface="宋体" panose="02010600030101010101" pitchFamily="2" charset="-122"/>
+                          <a:ea typeface="宋体" panose="02010600030101010101" pitchFamily="2" charset="-122"/>
+                        </a:rPr>
+                        <a:t>/</a:t>
+                      </a:r>
+                      <a:r>
+                        <a:rPr lang="zh-CN" altLang="en-US" sz="2000" b="1" i="0">
+                          <a:solidFill>
+                            <a:srgbClr val="657B83"/>
+                          </a:solidFill>
+                          <a:latin typeface="宋体" panose="02010600030101010101" pitchFamily="2" charset="-122"/>
+                          <a:ea typeface="宋体" panose="02010600030101010101" pitchFamily="2" charset="-122"/>
+                        </a:rPr>
+                        <a:t>优化版对比图</a:t>
+                      </a:r>
+                      <a:endParaRPr lang="zh-CN" altLang="en-US" sz="2000" b="1" i="0">
+                        <a:solidFill>
+                          <a:srgbClr val="657B83"/>
+                        </a:solidFill>
+                        <a:latin typeface="宋体" panose="02010600030101010101" pitchFamily="2" charset="-122"/>
+                        <a:ea typeface="宋体" panose="02010600030101010101" pitchFamily="2" charset="-122"/>
+                      </a:endParaRPr>
+                    </a:p>
+                  </a:txBody>
+                  <a:tcPr marL="6667" marR="6667" marT="6667" marB="0" anchor="ctr" anchorCtr="0">
+                    <a:lnL>
+                      <a:noFill/>
+                    </a:lnL>
+                    <a:lnR>
+                      <a:noFill/>
+                    </a:lnR>
+                    <a:lnT>
+                      <a:noFill/>
+                    </a:lnT>
+                    <a:lnB>
+                      <a:noFill/>
+                    </a:lnB>
+                    <a:noFill/>
+                  </a:tcPr>
+                </a:tc>
+                <a:tc>
+                  <a:txBody>
+                    <a:bodyPr/>
+                    <a:p>
+                      <a:pPr algn="ctr" fontAlgn="ctr"/>
+                      <a:r>
+                        <a:rPr lang="zh-CN" altLang="en-US" sz="2000" b="1" i="0">
+                          <a:solidFill>
+                            <a:srgbClr val="657B83"/>
+                          </a:solidFill>
+                          <a:latin typeface="宋体" panose="02010600030101010101" pitchFamily="2" charset="-122"/>
+                          <a:ea typeface="宋体" panose="02010600030101010101" pitchFamily="2" charset="-122"/>
+                        </a:rPr>
+                        <a:t>新版更方便检查稳定性</a:t>
+                      </a:r>
+                      <a:endParaRPr lang="zh-CN" altLang="en-US" sz="2000" b="1" i="0">
+                        <a:solidFill>
+                          <a:srgbClr val="657B83"/>
+                        </a:solidFill>
+                        <a:latin typeface="宋体" panose="02010600030101010101" pitchFamily="2" charset="-122"/>
+                        <a:ea typeface="宋体" panose="02010600030101010101" pitchFamily="2" charset="-122"/>
+                      </a:endParaRPr>
+                    </a:p>
+                  </a:txBody>
+                  <a:tcPr marL="6667" marR="6667" marT="6667" marB="0" anchor="ctr" anchorCtr="0">
+                    <a:lnL>
+                      <a:noFill/>
+                    </a:lnL>
+                    <a:lnR>
+                      <a:noFill/>
+                    </a:lnR>
+                    <a:lnT>
+                      <a:noFill/>
+                    </a:lnT>
+                    <a:lnB>
+                      <a:noFill/>
+                    </a:lnB>
+                    <a:noFill/>
+                  </a:tcPr>
+                </a:tc>
+              </a:tr>
+              <a:tr h="319405">
+                <a:tc>
+                  <a:txBody>
+                    <a:bodyPr/>
+                    <a:p>
+                      <a:pPr algn="ctr" fontAlgn="ctr"/>
+                      <a:r>
+                        <a:rPr lang="zh-CN" altLang="en-US" sz="2000" b="1" i="0">
+                          <a:solidFill>
+                            <a:srgbClr val="657B83"/>
+                          </a:solidFill>
+                          <a:latin typeface="宋体" panose="02010600030101010101" pitchFamily="2" charset="-122"/>
+                          <a:ea typeface="宋体" panose="02010600030101010101" pitchFamily="2" charset="-122"/>
+                        </a:rPr>
+                        <a:t>输出文件思路</a:t>
+                      </a:r>
+                      <a:endParaRPr lang="zh-CN" altLang="en-US" sz="2000" b="1" i="0">
+                        <a:solidFill>
+                          <a:srgbClr val="657B83"/>
+                        </a:solidFill>
+                        <a:latin typeface="宋体" panose="02010600030101010101" pitchFamily="2" charset="-122"/>
+                        <a:ea typeface="宋体" panose="02010600030101010101" pitchFamily="2" charset="-122"/>
+                      </a:endParaRPr>
+                    </a:p>
+                  </a:txBody>
+                  <a:tcPr marL="6667" marR="6667" marT="6667" marB="0" anchor="ctr" anchorCtr="0">
+                    <a:lnL>
+                      <a:noFill/>
+                    </a:lnL>
+                    <a:lnR>
+                      <a:noFill/>
+                    </a:lnR>
+                    <a:lnT>
+                      <a:noFill/>
+                    </a:lnT>
+                    <a:lnB>
+                      <a:noFill/>
+                    </a:lnB>
+                    <a:noFill/>
+                  </a:tcPr>
+                </a:tc>
+                <a:tc>
+                  <a:txBody>
+                    <a:bodyPr/>
+                    <a:p>
+                      <a:pPr algn="ctr" fontAlgn="ctr"/>
+                      <a:r>
+                        <a:rPr lang="en-US" altLang="zh-CN" sz="2000" b="1" i="0">
+                          <a:solidFill>
+                            <a:srgbClr val="657B83"/>
+                          </a:solidFill>
+                          <a:latin typeface="Consolas" panose="020B0609020204030204"/>
+                          <a:ea typeface="Consolas" panose="020B0609020204030204"/>
+                        </a:rPr>
+                        <a:t>250430.csv</a:t>
+                      </a:r>
+                      <a:r>
+                        <a:rPr lang="zh-CN" altLang="en-US" sz="2000" b="1" i="0">
+                          <a:solidFill>
+                            <a:srgbClr val="657B83"/>
+                          </a:solidFill>
+                          <a:latin typeface="Consolas" panose="020B0609020204030204"/>
+                          <a:ea typeface="Consolas" panose="020B0609020204030204"/>
+                        </a:rPr>
+                        <a:t>、若干固定条件文件</a:t>
+                      </a:r>
+                      <a:endParaRPr lang="zh-CN" altLang="en-US" sz="2000" b="1" i="0">
+                        <a:solidFill>
+                          <a:srgbClr val="657B83"/>
+                        </a:solidFill>
+                        <a:latin typeface="Consolas" panose="020B0609020204030204"/>
+                        <a:ea typeface="Consolas" panose="020B0609020204030204"/>
+                      </a:endParaRPr>
+                    </a:p>
+                  </a:txBody>
+                  <a:tcPr marL="6667" marR="6667" marT="6667" marB="0" anchor="ctr" anchorCtr="0">
+                    <a:lnL>
+                      <a:noFill/>
+                    </a:lnL>
+                    <a:lnR>
+                      <a:noFill/>
+                    </a:lnR>
+                    <a:lnT>
+                      <a:noFill/>
+                    </a:lnT>
+                    <a:lnB>
+                      <a:noFill/>
+                    </a:lnB>
+                    <a:noFill/>
+                  </a:tcPr>
+                </a:tc>
+                <a:tc>
+                  <a:txBody>
+                    <a:bodyPr/>
+                    <a:p>
+                      <a:pPr algn="ctr" fontAlgn="ctr"/>
+                      <a:r>
+                        <a:rPr lang="zh-CN" altLang="en-US" sz="2000" b="1" i="0">
+                          <a:solidFill>
+                            <a:srgbClr val="657B83"/>
+                          </a:solidFill>
+                          <a:latin typeface="宋体" panose="02010600030101010101" pitchFamily="2" charset="-122"/>
+                          <a:ea typeface="宋体" panose="02010600030101010101" pitchFamily="2" charset="-122"/>
+                        </a:rPr>
+                        <a:t>主打 </a:t>
+                      </a:r>
+                      <a:r>
+                        <a:rPr lang="en-US" altLang="zh-CN" sz="2000" b="1" i="0">
+                          <a:solidFill>
+                            <a:srgbClr val="657B83"/>
+                          </a:solidFill>
+                          <a:latin typeface="宋体" panose="02010600030101010101" pitchFamily="2" charset="-122"/>
+                          <a:ea typeface="宋体" panose="02010600030101010101" pitchFamily="2" charset="-122"/>
+                        </a:rPr>
+                        <a:t>260220.csv</a:t>
+                      </a:r>
+                      <a:endParaRPr lang="en-US" altLang="zh-CN" sz="2000" b="1" i="0">
+                        <a:solidFill>
+                          <a:srgbClr val="657B83"/>
+                        </a:solidFill>
+                        <a:latin typeface="宋体" panose="02010600030101010101" pitchFamily="2" charset="-122"/>
+                        <a:ea typeface="宋体" panose="02010600030101010101" pitchFamily="2" charset="-122"/>
+                      </a:endParaRPr>
+                    </a:p>
+                  </a:txBody>
+                  <a:tcPr marL="6667" marR="6667" marT="6667" marB="0" anchor="ctr" anchorCtr="0">
+                    <a:lnL>
+                      <a:noFill/>
+                    </a:lnL>
+                    <a:lnR>
+                      <a:noFill/>
+                    </a:lnR>
+                    <a:lnT>
+                      <a:noFill/>
+                    </a:lnT>
+                    <a:lnB>
+                      <a:noFill/>
+                    </a:lnB>
+                    <a:noFill/>
+                  </a:tcPr>
+                </a:tc>
+                <a:tc>
+                  <a:txBody>
+                    <a:bodyPr/>
+                    <a:p>
+                      <a:pPr algn="ctr" fontAlgn="ctr"/>
+                      <a:r>
+                        <a:rPr lang="zh-CN" altLang="en-US" sz="2000" b="1" i="0">
+                          <a:solidFill>
+                            <a:srgbClr val="657B83"/>
+                          </a:solidFill>
+                          <a:latin typeface="宋体" panose="02010600030101010101" pitchFamily="2" charset="-122"/>
+                          <a:ea typeface="宋体" panose="02010600030101010101" pitchFamily="2" charset="-122"/>
+                        </a:rPr>
+                        <a:t>新版更聚焦随机设计空间数据</a:t>
+                      </a:r>
+                      <a:endParaRPr lang="zh-CN" altLang="en-US" sz="2000" b="1" i="0">
+                        <a:solidFill>
+                          <a:srgbClr val="657B83"/>
+                        </a:solidFill>
+                        <a:latin typeface="宋体" panose="02010600030101010101" pitchFamily="2" charset="-122"/>
+                        <a:ea typeface="宋体" panose="02010600030101010101" pitchFamily="2" charset="-122"/>
+                      </a:endParaRPr>
+                    </a:p>
+                  </a:txBody>
+                  <a:tcPr marL="6667" marR="6667" marT="6667" marB="0" anchor="ctr" anchorCtr="0">
+                    <a:lnL>
+                      <a:noFill/>
+                    </a:lnL>
+                    <a:lnR>
+                      <a:noFill/>
+                    </a:lnR>
+                    <a:lnT>
+                      <a:noFill/>
+                    </a:lnT>
+                    <a:lnB>
+                      <a:noFill/>
+                    </a:lnB>
+                    <a:noFill/>
+                  </a:tcPr>
+                </a:tc>
+              </a:tr>
+            </a:tbl>
+          </a:graphicData>
+        </a:graphic>
+      </p:graphicFrame>
     </p:spTree>
   </p:cSld>
   <p:clrMapOvr>
